--- a/lectures/04-DigitalLogic.pptx
+++ b/lectures/04-DigitalLogic.pptx
@@ -229,7 +229,7 @@
           <a:p>
             <a:fld id="{1C74C8C0-0C1E-D447-A6DA-5BF9E732D1EF}" type="datetimeFigureOut">
               <a:rPr lang="en-US" smtClean="0"/>
-              <a:t>1/7/26</a:t>
+              <a:t>3/22/26</a:t>
             </a:fld>
             <a:endParaRPr lang="en-US"/>
           </a:p>
@@ -1265,7 +1265,7 @@
           <a:p>
             <a:fld id="{D5D8E255-8371-B349-B2F5-F8C6C9FF431B}" type="datetimeFigureOut">
               <a:rPr lang="en-US" smtClean="0"/>
-              <a:t>1/7/26</a:t>
+              <a:t>3/22/26</a:t>
             </a:fld>
             <a:endParaRPr lang="en-US"/>
           </a:p>
@@ -1463,7 +1463,7 @@
           <a:p>
             <a:fld id="{D5D8E255-8371-B349-B2F5-F8C6C9FF431B}" type="datetimeFigureOut">
               <a:rPr lang="en-US" smtClean="0"/>
-              <a:t>1/7/26</a:t>
+              <a:t>3/22/26</a:t>
             </a:fld>
             <a:endParaRPr lang="en-US"/>
           </a:p>
@@ -1671,7 +1671,7 @@
           <a:p>
             <a:fld id="{D5D8E255-8371-B349-B2F5-F8C6C9FF431B}" type="datetimeFigureOut">
               <a:rPr lang="en-US" smtClean="0"/>
-              <a:t>1/7/26</a:t>
+              <a:t>3/22/26</a:t>
             </a:fld>
             <a:endParaRPr lang="en-US"/>
           </a:p>
@@ -1869,7 +1869,7 @@
           <a:p>
             <a:fld id="{D5D8E255-8371-B349-B2F5-F8C6C9FF431B}" type="datetimeFigureOut">
               <a:rPr lang="en-US" smtClean="0"/>
-              <a:t>1/7/26</a:t>
+              <a:t>3/22/26</a:t>
             </a:fld>
             <a:endParaRPr lang="en-US"/>
           </a:p>
@@ -2144,7 +2144,7 @@
           <a:p>
             <a:fld id="{D5D8E255-8371-B349-B2F5-F8C6C9FF431B}" type="datetimeFigureOut">
               <a:rPr lang="en-US" smtClean="0"/>
-              <a:t>1/7/26</a:t>
+              <a:t>3/22/26</a:t>
             </a:fld>
             <a:endParaRPr lang="en-US"/>
           </a:p>
@@ -2409,7 +2409,7 @@
           <a:p>
             <a:fld id="{D5D8E255-8371-B349-B2F5-F8C6C9FF431B}" type="datetimeFigureOut">
               <a:rPr lang="en-US" smtClean="0"/>
-              <a:t>1/7/26</a:t>
+              <a:t>3/22/26</a:t>
             </a:fld>
             <a:endParaRPr lang="en-US"/>
           </a:p>
@@ -2821,7 +2821,7 @@
           <a:p>
             <a:fld id="{D5D8E255-8371-B349-B2F5-F8C6C9FF431B}" type="datetimeFigureOut">
               <a:rPr lang="en-US" smtClean="0"/>
-              <a:t>1/7/26</a:t>
+              <a:t>3/22/26</a:t>
             </a:fld>
             <a:endParaRPr lang="en-US"/>
           </a:p>
@@ -2962,7 +2962,7 @@
           <a:p>
             <a:fld id="{D5D8E255-8371-B349-B2F5-F8C6C9FF431B}" type="datetimeFigureOut">
               <a:rPr lang="en-US" smtClean="0"/>
-              <a:t>1/7/26</a:t>
+              <a:t>3/22/26</a:t>
             </a:fld>
             <a:endParaRPr lang="en-US"/>
           </a:p>
@@ -3075,7 +3075,7 @@
           <a:p>
             <a:fld id="{D5D8E255-8371-B349-B2F5-F8C6C9FF431B}" type="datetimeFigureOut">
               <a:rPr lang="en-US" smtClean="0"/>
-              <a:t>1/7/26</a:t>
+              <a:t>3/22/26</a:t>
             </a:fld>
             <a:endParaRPr lang="en-US"/>
           </a:p>
@@ -3386,7 +3386,7 @@
           <a:p>
             <a:fld id="{D5D8E255-8371-B349-B2F5-F8C6C9FF431B}" type="datetimeFigureOut">
               <a:rPr lang="en-US" smtClean="0"/>
-              <a:t>1/7/26</a:t>
+              <a:t>3/22/26</a:t>
             </a:fld>
             <a:endParaRPr lang="en-US"/>
           </a:p>
@@ -3674,7 +3674,7 @@
           <a:p>
             <a:fld id="{D5D8E255-8371-B349-B2F5-F8C6C9FF431B}" type="datetimeFigureOut">
               <a:rPr lang="en-US" smtClean="0"/>
-              <a:t>1/7/26</a:t>
+              <a:t>3/22/26</a:t>
             </a:fld>
             <a:endParaRPr lang="en-US"/>
           </a:p>
@@ -3915,7 +3915,7 @@
           <a:p>
             <a:fld id="{D5D8E255-8371-B349-B2F5-F8C6C9FF431B}" type="datetimeFigureOut">
               <a:rPr lang="en-US" smtClean="0"/>
-              <a:t>1/7/26</a:t>
+              <a:t>3/22/26</a:t>
             </a:fld>
             <a:endParaRPr lang="en-US"/>
           </a:p>
@@ -4356,10 +4356,9 @@
           <a:lstStyle/>
           <a:p>
             <a:r>
-              <a:rPr lang="en-US"/>
+              <a:rPr lang="en-US" dirty="0"/>
               <a:t>Digital Logic</a:t>
             </a:r>
-            <a:endParaRPr lang="en-US" dirty="0"/>
           </a:p>
         </p:txBody>
       </p:sp>
@@ -9248,7 +9247,7 @@
           <a:p>
             <a:r>
               <a:rPr lang="en-US" dirty="0"/>
-              <a:t>Half Adder</a:t>
+              <a:t>Half Adder – Change Inputs</a:t>
             </a:r>
           </a:p>
         </p:txBody>
@@ -11854,7 +11853,7 @@
           <a:p>
             <a:r>
               <a:rPr lang="en-US" dirty="0"/>
-              <a:t>Full Adder</a:t>
+              <a:t>Full Adder Circuit</a:t>
             </a:r>
           </a:p>
         </p:txBody>
@@ -14137,13 +14136,13 @@
         </p:spPr>
         <p:txBody>
           <a:bodyPr>
-            <a:normAutofit fontScale="90000"/>
+            <a:normAutofit/>
           </a:bodyPr>
           <a:lstStyle/>
           <a:p>
             <a:r>
               <a:rPr lang="en-US" dirty="0"/>
-              <a:t>SR Flip-Flop / Latch</a:t>
+              <a:t>SR Flip-Flop</a:t>
             </a:r>
           </a:p>
         </p:txBody>
@@ -16485,8 +16484,12 @@
           <a:p>
             <a:pPr algn="ctr"/>
             <a:r>
+              <a:rPr lang="en-US"/>
+              <a:t>D </a:t>
+            </a:r>
+            <a:r>
               <a:rPr lang="en-US" dirty="0"/>
-              <a:t>Gated D Latch</a:t>
+              <a:t>Latch</a:t>
             </a:r>
           </a:p>
         </p:txBody>

--- a/lectures/04-DigitalLogic.pptx
+++ b/lectures/04-DigitalLogic.pptx
@@ -11,10 +11,10 @@
     <p:sldId id="256" r:id="rId2"/>
     <p:sldId id="334" r:id="rId3"/>
     <p:sldId id="330" r:id="rId4"/>
-    <p:sldId id="272" r:id="rId5"/>
+    <p:sldId id="428" r:id="rId5"/>
     <p:sldId id="273" r:id="rId6"/>
-    <p:sldId id="426" r:id="rId7"/>
-    <p:sldId id="427" r:id="rId8"/>
+    <p:sldId id="429" r:id="rId7"/>
+    <p:sldId id="430" r:id="rId8"/>
     <p:sldId id="358" r:id="rId9"/>
     <p:sldId id="356" r:id="rId10"/>
     <p:sldId id="357" r:id="rId11"/>
@@ -497,11 +497,11 @@
 </file>
 
 <file path=ppt/notesSlides/notesSlide1.xml><?xml version="1.0" encoding="utf-8"?>
-<p:notes xmlns:a="http://schemas.openxmlformats.org/drawingml/2006/main" xmlns:r="http://schemas.openxmlformats.org/officeDocument/2006/relationships" xmlns:p="http://schemas.openxmlformats.org/presentationml/2006/main" showMasterSp="0" showMasterPhAnim="0">
+<p:notes xmlns:a="http://schemas.openxmlformats.org/drawingml/2006/main" xmlns:r="http://schemas.openxmlformats.org/officeDocument/2006/relationships" xmlns:p="http://schemas.openxmlformats.org/presentationml/2006/main">
   <p:cSld>
     <p:spTree>
       <p:nvGrpSpPr>
-        <p:cNvPr id="1" name="Shape 351"/>
+        <p:cNvPr id="1" name=""/>
         <p:cNvGrpSpPr/>
         <p:nvPr/>
       </p:nvGrpSpPr>
@@ -515,70 +515,30 @@
       </p:grpSpPr>
       <p:sp>
         <p:nvSpPr>
-          <p:cNvPr id="352" name="Shape 352"/>
-          <p:cNvSpPr txBox="1">
+          <p:cNvPr id="2" name="Slide Image Placeholder 1"/>
+          <p:cNvSpPr>
+            <a:spLocks noGrp="1" noRot="1" noChangeAspect="1"/>
+          </p:cNvSpPr>
+          <p:nvPr>
+            <p:ph type="sldImg"/>
+          </p:nvPr>
+        </p:nvSpPr>
+        <p:spPr/>
+      </p:sp>
+      <p:sp>
+        <p:nvSpPr>
+          <p:cNvPr id="3" name="Notes Placeholder 2"/>
+          <p:cNvSpPr>
             <a:spLocks noGrp="1"/>
           </p:cNvSpPr>
           <p:nvPr>
             <p:ph type="body" idx="1"/>
           </p:nvPr>
         </p:nvSpPr>
-        <p:spPr>
-          <a:xfrm>
-            <a:off x="685800" y="4343400"/>
-            <a:ext cx="5486399" cy="4114800"/>
-          </a:xfrm>
-          <a:prstGeom prst="rect">
-            <a:avLst/>
-          </a:prstGeom>
-        </p:spPr>
+        <p:spPr/>
         <p:txBody>
-          <a:bodyPr lIns="91425" tIns="91425" rIns="91425" bIns="91425" anchor="ctr" anchorCtr="0">
-            <a:noAutofit/>
-          </a:bodyPr>
+          <a:bodyPr/>
           <a:lstStyle/>
-          <a:p>
-            <a:pPr lvl="0">
-              <a:spcBef>
-                <a:spcPts val="0"/>
-              </a:spcBef>
-              <a:buNone/>
-            </a:pPr>
-            <a:r>
-              <a:rPr lang="en-US" dirty="0"/>
-              <a:t>Software is stored in the main memory of the computer and then read from that main memory and executed by the CPU</a:t>
-            </a:r>
-          </a:p>
-          <a:p>
-            <a:pPr lvl="0">
-              <a:spcBef>
-                <a:spcPts val="0"/>
-              </a:spcBef>
-              <a:buNone/>
-            </a:pPr>
-            <a:endParaRPr lang="en-US" dirty="0"/>
-          </a:p>
-          <a:p>
-            <a:pPr lvl="0">
-              <a:spcBef>
-                <a:spcPts val="0"/>
-              </a:spcBef>
-              <a:buNone/>
-            </a:pPr>
-            <a:r>
-              <a:rPr lang="en-US" dirty="0"/>
-              <a:t>There is a thought bubble where the CPU is thinking, “What Next?”</a:t>
-            </a:r>
-          </a:p>
-          <a:p>
-            <a:pPr lvl="0">
-              <a:spcBef>
-                <a:spcPts val="0"/>
-              </a:spcBef>
-              <a:buNone/>
-            </a:pPr>
-            <a:endParaRPr lang="en-US" dirty="0"/>
-          </a:p>
           <a:p>
             <a:pPr marL="0" marR="0" lvl="0" indent="0" algn="l" defTabSz="914400" rtl="0" eaLnBrk="1" fontAlgn="auto" latinLnBrk="0" hangingPunct="1">
               <a:lnSpc>
@@ -599,73 +559,54 @@
             </a:pPr>
             <a:r>
               <a:rPr lang="en-US" dirty="0"/>
-              <a:t>This slide is from Lecture 1 / Chapter 1 of </a:t>
-            </a:r>
-            <a:r>
-              <a:rPr lang="en-US" dirty="0">
-                <a:solidFill>
-                  <a:schemeClr val="bg1"/>
-                </a:solidFill>
-              </a:rPr>
-              <a:t>Python for Everybody (www.py4e.com)</a:t>
-            </a:r>
-          </a:p>
-          <a:p>
-            <a:pPr lvl="0">
-              <a:spcBef>
-                <a:spcPts val="0"/>
-              </a:spcBef>
-              <a:buNone/>
-            </a:pPr>
-            <a:endParaRPr dirty="0"/>
+              <a:t>Reference: https://</a:t>
+            </a:r>
+            <a:r>
+              <a:rPr lang="en-US" dirty="0" err="1"/>
+              <a:t>en.wikipedia.org</a:t>
+            </a:r>
+            <a:r>
+              <a:rPr lang="en-US" dirty="0"/>
+              <a:t>/wiki/</a:t>
+            </a:r>
+            <a:r>
+              <a:rPr lang="en-US" dirty="0" err="1"/>
+              <a:t>Printed_circuit_board</a:t>
+            </a:r>
+            <a:endParaRPr lang="en-US" dirty="0"/>
+          </a:p>
+          <a:p>
+            <a:endParaRPr lang="en-US" dirty="0"/>
           </a:p>
         </p:txBody>
       </p:sp>
       <p:sp>
         <p:nvSpPr>
-          <p:cNvPr id="353" name="Shape 353"/>
+          <p:cNvPr id="4" name="Slide Number Placeholder 3"/>
           <p:cNvSpPr>
-            <a:spLocks noGrp="1" noRot="1" noChangeAspect="1"/>
+            <a:spLocks noGrp="1"/>
           </p:cNvSpPr>
           <p:nvPr>
-            <p:ph type="sldImg" idx="2"/>
+            <p:ph type="sldNum" sz="quarter" idx="5"/>
           </p:nvPr>
         </p:nvSpPr>
-        <p:spPr>
-          <a:xfrm>
-            <a:off x="381000" y="685800"/>
-            <a:ext cx="6096000" cy="3429000"/>
-          </a:xfrm>
-          <a:custGeom>
-            <a:avLst/>
-            <a:gdLst/>
-            <a:ahLst/>
-            <a:cxnLst/>
-            <a:rect l="0" t="0" r="0" b="0"/>
-            <a:pathLst>
-              <a:path w="120000" h="120000" extrusionOk="0">
-                <a:moveTo>
-                  <a:pt x="0" y="0"/>
-                </a:moveTo>
-                <a:lnTo>
-                  <a:pt x="120000" y="0"/>
-                </a:lnTo>
-                <a:lnTo>
-                  <a:pt x="120000" y="120000"/>
-                </a:lnTo>
-                <a:lnTo>
-                  <a:pt x="0" y="120000"/>
-                </a:lnTo>
-                <a:close/>
-              </a:path>
-            </a:pathLst>
-          </a:custGeom>
-        </p:spPr>
+        <p:spPr/>
+        <p:txBody>
+          <a:bodyPr/>
+          <a:lstStyle/>
+          <a:p>
+            <a:fld id="{9F4414A0-4E43-B244-BF62-FDB8F38845D2}" type="slidenum">
+              <a:rPr lang="en-US" smtClean="0"/>
+              <a:t>3</a:t>
+            </a:fld>
+            <a:endParaRPr lang="en-US"/>
+          </a:p>
+        </p:txBody>
       </p:sp>
     </p:spTree>
     <p:extLst>
       <p:ext uri="{BB962C8B-B14F-4D97-AF65-F5344CB8AC3E}">
-        <p14:creationId xmlns:p14="http://schemas.microsoft.com/office/powerpoint/2010/main" val="1689426381"/>
+        <p14:creationId xmlns:p14="http://schemas.microsoft.com/office/powerpoint/2010/main" val="1525980310"/>
       </p:ext>
     </p:extLst>
   </p:cSld>
@@ -721,7 +662,7 @@
           <a:p>
             <a:r>
               <a:rPr lang="en-US" dirty="0"/>
-              <a:t>A screen shot of the half adder component from the gates layout tool from this course.  It has A and B inputs as well as Sum and Carry outputs.</a:t>
+              <a:t>This is showing base-2 1 + 1 = 10 or in Base 10 1 + 1 = 2</a:t>
             </a:r>
           </a:p>
           <a:p>
@@ -730,8 +671,186 @@
           <a:p>
             <a:r>
               <a:rPr lang="en-US" dirty="0"/>
-              <a:t>A half adder circuit made up of an XOR and AND gate with A and B inputs as sum and carry outputs.  This is laid out using the gates tool from this course.</a:t>
-            </a:r>
+              <a:t>This is showing base-2 11 + 1 = 100 or in Base 10 3 + 1 = 4</a:t>
+            </a:r>
+          </a:p>
+          <a:p>
+            <a:endParaRPr lang="en-US" dirty="0"/>
+          </a:p>
+          <a:p>
+            <a:pPr marL="0" marR="0" lvl="0" indent="0" algn="l" defTabSz="914400" rtl="0" eaLnBrk="1" fontAlgn="auto" latinLnBrk="0" hangingPunct="1">
+              <a:lnSpc>
+                <a:spcPct val="100000"/>
+              </a:lnSpc>
+              <a:spcBef>
+                <a:spcPts val="0"/>
+              </a:spcBef>
+              <a:spcAft>
+                <a:spcPts val="0"/>
+              </a:spcAft>
+              <a:buClrTx/>
+              <a:buSzTx/>
+              <a:buFontTx/>
+              <a:buNone/>
+              <a:tabLst/>
+              <a:defRPr/>
+            </a:pPr>
+            <a:r>
+              <a:rPr lang="en-US" dirty="0"/>
+              <a:t>This is showing base-2 10 + 10 = 100 or in Base 10 2 + 2 = 4</a:t>
+            </a:r>
+          </a:p>
+          <a:p>
+            <a:endParaRPr lang="en-US" dirty="0"/>
+          </a:p>
+          <a:p>
+            <a:pPr marL="0" marR="0" lvl="0" indent="0" algn="l" defTabSz="914400" rtl="0" eaLnBrk="1" fontAlgn="auto" latinLnBrk="0" hangingPunct="1">
+              <a:lnSpc>
+                <a:spcPct val="100000"/>
+              </a:lnSpc>
+              <a:spcBef>
+                <a:spcPts val="0"/>
+              </a:spcBef>
+              <a:spcAft>
+                <a:spcPts val="0"/>
+              </a:spcAft>
+              <a:buClrTx/>
+              <a:buSzTx/>
+              <a:buFontTx/>
+              <a:buNone/>
+              <a:tabLst/>
+              <a:defRPr/>
+            </a:pPr>
+            <a:r>
+              <a:rPr lang="en-US" dirty="0"/>
+              <a:t>This is showing base-2 11 + 10 = 101 or in Base 10 3 + 2 = 5</a:t>
+            </a:r>
+          </a:p>
+          <a:p>
+            <a:pPr marL="0" marR="0" lvl="0" indent="0" algn="l" defTabSz="914400" rtl="0" eaLnBrk="1" fontAlgn="auto" latinLnBrk="0" hangingPunct="1">
+              <a:lnSpc>
+                <a:spcPct val="100000"/>
+              </a:lnSpc>
+              <a:spcBef>
+                <a:spcPts val="0"/>
+              </a:spcBef>
+              <a:spcAft>
+                <a:spcPts val="0"/>
+              </a:spcAft>
+              <a:buClrTx/>
+              <a:buSzTx/>
+              <a:buFontTx/>
+              <a:buNone/>
+              <a:tabLst/>
+              <a:defRPr/>
+            </a:pPr>
+            <a:endParaRPr lang="en-US" dirty="0"/>
+          </a:p>
+          <a:p>
+            <a:pPr marL="0" marR="0" lvl="0" indent="0" algn="l" defTabSz="914400" rtl="0" eaLnBrk="1" fontAlgn="auto" latinLnBrk="0" hangingPunct="1">
+              <a:lnSpc>
+                <a:spcPct val="100000"/>
+              </a:lnSpc>
+              <a:spcBef>
+                <a:spcPts val="0"/>
+              </a:spcBef>
+              <a:spcAft>
+                <a:spcPts val="0"/>
+              </a:spcAft>
+              <a:buClrTx/>
+              <a:buSzTx/>
+              <a:buFontTx/>
+              <a:buNone/>
+              <a:tabLst/>
+              <a:defRPr/>
+            </a:pPr>
+            <a:r>
+              <a:rPr lang="en-US" dirty="0"/>
+              <a:t>This is showing base-2 100 + 100 = 1000 or in Base 10 4 + 4 = 8</a:t>
+            </a:r>
+          </a:p>
+          <a:p>
+            <a:pPr marL="0" marR="0" lvl="0" indent="0" algn="l" defTabSz="914400" rtl="0" eaLnBrk="1" fontAlgn="auto" latinLnBrk="0" hangingPunct="1">
+              <a:lnSpc>
+                <a:spcPct val="100000"/>
+              </a:lnSpc>
+              <a:spcBef>
+                <a:spcPts val="0"/>
+              </a:spcBef>
+              <a:spcAft>
+                <a:spcPts val="0"/>
+              </a:spcAft>
+              <a:buClrTx/>
+              <a:buSzTx/>
+              <a:buFontTx/>
+              <a:buNone/>
+              <a:tabLst/>
+              <a:defRPr/>
+            </a:pPr>
+            <a:endParaRPr lang="en-US" dirty="0"/>
+          </a:p>
+          <a:p>
+            <a:pPr marL="0" marR="0" lvl="0" indent="0" algn="l" defTabSz="914400" rtl="0" eaLnBrk="1" fontAlgn="auto" latinLnBrk="0" hangingPunct="1">
+              <a:lnSpc>
+                <a:spcPct val="100000"/>
+              </a:lnSpc>
+              <a:spcBef>
+                <a:spcPts val="0"/>
+              </a:spcBef>
+              <a:spcAft>
+                <a:spcPts val="0"/>
+              </a:spcAft>
+              <a:buClrTx/>
+              <a:buSzTx/>
+              <a:buFontTx/>
+              <a:buNone/>
+              <a:tabLst/>
+              <a:defRPr/>
+            </a:pPr>
+            <a:r>
+              <a:rPr lang="en-US" dirty="0"/>
+              <a:t>This is showing base-2 111 + 1 = 1000 or in Base 10 7 + 1 = 8</a:t>
+            </a:r>
+          </a:p>
+          <a:p>
+            <a:pPr marL="0" marR="0" lvl="0" indent="0" algn="l" defTabSz="914400" rtl="0" eaLnBrk="1" fontAlgn="auto" latinLnBrk="0" hangingPunct="1">
+              <a:lnSpc>
+                <a:spcPct val="100000"/>
+              </a:lnSpc>
+              <a:spcBef>
+                <a:spcPts val="0"/>
+              </a:spcBef>
+              <a:spcAft>
+                <a:spcPts val="0"/>
+              </a:spcAft>
+              <a:buClrTx/>
+              <a:buSzTx/>
+              <a:buFontTx/>
+              <a:buNone/>
+              <a:tabLst/>
+              <a:defRPr/>
+            </a:pPr>
+            <a:endParaRPr lang="en-US" dirty="0"/>
+          </a:p>
+          <a:p>
+            <a:pPr marL="0" marR="0" lvl="0" indent="0" algn="l" defTabSz="914400" rtl="0" eaLnBrk="1" fontAlgn="auto" latinLnBrk="0" hangingPunct="1">
+              <a:lnSpc>
+                <a:spcPct val="100000"/>
+              </a:lnSpc>
+              <a:spcBef>
+                <a:spcPts val="0"/>
+              </a:spcBef>
+              <a:spcAft>
+                <a:spcPts val="0"/>
+              </a:spcAft>
+              <a:buClrTx/>
+              <a:buSzTx/>
+              <a:buFontTx/>
+              <a:buNone/>
+              <a:tabLst/>
+              <a:defRPr/>
+            </a:pPr>
+            <a:endParaRPr lang="en-US" dirty="0"/>
           </a:p>
           <a:p>
             <a:endParaRPr lang="en-US" dirty="0"/>
@@ -755,7 +874,7 @@
           <a:p>
             <a:fld id="{9F4414A0-4E43-B244-BF62-FDB8F38845D2}" type="slidenum">
               <a:rPr lang="en-US" smtClean="0"/>
-              <a:t>18</a:t>
+              <a:t>17</a:t>
             </a:fld>
             <a:endParaRPr lang="en-US"/>
           </a:p>
@@ -764,7 +883,7 @@
     </p:spTree>
     <p:extLst>
       <p:ext uri="{BB962C8B-B14F-4D97-AF65-F5344CB8AC3E}">
-        <p14:creationId xmlns:p14="http://schemas.microsoft.com/office/powerpoint/2010/main" val="2477920850"/>
+        <p14:creationId xmlns:p14="http://schemas.microsoft.com/office/powerpoint/2010/main" val="2922670029"/>
       </p:ext>
     </p:extLst>
   </p:cSld>
@@ -823,6 +942,18 @@
               <a:t>A screen shot of the half adder component from the gates layout tool from this course.  It has A and B inputs as well as Sum and Carry outputs.</a:t>
             </a:r>
           </a:p>
+          <a:p>
+            <a:endParaRPr lang="en-US" dirty="0"/>
+          </a:p>
+          <a:p>
+            <a:r>
+              <a:rPr lang="en-US" dirty="0"/>
+              <a:t>A half adder circuit made up of an XOR and AND gate with A and B inputs as sum and carry outputs.  This is laid out using the gates tool from this course.</a:t>
+            </a:r>
+          </a:p>
+          <a:p>
+            <a:endParaRPr lang="en-US" dirty="0"/>
+          </a:p>
         </p:txBody>
       </p:sp>
       <p:sp>
@@ -842,7 +973,7 @@
           <a:p>
             <a:fld id="{9F4414A0-4E43-B244-BF62-FDB8F38845D2}" type="slidenum">
               <a:rPr lang="en-US" smtClean="0"/>
-              <a:t>19</a:t>
+              <a:t>18</a:t>
             </a:fld>
             <a:endParaRPr lang="en-US"/>
           </a:p>
@@ -851,7 +982,7 @@
     </p:spTree>
     <p:extLst>
       <p:ext uri="{BB962C8B-B14F-4D97-AF65-F5344CB8AC3E}">
-        <p14:creationId xmlns:p14="http://schemas.microsoft.com/office/powerpoint/2010/main" val="2844061181"/>
+        <p14:creationId xmlns:p14="http://schemas.microsoft.com/office/powerpoint/2010/main" val="2477920850"/>
       </p:ext>
     </p:extLst>
   </p:cSld>
@@ -906,8 +1037,8 @@
           <a:lstStyle/>
           <a:p>
             <a:r>
-              <a:rPr lang="en-US" b="0" dirty="0"/>
-              <a:t>A screen shot of the full adder component from the gates layout tool from this course.  It has A, B, and Carry In inputs as well as Sum and Carry Out outputs.</a:t>
+              <a:rPr lang="en-US" dirty="0"/>
+              <a:t>A screen shot of the half adder component from the gates layout tool from this course.  It has A and B inputs as well as Sum and Carry outputs.</a:t>
             </a:r>
           </a:p>
         </p:txBody>
@@ -929,7 +1060,7 @@
           <a:p>
             <a:fld id="{9F4414A0-4E43-B244-BF62-FDB8F38845D2}" type="slidenum">
               <a:rPr lang="en-US" smtClean="0"/>
-              <a:t>20</a:t>
+              <a:t>19</a:t>
             </a:fld>
             <a:endParaRPr lang="en-US"/>
           </a:p>
@@ -938,7 +1069,7 @@
     </p:spTree>
     <p:extLst>
       <p:ext uri="{BB962C8B-B14F-4D97-AF65-F5344CB8AC3E}">
-        <p14:creationId xmlns:p14="http://schemas.microsoft.com/office/powerpoint/2010/main" val="3687191117"/>
+        <p14:creationId xmlns:p14="http://schemas.microsoft.com/office/powerpoint/2010/main" val="2844061181"/>
       </p:ext>
     </p:extLst>
   </p:cSld>
@@ -993,25 +1124,8 @@
           <a:lstStyle/>
           <a:p>
             <a:r>
-              <a:rPr lang="en-US" dirty="0"/>
-              <a:t>A diagram of a full adder circuit with inputs A and B with a Carry-In of CIN.  The output is single bit SUM and a single but Carry Out.  The circuit </a:t>
-            </a:r>
-            <a:r>
-              <a:rPr lang="en-US" dirty="0" err="1"/>
-              <a:t>consistes</a:t>
-            </a:r>
-            <a:r>
-              <a:rPr lang="en-US" dirty="0"/>
-              <a:t> of two half adders connected and an OR gate to compute the carry out when all the inputs are 1.  it is showing 1 + 0 + 1 = 2</a:t>
-            </a:r>
-          </a:p>
-          <a:p>
-            <a:endParaRPr lang="en-US" dirty="0"/>
-          </a:p>
-          <a:p>
-            <a:r>
-              <a:rPr lang="en-US" dirty="0"/>
-              <a:t>A mathematical equation showing the sum of 1 (CIN) + 0 (A) + 1 (B) to  be 1 0 base-2 or 2 base 10.</a:t>
+              <a:rPr lang="en-US" b="0" dirty="0"/>
+              <a:t>A screen shot of the full adder component from the gates layout tool from this course.  It has A, B, and Carry In inputs as well as Sum and Carry Out outputs.</a:t>
             </a:r>
           </a:p>
         </p:txBody>
@@ -1033,7 +1147,7 @@
           <a:p>
             <a:fld id="{9F4414A0-4E43-B244-BF62-FDB8F38845D2}" type="slidenum">
               <a:rPr lang="en-US" smtClean="0"/>
-              <a:t>21</a:t>
+              <a:t>20</a:t>
             </a:fld>
             <a:endParaRPr lang="en-US"/>
           </a:p>
@@ -1042,7 +1156,7 @@
     </p:spTree>
     <p:extLst>
       <p:ext uri="{BB962C8B-B14F-4D97-AF65-F5344CB8AC3E}">
-        <p14:creationId xmlns:p14="http://schemas.microsoft.com/office/powerpoint/2010/main" val="2670598239"/>
+        <p14:creationId xmlns:p14="http://schemas.microsoft.com/office/powerpoint/2010/main" val="3687191117"/>
       </p:ext>
     </p:extLst>
   </p:cSld>
@@ -1098,7 +1212,15 @@
           <a:p>
             <a:r>
               <a:rPr lang="en-US" dirty="0"/>
-              <a:t>This is the addition of two 3-bit base 2 numbers 0 1 0 + 1 0 1 = 1 1 1 - or in base 10 2 + 5 = 7</a:t>
+              <a:t>A diagram of a full adder circuit with inputs A and B with a Carry-In of CIN.  The output is single bit SUM and a single but Carry Out.  The circuit </a:t>
+            </a:r>
+            <a:r>
+              <a:rPr lang="en-US" dirty="0" err="1"/>
+              <a:t>consistes</a:t>
+            </a:r>
+            <a:r>
+              <a:rPr lang="en-US" dirty="0"/>
+              <a:t> of two half adders connected and an OR gate to compute the carry out when all the inputs are 1.  it is showing 1 + 0 + 1 = 2</a:t>
             </a:r>
           </a:p>
           <a:p>
@@ -1107,7 +1229,7 @@
           <a:p>
             <a:r>
               <a:rPr lang="en-US" dirty="0"/>
-              <a:t>This is an example from the gates tool showing building a three-bit adder using and connecting three one-bit full adder components and propagating the carry-out from each adder to the carry-in of the next adder.</a:t>
+              <a:t>A mathematical equation showing the sum of 1 (CIN) + 0 (A) + 1 (B) to  be 1 0 base-2 or 2 base 10.</a:t>
             </a:r>
           </a:p>
         </p:txBody>
@@ -1129,7 +1251,7 @@
           <a:p>
             <a:fld id="{9F4414A0-4E43-B244-BF62-FDB8F38845D2}" type="slidenum">
               <a:rPr lang="en-US" smtClean="0"/>
-              <a:t>22</a:t>
+              <a:t>21</a:t>
             </a:fld>
             <a:endParaRPr lang="en-US"/>
           </a:p>
@@ -1138,7 +1260,7 @@
     </p:spTree>
     <p:extLst>
       <p:ext uri="{BB962C8B-B14F-4D97-AF65-F5344CB8AC3E}">
-        <p14:creationId xmlns:p14="http://schemas.microsoft.com/office/powerpoint/2010/main" val="2833135063"/>
+        <p14:creationId xmlns:p14="http://schemas.microsoft.com/office/powerpoint/2010/main" val="2670598239"/>
       </p:ext>
     </p:extLst>
   </p:cSld>
@@ -1194,7 +1316,7 @@
           <a:p>
             <a:r>
               <a:rPr lang="en-US" dirty="0"/>
-              <a:t>This is an addition showing showing 010 (2) + 101 (5) = 111 (7)</a:t>
+              <a:t>This is the addition of two 3-bit base 2 numbers 0 1 0 + 1 0 1 = 1 1 1 - or in base 10 2 + 5 = 7</a:t>
             </a:r>
           </a:p>
           <a:p>
@@ -1203,7 +1325,7 @@
           <a:p>
             <a:r>
               <a:rPr lang="en-US" dirty="0"/>
-              <a:t>This is a circuit showing the use of the three-bit adder component from the gates tool..  It is showing 010 (2) + 101 (5) = 111 (7)</a:t>
+              <a:t>This is an example from the gates tool showing building a three-bit adder using and connecting three one-bit full adder components and propagating the carry-out from each adder to the carry-in of the next adder.</a:t>
             </a:r>
           </a:p>
         </p:txBody>
@@ -1225,7 +1347,7 @@
           <a:p>
             <a:fld id="{9F4414A0-4E43-B244-BF62-FDB8F38845D2}" type="slidenum">
               <a:rPr lang="en-US" smtClean="0"/>
-              <a:t>23</a:t>
+              <a:t>22</a:t>
             </a:fld>
             <a:endParaRPr lang="en-US"/>
           </a:p>
@@ -1234,7 +1356,7 @@
     </p:spTree>
     <p:extLst>
       <p:ext uri="{BB962C8B-B14F-4D97-AF65-F5344CB8AC3E}">
-        <p14:creationId xmlns:p14="http://schemas.microsoft.com/office/powerpoint/2010/main" val="1350424685"/>
+        <p14:creationId xmlns:p14="http://schemas.microsoft.com/office/powerpoint/2010/main" val="2833135063"/>
       </p:ext>
     </p:extLst>
   </p:cSld>
@@ -1288,38 +1410,19 @@
           <a:bodyPr/>
           <a:lstStyle/>
           <a:p>
-            <a:pPr marL="0" marR="0" lvl="0" indent="0" algn="l" defTabSz="914400" rtl="0" eaLnBrk="1" fontAlgn="auto" latinLnBrk="0" hangingPunct="1">
-              <a:lnSpc>
-                <a:spcPct val="100000"/>
-              </a:lnSpc>
-              <a:spcBef>
-                <a:spcPts val="0"/>
-              </a:spcBef>
-              <a:spcAft>
-                <a:spcPts val="0"/>
-              </a:spcAft>
-              <a:buClrTx/>
-              <a:buSzTx/>
-              <a:buFontTx/>
-              <a:buNone/>
-              <a:tabLst/>
-              <a:defRPr/>
-            </a:pPr>
             <a:r>
               <a:rPr lang="en-US" dirty="0"/>
-              <a:t>Reference: https://</a:t>
-            </a:r>
-            <a:r>
-              <a:rPr lang="en-US" dirty="0" err="1"/>
-              <a:t>en.wikipedia.org</a:t>
-            </a:r>
+              <a:t>This is an addition showing showing 010 (2) + 101 (5) = 111 (7)</a:t>
+            </a:r>
+          </a:p>
+          <a:p>
+            <a:endParaRPr lang="en-US" dirty="0"/>
+          </a:p>
+          <a:p>
             <a:r>
               <a:rPr lang="en-US" dirty="0"/>
-              <a:t>/wiki/Flip-flop_%28electronics%29</a:t>
-            </a:r>
-          </a:p>
-          <a:p>
-            <a:endParaRPr lang="en-US" dirty="0"/>
+              <a:t>This is a circuit showing the use of the three-bit adder component from the gates tool..  It is showing 010 (2) + 101 (5) = 111 (7)</a:t>
+            </a:r>
           </a:p>
         </p:txBody>
       </p:sp>
@@ -1340,7 +1443,7 @@
           <a:p>
             <a:fld id="{9F4414A0-4E43-B244-BF62-FDB8F38845D2}" type="slidenum">
               <a:rPr lang="en-US" smtClean="0"/>
-              <a:t>25</a:t>
+              <a:t>23</a:t>
             </a:fld>
             <a:endParaRPr lang="en-US"/>
           </a:p>
@@ -1349,7 +1452,7 @@
     </p:spTree>
     <p:extLst>
       <p:ext uri="{BB962C8B-B14F-4D97-AF65-F5344CB8AC3E}">
-        <p14:creationId xmlns:p14="http://schemas.microsoft.com/office/powerpoint/2010/main" val="1211918772"/>
+        <p14:creationId xmlns:p14="http://schemas.microsoft.com/office/powerpoint/2010/main" val="1350424685"/>
       </p:ext>
     </p:extLst>
   </p:cSld>
@@ -1403,9 +1506,26 @@
           <a:bodyPr/>
           <a:lstStyle/>
           <a:p>
+            <a:pPr marL="0" marR="0" lvl="0" indent="0" algn="l" defTabSz="914400" rtl="0" eaLnBrk="1" fontAlgn="auto" latinLnBrk="0" hangingPunct="1">
+              <a:lnSpc>
+                <a:spcPct val="100000"/>
+              </a:lnSpc>
+              <a:spcBef>
+                <a:spcPts val="0"/>
+              </a:spcBef>
+              <a:spcAft>
+                <a:spcPts val="0"/>
+              </a:spcAft>
+              <a:buClrTx/>
+              <a:buSzTx/>
+              <a:buFontTx/>
+              <a:buNone/>
+              <a:tabLst/>
+              <a:defRPr/>
+            </a:pPr>
             <a:r>
               <a:rPr lang="en-US" dirty="0"/>
-              <a:t>Image credit: https://</a:t>
+              <a:t>Reference: https://</a:t>
             </a:r>
             <a:r>
               <a:rPr lang="en-US" dirty="0" err="1"/>
@@ -1413,8 +1533,11 @@
             </a:r>
             <a:r>
               <a:rPr lang="en-US" dirty="0"/>
-              <a:t>/wiki/Flip-flop_(electronics)</a:t>
-            </a:r>
+              <a:t>/wiki/Flip-flop_%28electronics%29</a:t>
+            </a:r>
+          </a:p>
+          <a:p>
+            <a:endParaRPr lang="en-US" dirty="0"/>
           </a:p>
         </p:txBody>
       </p:sp>
@@ -1435,7 +1558,7 @@
           <a:p>
             <a:fld id="{9F4414A0-4E43-B244-BF62-FDB8F38845D2}" type="slidenum">
               <a:rPr lang="en-US" smtClean="0"/>
-              <a:t>29</a:t>
+              <a:t>25</a:t>
             </a:fld>
             <a:endParaRPr lang="en-US"/>
           </a:p>
@@ -1444,7 +1567,7 @@
     </p:spTree>
     <p:extLst>
       <p:ext uri="{BB962C8B-B14F-4D97-AF65-F5344CB8AC3E}">
-        <p14:creationId xmlns:p14="http://schemas.microsoft.com/office/powerpoint/2010/main" val="777679951"/>
+        <p14:creationId xmlns:p14="http://schemas.microsoft.com/office/powerpoint/2010/main" val="1211918772"/>
       </p:ext>
     </p:extLst>
   </p:cSld>
@@ -1498,7 +1621,18 @@
           <a:bodyPr/>
           <a:lstStyle/>
           <a:p>
-            <a:endParaRPr lang="en-US" dirty="0"/>
+            <a:r>
+              <a:rPr lang="en-US" dirty="0"/>
+              <a:t>Image credit: https://</a:t>
+            </a:r>
+            <a:r>
+              <a:rPr lang="en-US" dirty="0" err="1"/>
+              <a:t>en.wikipedia.org</a:t>
+            </a:r>
+            <a:r>
+              <a:rPr lang="en-US" dirty="0"/>
+              <a:t>/wiki/Flip-flop_(electronics)</a:t>
+            </a:r>
           </a:p>
         </p:txBody>
       </p:sp>
@@ -1519,6 +1653,90 @@
           <a:p>
             <a:fld id="{9F4414A0-4E43-B244-BF62-FDB8F38845D2}" type="slidenum">
               <a:rPr lang="en-US" smtClean="0"/>
+              <a:t>29</a:t>
+            </a:fld>
+            <a:endParaRPr lang="en-US"/>
+          </a:p>
+        </p:txBody>
+      </p:sp>
+    </p:spTree>
+    <p:extLst>
+      <p:ext uri="{BB962C8B-B14F-4D97-AF65-F5344CB8AC3E}">
+        <p14:creationId xmlns:p14="http://schemas.microsoft.com/office/powerpoint/2010/main" val="777679951"/>
+      </p:ext>
+    </p:extLst>
+  </p:cSld>
+  <p:clrMapOvr>
+    <a:masterClrMapping/>
+  </p:clrMapOvr>
+</p:notes>
+</file>
+
+<file path=ppt/notesSlides/notesSlide19.xml><?xml version="1.0" encoding="utf-8"?>
+<p:notes xmlns:a="http://schemas.openxmlformats.org/drawingml/2006/main" xmlns:r="http://schemas.openxmlformats.org/officeDocument/2006/relationships" xmlns:p="http://schemas.openxmlformats.org/presentationml/2006/main">
+  <p:cSld>
+    <p:spTree>
+      <p:nvGrpSpPr>
+        <p:cNvPr id="1" name=""/>
+        <p:cNvGrpSpPr/>
+        <p:nvPr/>
+      </p:nvGrpSpPr>
+      <p:grpSpPr>
+        <a:xfrm>
+          <a:off x="0" y="0"/>
+          <a:ext cx="0" cy="0"/>
+          <a:chOff x="0" y="0"/>
+          <a:chExt cx="0" cy="0"/>
+        </a:xfrm>
+      </p:grpSpPr>
+      <p:sp>
+        <p:nvSpPr>
+          <p:cNvPr id="2" name="Slide Image Placeholder 1"/>
+          <p:cNvSpPr>
+            <a:spLocks noGrp="1" noRot="1" noChangeAspect="1"/>
+          </p:cNvSpPr>
+          <p:nvPr>
+            <p:ph type="sldImg"/>
+          </p:nvPr>
+        </p:nvSpPr>
+        <p:spPr/>
+      </p:sp>
+      <p:sp>
+        <p:nvSpPr>
+          <p:cNvPr id="3" name="Notes Placeholder 2"/>
+          <p:cNvSpPr>
+            <a:spLocks noGrp="1"/>
+          </p:cNvSpPr>
+          <p:nvPr>
+            <p:ph type="body" idx="1"/>
+          </p:nvPr>
+        </p:nvSpPr>
+        <p:spPr/>
+        <p:txBody>
+          <a:bodyPr/>
+          <a:lstStyle/>
+          <a:p>
+            <a:endParaRPr lang="en-US" dirty="0"/>
+          </a:p>
+        </p:txBody>
+      </p:sp>
+      <p:sp>
+        <p:nvSpPr>
+          <p:cNvPr id="4" name="Slide Number Placeholder 3"/>
+          <p:cNvSpPr>
+            <a:spLocks noGrp="1"/>
+          </p:cNvSpPr>
+          <p:nvPr>
+            <p:ph type="sldNum" sz="quarter" idx="5"/>
+          </p:nvPr>
+        </p:nvSpPr>
+        <p:spPr/>
+        <p:txBody>
+          <a:bodyPr/>
+          <a:lstStyle/>
+          <a:p>
+            <a:fld id="{9F4414A0-4E43-B244-BF62-FDB8F38845D2}" type="slidenum">
+              <a:rPr lang="en-US" smtClean="0"/>
               <a:t>31</a:t>
             </a:fld>
             <a:endParaRPr lang="en-US"/>
@@ -1539,6 +1757,203 @@
 </file>
 
 <file path=ppt/notesSlides/notesSlide2.xml><?xml version="1.0" encoding="utf-8"?>
+<p:notes xmlns:a="http://schemas.openxmlformats.org/drawingml/2006/main" xmlns:r="http://schemas.openxmlformats.org/officeDocument/2006/relationships" xmlns:p="http://schemas.openxmlformats.org/presentationml/2006/main" showMasterSp="0" showMasterPhAnim="0">
+  <p:cSld>
+    <p:spTree>
+      <p:nvGrpSpPr>
+        <p:cNvPr id="1" name="Shape 351">
+          <a:extLst>
+            <a:ext uri="{FF2B5EF4-FFF2-40B4-BE49-F238E27FC236}">
+              <a16:creationId xmlns:a16="http://schemas.microsoft.com/office/drawing/2014/main" id="{A138F04F-A772-5D27-FF1F-1DAB3D057126}"/>
+            </a:ext>
+          </a:extLst>
+        </p:cNvPr>
+        <p:cNvGrpSpPr/>
+        <p:nvPr/>
+      </p:nvGrpSpPr>
+      <p:grpSpPr>
+        <a:xfrm>
+          <a:off x="0" y="0"/>
+          <a:ext cx="0" cy="0"/>
+          <a:chOff x="0" y="0"/>
+          <a:chExt cx="0" cy="0"/>
+        </a:xfrm>
+      </p:grpSpPr>
+      <p:sp>
+        <p:nvSpPr>
+          <p:cNvPr id="352" name="Shape 352">
+            <a:extLst>
+              <a:ext uri="{FF2B5EF4-FFF2-40B4-BE49-F238E27FC236}">
+                <a16:creationId xmlns:a16="http://schemas.microsoft.com/office/drawing/2014/main" id="{73C358A8-E3D1-636B-5C6A-05B6D619C346}"/>
+              </a:ext>
+            </a:extLst>
+          </p:cNvPr>
+          <p:cNvSpPr txBox="1">
+            <a:spLocks noGrp="1"/>
+          </p:cNvSpPr>
+          <p:nvPr>
+            <p:ph type="body" idx="1"/>
+          </p:nvPr>
+        </p:nvSpPr>
+        <p:spPr>
+          <a:xfrm>
+            <a:off x="685800" y="4343400"/>
+            <a:ext cx="5486399" cy="4114800"/>
+          </a:xfrm>
+          <a:prstGeom prst="rect">
+            <a:avLst/>
+          </a:prstGeom>
+        </p:spPr>
+        <p:txBody>
+          <a:bodyPr lIns="91425" tIns="91425" rIns="91425" bIns="91425" anchor="ctr" anchorCtr="0">
+            <a:noAutofit/>
+          </a:bodyPr>
+          <a:lstStyle/>
+          <a:p>
+            <a:pPr lvl="0">
+              <a:spcBef>
+                <a:spcPts val="0"/>
+              </a:spcBef>
+              <a:buNone/>
+            </a:pPr>
+            <a:r>
+              <a:rPr lang="en-US" dirty="0"/>
+              <a:t>A block diagram of a CPU with I/O devices, a CPU, memory and secondary memory.  Software is stored in the memory of the computer and then read from that main memory and executed by the CPU.</a:t>
+            </a:r>
+          </a:p>
+          <a:p>
+            <a:pPr lvl="0">
+              <a:spcBef>
+                <a:spcPts val="0"/>
+              </a:spcBef>
+              <a:buNone/>
+            </a:pPr>
+            <a:endParaRPr lang="en-US" dirty="0"/>
+          </a:p>
+          <a:p>
+            <a:pPr lvl="0">
+              <a:spcBef>
+                <a:spcPts val="0"/>
+              </a:spcBef>
+              <a:buNone/>
+            </a:pPr>
+            <a:r>
+              <a:rPr lang="en-US" dirty="0"/>
+              <a:t>There is a thought bubble where the CPU is thinking, “What Next?”</a:t>
+            </a:r>
+          </a:p>
+          <a:p>
+            <a:pPr lvl="0">
+              <a:spcBef>
+                <a:spcPts val="0"/>
+              </a:spcBef>
+              <a:buNone/>
+            </a:pPr>
+            <a:endParaRPr lang="en-US" dirty="0"/>
+          </a:p>
+          <a:p>
+            <a:pPr marL="0" marR="0" lvl="0" indent="0" algn="l" defTabSz="914400" rtl="0" eaLnBrk="1" fontAlgn="auto" latinLnBrk="0" hangingPunct="1">
+              <a:lnSpc>
+                <a:spcPct val="100000"/>
+              </a:lnSpc>
+              <a:spcBef>
+                <a:spcPts val="0"/>
+              </a:spcBef>
+              <a:spcAft>
+                <a:spcPts val="0"/>
+              </a:spcAft>
+              <a:buClrTx/>
+              <a:buSzTx/>
+              <a:buFontTx/>
+              <a:buNone/>
+              <a:tabLst/>
+              <a:defRPr/>
+            </a:pPr>
+            <a:r>
+              <a:rPr lang="en-US" dirty="0"/>
+              <a:t>This slide is from Lecture 1 / Chapter 1 of </a:t>
+            </a:r>
+            <a:r>
+              <a:rPr lang="en-US" dirty="0">
+                <a:solidFill>
+                  <a:schemeClr val="bg1"/>
+                </a:solidFill>
+              </a:rPr>
+              <a:t>Python for Everybody (www.py4e.com)</a:t>
+            </a:r>
+          </a:p>
+          <a:p>
+            <a:pPr lvl="0">
+              <a:spcBef>
+                <a:spcPts val="0"/>
+              </a:spcBef>
+              <a:buNone/>
+            </a:pPr>
+            <a:endParaRPr dirty="0"/>
+          </a:p>
+        </p:txBody>
+      </p:sp>
+      <p:sp>
+        <p:nvSpPr>
+          <p:cNvPr id="353" name="Shape 353">
+            <a:extLst>
+              <a:ext uri="{FF2B5EF4-FFF2-40B4-BE49-F238E27FC236}">
+                <a16:creationId xmlns:a16="http://schemas.microsoft.com/office/drawing/2014/main" id="{E698C2BA-11B0-0ACE-167F-F177E6448867}"/>
+              </a:ext>
+            </a:extLst>
+          </p:cNvPr>
+          <p:cNvSpPr>
+            <a:spLocks noGrp="1" noRot="1" noChangeAspect="1"/>
+          </p:cNvSpPr>
+          <p:nvPr>
+            <p:ph type="sldImg" idx="2"/>
+          </p:nvPr>
+        </p:nvSpPr>
+        <p:spPr>
+          <a:xfrm>
+            <a:off x="381000" y="685800"/>
+            <a:ext cx="6096000" cy="3429000"/>
+          </a:xfrm>
+          <a:custGeom>
+            <a:avLst/>
+            <a:gdLst/>
+            <a:ahLst/>
+            <a:cxnLst/>
+            <a:rect l="0" t="0" r="0" b="0"/>
+            <a:pathLst>
+              <a:path w="120000" h="120000" extrusionOk="0">
+                <a:moveTo>
+                  <a:pt x="0" y="0"/>
+                </a:moveTo>
+                <a:lnTo>
+                  <a:pt x="120000" y="0"/>
+                </a:lnTo>
+                <a:lnTo>
+                  <a:pt x="120000" y="120000"/>
+                </a:lnTo>
+                <a:lnTo>
+                  <a:pt x="0" y="120000"/>
+                </a:lnTo>
+                <a:close/>
+              </a:path>
+            </a:pathLst>
+          </a:custGeom>
+        </p:spPr>
+      </p:sp>
+    </p:spTree>
+    <p:extLst>
+      <p:ext uri="{BB962C8B-B14F-4D97-AF65-F5344CB8AC3E}">
+        <p14:creationId xmlns:p14="http://schemas.microsoft.com/office/powerpoint/2010/main" val="1336968439"/>
+      </p:ext>
+    </p:extLst>
+  </p:cSld>
+  <p:clrMapOvr>
+    <a:masterClrMapping/>
+  </p:clrMapOvr>
+</p:notes>
+</file>
+
+<file path=ppt/notesSlides/notesSlide3.xml><?xml version="1.0" encoding="utf-8"?>
 <p:notes xmlns:a="http://schemas.openxmlformats.org/drawingml/2006/main" xmlns:r="http://schemas.openxmlformats.org/officeDocument/2006/relationships" xmlns:p="http://schemas.openxmlformats.org/presentationml/2006/main" showMasterSp="0" showMasterPhAnim="0">
   <p:cSld>
     <p:spTree>
@@ -1718,7 +2133,7 @@
 </p:notes>
 </file>
 
-<file path=ppt/notesSlides/notesSlide3.xml><?xml version="1.0" encoding="utf-8"?>
+<file path=ppt/notesSlides/notesSlide4.xml><?xml version="1.0" encoding="utf-8"?>
 <p:notes xmlns:a="http://schemas.openxmlformats.org/drawingml/2006/main" xmlns:r="http://schemas.openxmlformats.org/officeDocument/2006/relationships" xmlns:p="http://schemas.openxmlformats.org/presentationml/2006/main" showMasterSp="0" showMasterPhAnim="0">
   <p:cSld>
     <p:spTree>
@@ -1726,7 +2141,7 @@
         <p:cNvPr id="1" name="Shape 351">
           <a:extLst>
             <a:ext uri="{FF2B5EF4-FFF2-40B4-BE49-F238E27FC236}">
-              <a16:creationId xmlns:a16="http://schemas.microsoft.com/office/drawing/2014/main" id="{C3913BD7-7A39-F691-1718-3EFC7326483B}"/>
+              <a16:creationId xmlns:a16="http://schemas.microsoft.com/office/drawing/2014/main" id="{45C2153F-8EE0-8886-2AC0-B44B4302A9F5}"/>
             </a:ext>
           </a:extLst>
         </p:cNvPr>
@@ -1746,7 +2161,7 @@
           <p:cNvPr id="352" name="Shape 352">
             <a:extLst>
               <a:ext uri="{FF2B5EF4-FFF2-40B4-BE49-F238E27FC236}">
-                <a16:creationId xmlns:a16="http://schemas.microsoft.com/office/drawing/2014/main" id="{1193E065-9042-966D-A2DB-837495C607D7}"/>
+                <a16:creationId xmlns:a16="http://schemas.microsoft.com/office/drawing/2014/main" id="{AFD8AAC8-1BD7-941C-D61A-D9075D2A1AFF}"/>
               </a:ext>
             </a:extLst>
           </p:cNvPr>
@@ -1780,7 +2195,7 @@
             </a:pPr>
             <a:r>
               <a:rPr lang="en-US" dirty="0"/>
-              <a:t>Software is stored in the main memory of the computer and then read from that main memory and executed by the CPU</a:t>
+              <a:t>A block diagram of a CPU with I/O devices, a CPU, memory and secondary memory.  Software is stored in the memory of the computer and then read from that main memory and executed by the CPU.</a:t>
             </a:r>
           </a:p>
           <a:p>
@@ -1802,27 +2217,6 @@
             <a:r>
               <a:rPr lang="en-US" dirty="0"/>
               <a:t>There is a thought bubble where the CPU is thinking, “What Next?”</a:t>
-            </a:r>
-          </a:p>
-          <a:p>
-            <a:pPr lvl="0">
-              <a:spcBef>
-                <a:spcPts val="0"/>
-              </a:spcBef>
-              <a:buNone/>
-            </a:pPr>
-            <a:endParaRPr lang="en-US" dirty="0"/>
-          </a:p>
-          <a:p>
-            <a:pPr lvl="0">
-              <a:spcBef>
-                <a:spcPts val="0"/>
-              </a:spcBef>
-              <a:buNone/>
-            </a:pPr>
-            <a:r>
-              <a:rPr lang="en-US" dirty="0"/>
-              <a:t>Within the memory there is a stick figure of the programmer writing the instructions to provide to the CPU.  In this case this instruction is Python – "if x &lt; 3 : print"</a:t>
             </a:r>
           </a:p>
           <a:p>
@@ -1853,6 +2247,38 @@
               <a:defRPr/>
             </a:pPr>
             <a:r>
+              <a:rPr lang="en-US" b="0" dirty="0"/>
+              <a:t>Within the memory there is a stick figure of the programmer writing the instructions to provide to the CPU.  In this case this instruction is in Python and is "if x&lt;3: print"</a:t>
+            </a:r>
+          </a:p>
+          <a:p>
+            <a:pPr lvl="0">
+              <a:spcBef>
+                <a:spcPts val="0"/>
+              </a:spcBef>
+              <a:buNone/>
+            </a:pPr>
+            <a:endParaRPr lang="en-US" dirty="0"/>
+          </a:p>
+          <a:p>
+            <a:pPr marL="0" marR="0" lvl="0" indent="0" algn="l" defTabSz="914400" rtl="0" eaLnBrk="1" fontAlgn="auto" latinLnBrk="0" hangingPunct="1">
+              <a:lnSpc>
+                <a:spcPct val="100000"/>
+              </a:lnSpc>
+              <a:spcBef>
+                <a:spcPts val="0"/>
+              </a:spcBef>
+              <a:spcAft>
+                <a:spcPts val="0"/>
+              </a:spcAft>
+              <a:buClrTx/>
+              <a:buSzTx/>
+              <a:buFontTx/>
+              <a:buNone/>
+              <a:tabLst/>
+              <a:defRPr/>
+            </a:pPr>
+            <a:r>
               <a:rPr lang="en-US" dirty="0"/>
               <a:t>This slide is from Lecture 1 / Chapter 1 of </a:t>
             </a:r>
@@ -1881,7 +2307,7 @@
           <p:cNvPr id="353" name="Shape 353">
             <a:extLst>
               <a:ext uri="{FF2B5EF4-FFF2-40B4-BE49-F238E27FC236}">
-                <a16:creationId xmlns:a16="http://schemas.microsoft.com/office/drawing/2014/main" id="{E215AFEE-FA42-59E9-D98F-740FC9FA9596}"/>
+                <a16:creationId xmlns:a16="http://schemas.microsoft.com/office/drawing/2014/main" id="{1AAE5502-03E9-2012-964D-35577673E657}"/>
               </a:ext>
             </a:extLst>
           </p:cNvPr>
@@ -1926,7 +2352,7 @@
     </p:spTree>
     <p:extLst>
       <p:ext uri="{BB962C8B-B14F-4D97-AF65-F5344CB8AC3E}">
-        <p14:creationId xmlns:p14="http://schemas.microsoft.com/office/powerpoint/2010/main" val="2687270958"/>
+        <p14:creationId xmlns:p14="http://schemas.microsoft.com/office/powerpoint/2010/main" val="3124722084"/>
       </p:ext>
     </p:extLst>
   </p:cSld>
@@ -1936,7 +2362,7 @@
 </p:notes>
 </file>
 
-<file path=ppt/notesSlides/notesSlide4.xml><?xml version="1.0" encoding="utf-8"?>
+<file path=ppt/notesSlides/notesSlide5.xml><?xml version="1.0" encoding="utf-8"?>
 <p:notes xmlns:a="http://schemas.openxmlformats.org/drawingml/2006/main" xmlns:r="http://schemas.openxmlformats.org/officeDocument/2006/relationships" xmlns:p="http://schemas.openxmlformats.org/presentationml/2006/main" showMasterSp="0" showMasterPhAnim="0">
   <p:cSld>
     <p:spTree>
@@ -1944,7 +2370,7 @@
         <p:cNvPr id="1" name="Shape 351">
           <a:extLst>
             <a:ext uri="{FF2B5EF4-FFF2-40B4-BE49-F238E27FC236}">
-              <a16:creationId xmlns:a16="http://schemas.microsoft.com/office/drawing/2014/main" id="{A138F04F-A772-5D27-FF1F-1DAB3D057126}"/>
+              <a16:creationId xmlns:a16="http://schemas.microsoft.com/office/drawing/2014/main" id="{E2435B38-C9B2-F6F3-17B2-EFCB8117AFB0}"/>
             </a:ext>
           </a:extLst>
         </p:cNvPr>
@@ -1964,7 +2390,7 @@
           <p:cNvPr id="352" name="Shape 352">
             <a:extLst>
               <a:ext uri="{FF2B5EF4-FFF2-40B4-BE49-F238E27FC236}">
-                <a16:creationId xmlns:a16="http://schemas.microsoft.com/office/drawing/2014/main" id="{73C358A8-E3D1-636B-5C6A-05B6D619C346}"/>
+                <a16:creationId xmlns:a16="http://schemas.microsoft.com/office/drawing/2014/main" id="{55302B31-2D33-0360-9E62-4B6E08FCA675}"/>
               </a:ext>
             </a:extLst>
           </p:cNvPr>
@@ -1998,7 +2424,7 @@
             </a:pPr>
             <a:r>
               <a:rPr lang="en-US" dirty="0"/>
-              <a:t>Software is stored in the main memory of the computer and then read from that main memory and executed by the CPU</a:t>
+              <a:t>A block diagram of a CPU with I/O devices, a CPU, memory and secondary memory.  Software is stored in the memory of the computer and then read from that main memory and executed by the CPU.</a:t>
             </a:r>
           </a:p>
           <a:p>
@@ -2147,7 +2573,7 @@
           <p:cNvPr id="353" name="Shape 353">
             <a:extLst>
               <a:ext uri="{FF2B5EF4-FFF2-40B4-BE49-F238E27FC236}">
-                <a16:creationId xmlns:a16="http://schemas.microsoft.com/office/drawing/2014/main" id="{E698C2BA-11B0-0ACE-167F-F177E6448867}"/>
+                <a16:creationId xmlns:a16="http://schemas.microsoft.com/office/drawing/2014/main" id="{2C0529E6-AD1A-E8FF-7F0C-4BA226CCAFFD}"/>
               </a:ext>
             </a:extLst>
           </p:cNvPr>
@@ -2192,91 +2618,7 @@
     </p:spTree>
     <p:extLst>
       <p:ext uri="{BB962C8B-B14F-4D97-AF65-F5344CB8AC3E}">
-        <p14:creationId xmlns:p14="http://schemas.microsoft.com/office/powerpoint/2010/main" val="1336968439"/>
-      </p:ext>
-    </p:extLst>
-  </p:cSld>
-  <p:clrMapOvr>
-    <a:masterClrMapping/>
-  </p:clrMapOvr>
-</p:notes>
-</file>
-
-<file path=ppt/notesSlides/notesSlide5.xml><?xml version="1.0" encoding="utf-8"?>
-<p:notes xmlns:a="http://schemas.openxmlformats.org/drawingml/2006/main" xmlns:r="http://schemas.openxmlformats.org/officeDocument/2006/relationships" xmlns:p="http://schemas.openxmlformats.org/presentationml/2006/main">
-  <p:cSld>
-    <p:spTree>
-      <p:nvGrpSpPr>
-        <p:cNvPr id="1" name=""/>
-        <p:cNvGrpSpPr/>
-        <p:nvPr/>
-      </p:nvGrpSpPr>
-      <p:grpSpPr>
-        <a:xfrm>
-          <a:off x="0" y="0"/>
-          <a:ext cx="0" cy="0"/>
-          <a:chOff x="0" y="0"/>
-          <a:chExt cx="0" cy="0"/>
-        </a:xfrm>
-      </p:grpSpPr>
-      <p:sp>
-        <p:nvSpPr>
-          <p:cNvPr id="2" name="Slide Image Placeholder 1"/>
-          <p:cNvSpPr>
-            <a:spLocks noGrp="1" noRot="1" noChangeAspect="1"/>
-          </p:cNvSpPr>
-          <p:nvPr>
-            <p:ph type="sldImg"/>
-          </p:nvPr>
-        </p:nvSpPr>
-        <p:spPr/>
-      </p:sp>
-      <p:sp>
-        <p:nvSpPr>
-          <p:cNvPr id="3" name="Notes Placeholder 2"/>
-          <p:cNvSpPr>
-            <a:spLocks noGrp="1"/>
-          </p:cNvSpPr>
-          <p:nvPr>
-            <p:ph type="body" idx="1"/>
-          </p:nvPr>
-        </p:nvSpPr>
-        <p:spPr/>
-        <p:txBody>
-          <a:bodyPr/>
-          <a:lstStyle/>
-          <a:p>
-            <a:endParaRPr lang="en-US" dirty="0"/>
-          </a:p>
-        </p:txBody>
-      </p:sp>
-      <p:sp>
-        <p:nvSpPr>
-          <p:cNvPr id="4" name="Slide Number Placeholder 3"/>
-          <p:cNvSpPr>
-            <a:spLocks noGrp="1"/>
-          </p:cNvSpPr>
-          <p:nvPr>
-            <p:ph type="sldNum" sz="quarter" idx="5"/>
-          </p:nvPr>
-        </p:nvSpPr>
-        <p:spPr/>
-        <p:txBody>
-          <a:bodyPr/>
-          <a:lstStyle/>
-          <a:p>
-            <a:fld id="{9F4414A0-4E43-B244-BF62-FDB8F38845D2}" type="slidenum">
-              <a:rPr lang="en-US" smtClean="0"/>
-              <a:t>11</a:t>
-            </a:fld>
-            <a:endParaRPr lang="en-US"/>
-          </a:p>
-        </p:txBody>
-      </p:sp>
-    </p:spTree>
-    <p:extLst>
-      <p:ext uri="{BB962C8B-B14F-4D97-AF65-F5344CB8AC3E}">
-        <p14:creationId xmlns:p14="http://schemas.microsoft.com/office/powerpoint/2010/main" val="2874947670"/>
+        <p14:creationId xmlns:p14="http://schemas.microsoft.com/office/powerpoint/2010/main" val="3699447530"/>
       </p:ext>
     </p:extLst>
   </p:cSld>
@@ -2351,7 +2693,7 @@
           <a:p>
             <a:fld id="{9F4414A0-4E43-B244-BF62-FDB8F38845D2}" type="slidenum">
               <a:rPr lang="en-US" smtClean="0"/>
-              <a:t>12</a:t>
+              <a:t>11</a:t>
             </a:fld>
             <a:endParaRPr lang="en-US"/>
           </a:p>
@@ -2360,7 +2702,7 @@
     </p:spTree>
     <p:extLst>
       <p:ext uri="{BB962C8B-B14F-4D97-AF65-F5344CB8AC3E}">
-        <p14:creationId xmlns:p14="http://schemas.microsoft.com/office/powerpoint/2010/main" val="3257560783"/>
+        <p14:creationId xmlns:p14="http://schemas.microsoft.com/office/powerpoint/2010/main" val="2874947670"/>
       </p:ext>
     </p:extLst>
   </p:cSld>
@@ -2414,42 +2756,6 @@
           <a:bodyPr/>
           <a:lstStyle/>
           <a:p>
-            <a:pPr marL="0" marR="0" lvl="0" indent="0" algn="l" defTabSz="914400" rtl="0" eaLnBrk="1" fontAlgn="auto" latinLnBrk="0" hangingPunct="1">
-              <a:lnSpc>
-                <a:spcPct val="100000"/>
-              </a:lnSpc>
-              <a:spcBef>
-                <a:spcPts val="0"/>
-              </a:spcBef>
-              <a:spcAft>
-                <a:spcPts val="0"/>
-              </a:spcAft>
-              <a:buClrTx/>
-              <a:buSzTx/>
-              <a:buFontTx/>
-              <a:buNone/>
-              <a:tabLst/>
-              <a:defRPr/>
-            </a:pPr>
-            <a:r>
-              <a:rPr lang="en-US" dirty="0"/>
-              <a:t>Reference: https://</a:t>
-            </a:r>
-            <a:r>
-              <a:rPr lang="en-US" dirty="0" err="1"/>
-              <a:t>en.wikipedia.org</a:t>
-            </a:r>
-            <a:r>
-              <a:rPr lang="en-US" dirty="0"/>
-              <a:t>/wiki/</a:t>
-            </a:r>
-            <a:r>
-              <a:rPr lang="en-US" dirty="0" err="1"/>
-              <a:t>Nixie_tube</a:t>
-            </a:r>
-            <a:endParaRPr lang="en-US" dirty="0"/>
-          </a:p>
-          <a:p>
             <a:endParaRPr lang="en-US" dirty="0"/>
           </a:p>
         </p:txBody>
@@ -2471,7 +2777,7 @@
           <a:p>
             <a:fld id="{9F4414A0-4E43-B244-BF62-FDB8F38845D2}" type="slidenum">
               <a:rPr lang="en-US" smtClean="0"/>
-              <a:t>15</a:t>
+              <a:t>12</a:t>
             </a:fld>
             <a:endParaRPr lang="en-US"/>
           </a:p>
@@ -2480,7 +2786,7 @@
     </p:spTree>
     <p:extLst>
       <p:ext uri="{BB962C8B-B14F-4D97-AF65-F5344CB8AC3E}">
-        <p14:creationId xmlns:p14="http://schemas.microsoft.com/office/powerpoint/2010/main" val="3535627489"/>
+        <p14:creationId xmlns:p14="http://schemas.microsoft.com/office/powerpoint/2010/main" val="3257560783"/>
       </p:ext>
     </p:extLst>
   </p:cSld>
@@ -2534,19 +2840,40 @@
           <a:bodyPr/>
           <a:lstStyle/>
           <a:p>
+            <a:pPr marL="0" marR="0" lvl="0" indent="0" algn="l" defTabSz="914400" rtl="0" eaLnBrk="1" fontAlgn="auto" latinLnBrk="0" hangingPunct="1">
+              <a:lnSpc>
+                <a:spcPct val="100000"/>
+              </a:lnSpc>
+              <a:spcBef>
+                <a:spcPts val="0"/>
+              </a:spcBef>
+              <a:spcAft>
+                <a:spcPts val="0"/>
+              </a:spcAft>
+              <a:buClrTx/>
+              <a:buSzTx/>
+              <a:buFontTx/>
+              <a:buNone/>
+              <a:tabLst/>
+              <a:defRPr/>
+            </a:pPr>
             <a:r>
               <a:rPr lang="en-US" dirty="0"/>
-              <a:t>This shows a glowing Nixie tube showing a value of 6 with base 1 inputs of 110.</a:t>
-            </a:r>
-          </a:p>
-          <a:p>
+              <a:t>Reference: https://</a:t>
+            </a:r>
+            <a:r>
+              <a:rPr lang="en-US" dirty="0" err="1"/>
+              <a:t>en.wikipedia.org</a:t>
+            </a:r>
+            <a:r>
+              <a:rPr lang="en-US" dirty="0"/>
+              <a:t>/wiki/</a:t>
+            </a:r>
+            <a:r>
+              <a:rPr lang="en-US" dirty="0" err="1"/>
+              <a:t>Nixie_tube</a:t>
+            </a:r>
             <a:endParaRPr lang="en-US" dirty="0"/>
-          </a:p>
-          <a:p>
-            <a:r>
-              <a:rPr lang="en-US" dirty="0"/>
-              <a:t>This shows a screen shot of the Nixie Challenge game adding two 3-bit base two numbers.  The example shown is 011 + 110 = 1001 or in Base-10, 3 + 6 = 9</a:t>
-            </a:r>
           </a:p>
           <a:p>
             <a:endParaRPr lang="en-US" dirty="0"/>
@@ -2570,7 +2897,7 @@
           <a:p>
             <a:fld id="{9F4414A0-4E43-B244-BF62-FDB8F38845D2}" type="slidenum">
               <a:rPr lang="en-US" smtClean="0"/>
-              <a:t>16</a:t>
+              <a:t>15</a:t>
             </a:fld>
             <a:endParaRPr lang="en-US"/>
           </a:p>
@@ -2579,7 +2906,7 @@
     </p:spTree>
     <p:extLst>
       <p:ext uri="{BB962C8B-B14F-4D97-AF65-F5344CB8AC3E}">
-        <p14:creationId xmlns:p14="http://schemas.microsoft.com/office/powerpoint/2010/main" val="1070138758"/>
+        <p14:creationId xmlns:p14="http://schemas.microsoft.com/office/powerpoint/2010/main" val="3535627489"/>
       </p:ext>
     </p:extLst>
   </p:cSld>
@@ -2635,7 +2962,7 @@
           <a:p>
             <a:r>
               <a:rPr lang="en-US" dirty="0"/>
-              <a:t>This is showing base-2 1 + 1 = 10 or in Base 10 1 + 1 = 2</a:t>
+              <a:t>This shows a glowing Nixie tube showing a value of 6 with base 1 inputs of 110.</a:t>
             </a:r>
           </a:p>
           <a:p>
@@ -2644,186 +2971,8 @@
           <a:p>
             <a:r>
               <a:rPr lang="en-US" dirty="0"/>
-              <a:t>This is showing base-2 11 + 1 = 100 or in Base 10 3 + 1 = 4</a:t>
-            </a:r>
-          </a:p>
-          <a:p>
-            <a:endParaRPr lang="en-US" dirty="0"/>
-          </a:p>
-          <a:p>
-            <a:pPr marL="0" marR="0" lvl="0" indent="0" algn="l" defTabSz="914400" rtl="0" eaLnBrk="1" fontAlgn="auto" latinLnBrk="0" hangingPunct="1">
-              <a:lnSpc>
-                <a:spcPct val="100000"/>
-              </a:lnSpc>
-              <a:spcBef>
-                <a:spcPts val="0"/>
-              </a:spcBef>
-              <a:spcAft>
-                <a:spcPts val="0"/>
-              </a:spcAft>
-              <a:buClrTx/>
-              <a:buSzTx/>
-              <a:buFontTx/>
-              <a:buNone/>
-              <a:tabLst/>
-              <a:defRPr/>
-            </a:pPr>
-            <a:r>
-              <a:rPr lang="en-US" dirty="0"/>
-              <a:t>This is showing base-2 10 + 10 = 100 or in Base 10 2 + 2 = 4</a:t>
-            </a:r>
-          </a:p>
-          <a:p>
-            <a:endParaRPr lang="en-US" dirty="0"/>
-          </a:p>
-          <a:p>
-            <a:pPr marL="0" marR="0" lvl="0" indent="0" algn="l" defTabSz="914400" rtl="0" eaLnBrk="1" fontAlgn="auto" latinLnBrk="0" hangingPunct="1">
-              <a:lnSpc>
-                <a:spcPct val="100000"/>
-              </a:lnSpc>
-              <a:spcBef>
-                <a:spcPts val="0"/>
-              </a:spcBef>
-              <a:spcAft>
-                <a:spcPts val="0"/>
-              </a:spcAft>
-              <a:buClrTx/>
-              <a:buSzTx/>
-              <a:buFontTx/>
-              <a:buNone/>
-              <a:tabLst/>
-              <a:defRPr/>
-            </a:pPr>
-            <a:r>
-              <a:rPr lang="en-US" dirty="0"/>
-              <a:t>This is showing base-2 11 + 10 = 101 or in Base 10 3 + 2 = 5</a:t>
-            </a:r>
-          </a:p>
-          <a:p>
-            <a:pPr marL="0" marR="0" lvl="0" indent="0" algn="l" defTabSz="914400" rtl="0" eaLnBrk="1" fontAlgn="auto" latinLnBrk="0" hangingPunct="1">
-              <a:lnSpc>
-                <a:spcPct val="100000"/>
-              </a:lnSpc>
-              <a:spcBef>
-                <a:spcPts val="0"/>
-              </a:spcBef>
-              <a:spcAft>
-                <a:spcPts val="0"/>
-              </a:spcAft>
-              <a:buClrTx/>
-              <a:buSzTx/>
-              <a:buFontTx/>
-              <a:buNone/>
-              <a:tabLst/>
-              <a:defRPr/>
-            </a:pPr>
-            <a:endParaRPr lang="en-US" dirty="0"/>
-          </a:p>
-          <a:p>
-            <a:pPr marL="0" marR="0" lvl="0" indent="0" algn="l" defTabSz="914400" rtl="0" eaLnBrk="1" fontAlgn="auto" latinLnBrk="0" hangingPunct="1">
-              <a:lnSpc>
-                <a:spcPct val="100000"/>
-              </a:lnSpc>
-              <a:spcBef>
-                <a:spcPts val="0"/>
-              </a:spcBef>
-              <a:spcAft>
-                <a:spcPts val="0"/>
-              </a:spcAft>
-              <a:buClrTx/>
-              <a:buSzTx/>
-              <a:buFontTx/>
-              <a:buNone/>
-              <a:tabLst/>
-              <a:defRPr/>
-            </a:pPr>
-            <a:r>
-              <a:rPr lang="en-US" dirty="0"/>
-              <a:t>This is showing base-2 100 + 100 = 1000 or in Base 10 4 + 4 = 8</a:t>
-            </a:r>
-          </a:p>
-          <a:p>
-            <a:pPr marL="0" marR="0" lvl="0" indent="0" algn="l" defTabSz="914400" rtl="0" eaLnBrk="1" fontAlgn="auto" latinLnBrk="0" hangingPunct="1">
-              <a:lnSpc>
-                <a:spcPct val="100000"/>
-              </a:lnSpc>
-              <a:spcBef>
-                <a:spcPts val="0"/>
-              </a:spcBef>
-              <a:spcAft>
-                <a:spcPts val="0"/>
-              </a:spcAft>
-              <a:buClrTx/>
-              <a:buSzTx/>
-              <a:buFontTx/>
-              <a:buNone/>
-              <a:tabLst/>
-              <a:defRPr/>
-            </a:pPr>
-            <a:endParaRPr lang="en-US" dirty="0"/>
-          </a:p>
-          <a:p>
-            <a:pPr marL="0" marR="0" lvl="0" indent="0" algn="l" defTabSz="914400" rtl="0" eaLnBrk="1" fontAlgn="auto" latinLnBrk="0" hangingPunct="1">
-              <a:lnSpc>
-                <a:spcPct val="100000"/>
-              </a:lnSpc>
-              <a:spcBef>
-                <a:spcPts val="0"/>
-              </a:spcBef>
-              <a:spcAft>
-                <a:spcPts val="0"/>
-              </a:spcAft>
-              <a:buClrTx/>
-              <a:buSzTx/>
-              <a:buFontTx/>
-              <a:buNone/>
-              <a:tabLst/>
-              <a:defRPr/>
-            </a:pPr>
-            <a:r>
-              <a:rPr lang="en-US" dirty="0"/>
-              <a:t>This is showing base-2 111 + 1 = 1000 or in Base 10 7 + 1 = 8</a:t>
-            </a:r>
-          </a:p>
-          <a:p>
-            <a:pPr marL="0" marR="0" lvl="0" indent="0" algn="l" defTabSz="914400" rtl="0" eaLnBrk="1" fontAlgn="auto" latinLnBrk="0" hangingPunct="1">
-              <a:lnSpc>
-                <a:spcPct val="100000"/>
-              </a:lnSpc>
-              <a:spcBef>
-                <a:spcPts val="0"/>
-              </a:spcBef>
-              <a:spcAft>
-                <a:spcPts val="0"/>
-              </a:spcAft>
-              <a:buClrTx/>
-              <a:buSzTx/>
-              <a:buFontTx/>
-              <a:buNone/>
-              <a:tabLst/>
-              <a:defRPr/>
-            </a:pPr>
-            <a:endParaRPr lang="en-US" dirty="0"/>
-          </a:p>
-          <a:p>
-            <a:pPr marL="0" marR="0" lvl="0" indent="0" algn="l" defTabSz="914400" rtl="0" eaLnBrk="1" fontAlgn="auto" latinLnBrk="0" hangingPunct="1">
-              <a:lnSpc>
-                <a:spcPct val="100000"/>
-              </a:lnSpc>
-              <a:spcBef>
-                <a:spcPts val="0"/>
-              </a:spcBef>
-              <a:spcAft>
-                <a:spcPts val="0"/>
-              </a:spcAft>
-              <a:buClrTx/>
-              <a:buSzTx/>
-              <a:buFontTx/>
-              <a:buNone/>
-              <a:tabLst/>
-              <a:defRPr/>
-            </a:pPr>
-            <a:endParaRPr lang="en-US" dirty="0"/>
+              <a:t>This shows a screen shot of the Nixie Challenge game adding two 3-bit base two numbers.  The example shown is 011 + 110 = 1001 or in Base-10, 3 + 6 = 9</a:t>
+            </a:r>
           </a:p>
           <a:p>
             <a:endParaRPr lang="en-US" dirty="0"/>
@@ -2847,7 +2996,7 @@
           <a:p>
             <a:fld id="{9F4414A0-4E43-B244-BF62-FDB8F38845D2}" type="slidenum">
               <a:rPr lang="en-US" smtClean="0"/>
-              <a:t>17</a:t>
+              <a:t>16</a:t>
             </a:fld>
             <a:endParaRPr lang="en-US"/>
           </a:p>
@@ -2856,7 +3005,7 @@
     </p:spTree>
     <p:extLst>
       <p:ext uri="{BB962C8B-B14F-4D97-AF65-F5344CB8AC3E}">
-        <p14:creationId xmlns:p14="http://schemas.microsoft.com/office/powerpoint/2010/main" val="2922670029"/>
+        <p14:creationId xmlns:p14="http://schemas.microsoft.com/office/powerpoint/2010/main" val="1070138758"/>
       </p:ext>
     </p:extLst>
   </p:cSld>
@@ -6284,79 +6433,8 @@
         </p:blipFill>
         <p:spPr>
           <a:xfrm>
-            <a:off x="7560235" y="480883"/>
-            <a:ext cx="1752103" cy="1934932"/>
-          </a:xfrm>
-          <a:prstGeom prst="rect">
-            <a:avLst/>
-          </a:prstGeom>
-        </p:spPr>
-      </p:pic>
-      <p:pic>
-        <p:nvPicPr>
-          <p:cNvPr id="4" name="Picture 3" descr="This is a screen of a screen shot if the VLSI layout tool from this course building a NAND gate.  It is more complex and used four transistors.  It is showing one of the input as as 1 and the other as zero, showing each transistor and its currrnet state and the output of 1.">
-            <a:extLst>
-              <a:ext uri="{FF2B5EF4-FFF2-40B4-BE49-F238E27FC236}">
-                <a16:creationId xmlns:a16="http://schemas.microsoft.com/office/drawing/2014/main" id="{60DB18DA-F22C-5C36-9309-248C5A19C09F}"/>
-              </a:ext>
-            </a:extLst>
-          </p:cNvPr>
-          <p:cNvPicPr>
-            <a:picLocks noChangeAspect="1"/>
-          </p:cNvPicPr>
-          <p:nvPr/>
-        </p:nvPicPr>
-        <p:blipFill>
-          <a:blip r:embed="rId3" cstate="print">
-            <a:extLst>
-              <a:ext uri="{28A0092B-C50C-407E-A947-70E740481C1C}">
-                <a14:useLocalDpi xmlns:a14="http://schemas.microsoft.com/office/drawing/2010/main"/>
-              </a:ext>
-            </a:extLst>
-          </a:blip>
-          <a:srcRect l="10010" t="23370" r="10354" b="5002"/>
-          <a:stretch/>
-        </p:blipFill>
-        <p:spPr>
-          <a:xfrm>
-            <a:off x="9210283" y="2167256"/>
-            <a:ext cx="1998838" cy="1463450"/>
-          </a:xfrm>
-          <a:prstGeom prst="rect">
-            <a:avLst/>
-          </a:prstGeom>
-        </p:spPr>
-      </p:pic>
-      <p:pic>
-        <p:nvPicPr>
-          <p:cNvPr id="7" name="Picture 6" descr="A picture of the internal layout of the Intel 4004 taken with a microscope showing gates and wires.">
-            <a:extLst>
-              <a:ext uri="{FF2B5EF4-FFF2-40B4-BE49-F238E27FC236}">
-                <a16:creationId xmlns:a16="http://schemas.microsoft.com/office/drawing/2014/main" id="{DE94410C-6E53-D131-2F0D-DA96A870B481}"/>
-              </a:ext>
-            </a:extLst>
-          </p:cNvPr>
-          <p:cNvPicPr>
-            <a:picLocks noChangeAspect="1"/>
-          </p:cNvPicPr>
-          <p:nvPr/>
-        </p:nvPicPr>
-        <p:blipFill>
-          <a:blip r:embed="rId4" cstate="print">
-            <a:extLst>
-              <a:ext uri="{28A0092B-C50C-407E-A947-70E740481C1C}">
-                <a14:useLocalDpi xmlns:a14="http://schemas.microsoft.com/office/drawing/2010/main"/>
-              </a:ext>
-            </a:extLst>
-          </a:blip>
-          <a:stretch>
-            <a:fillRect/>
-          </a:stretch>
-        </p:blipFill>
-        <p:spPr>
-          <a:xfrm>
-            <a:off x="8089403" y="3926627"/>
-            <a:ext cx="2597225" cy="1934932"/>
+            <a:off x="7670672" y="882171"/>
+            <a:ext cx="1570418" cy="1734288"/>
           </a:xfrm>
           <a:prstGeom prst="rect">
             <a:avLst/>
@@ -6380,7 +6458,7 @@
         </p:nvSpPr>
         <p:spPr>
           <a:xfrm rot="2593303">
-            <a:off x="8388429" y="2232400"/>
+            <a:off x="8715254" y="2375617"/>
             <a:ext cx="518657" cy="226430"/>
           </a:xfrm>
           <a:prstGeom prst="rightArrow">
@@ -6415,6 +6493,77 @@
           </a:p>
         </p:txBody>
       </p:sp>
+      <p:pic>
+        <p:nvPicPr>
+          <p:cNvPr id="4" name="Picture 3" descr="This is a screen of a screen shot if the VLSI layout tool from this course building a NAND gate.  It is more complex and used four transistors.  It is showing one of the input as as 1 and the other as zero, showing each transistor and its currrnet state and the output of 1.">
+            <a:extLst>
+              <a:ext uri="{FF2B5EF4-FFF2-40B4-BE49-F238E27FC236}">
+                <a16:creationId xmlns:a16="http://schemas.microsoft.com/office/drawing/2014/main" id="{60DB18DA-F22C-5C36-9309-248C5A19C09F}"/>
+              </a:ext>
+            </a:extLst>
+          </p:cNvPr>
+          <p:cNvPicPr>
+            <a:picLocks noChangeAspect="1"/>
+          </p:cNvPicPr>
+          <p:nvPr/>
+        </p:nvPicPr>
+        <p:blipFill>
+          <a:blip r:embed="rId3" cstate="print">
+            <a:extLst>
+              <a:ext uri="{28A0092B-C50C-407E-A947-70E740481C1C}">
+                <a14:useLocalDpi xmlns:a14="http://schemas.microsoft.com/office/drawing/2010/main"/>
+              </a:ext>
+            </a:extLst>
+          </a:blip>
+          <a:srcRect l="10010" t="23370" r="10354" b="5002"/>
+          <a:stretch/>
+        </p:blipFill>
+        <p:spPr>
+          <a:xfrm>
+            <a:off x="9413616" y="2348822"/>
+            <a:ext cx="1810508" cy="1325564"/>
+          </a:xfrm>
+          <a:prstGeom prst="rect">
+            <a:avLst/>
+          </a:prstGeom>
+        </p:spPr>
+      </p:pic>
+      <p:pic>
+        <p:nvPicPr>
+          <p:cNvPr id="7" name="Picture 6" descr="A picture of the internal layout of the Intel 4004 taken with a microscope showing gates and wires.">
+            <a:extLst>
+              <a:ext uri="{FF2B5EF4-FFF2-40B4-BE49-F238E27FC236}">
+                <a16:creationId xmlns:a16="http://schemas.microsoft.com/office/drawing/2014/main" id="{DE94410C-6E53-D131-2F0D-DA96A870B481}"/>
+              </a:ext>
+            </a:extLst>
+          </p:cNvPr>
+          <p:cNvPicPr>
+            <a:picLocks noChangeAspect="1"/>
+          </p:cNvPicPr>
+          <p:nvPr/>
+        </p:nvPicPr>
+        <p:blipFill>
+          <a:blip r:embed="rId4" cstate="print">
+            <a:extLst>
+              <a:ext uri="{28A0092B-C50C-407E-A947-70E740481C1C}">
+                <a14:useLocalDpi xmlns:a14="http://schemas.microsoft.com/office/drawing/2010/main"/>
+              </a:ext>
+            </a:extLst>
+          </a:blip>
+          <a:stretch>
+            <a:fillRect/>
+          </a:stretch>
+        </p:blipFill>
+        <p:spPr>
+          <a:xfrm>
+            <a:off x="8089403" y="3926627"/>
+            <a:ext cx="2597225" cy="1934932"/>
+          </a:xfrm>
+          <a:prstGeom prst="rect">
+            <a:avLst/>
+          </a:prstGeom>
+        </p:spPr>
+      </p:pic>
       <p:sp>
         <p:nvSpPr>
           <p:cNvPr id="9" name="Right Arrow 8">
@@ -6432,7 +6581,7 @@
         </p:nvSpPr>
         <p:spPr>
           <a:xfrm rot="7666410">
-            <a:off x="8802945" y="3243159"/>
+            <a:off x="8819686" y="3448093"/>
             <a:ext cx="518657" cy="226430"/>
           </a:xfrm>
           <a:prstGeom prst="rightArrow">
@@ -17263,7 +17412,7 @@
           <p:nvPr/>
         </p:nvPicPr>
         <p:blipFill>
-          <a:blip r:embed="rId2">
+          <a:blip r:embed="rId3">
             <a:extLst>
               <a:ext uri="{28A0092B-C50C-407E-A947-70E740481C1C}">
                 <a14:useLocalDpi xmlns:a14="http://schemas.microsoft.com/office/drawing/2010/main"/>
@@ -17295,54 +17444,6 @@
           </a:extLst>
         </p:spPr>
       </p:pic>
-      <p:sp>
-        <p:nvSpPr>
-          <p:cNvPr id="6" name="TextBox 5">
-            <a:extLst>
-              <a:ext uri="{FF2B5EF4-FFF2-40B4-BE49-F238E27FC236}">
-                <a16:creationId xmlns:a16="http://schemas.microsoft.com/office/drawing/2014/main" id="{6C714407-5B02-6E11-CFD0-67CDEE2219CD}"/>
-              </a:ext>
-            </a:extLst>
-          </p:cNvPr>
-          <p:cNvSpPr txBox="1"/>
-          <p:nvPr/>
-        </p:nvSpPr>
-        <p:spPr>
-          <a:xfrm>
-            <a:off x="1064968" y="5833756"/>
-            <a:ext cx="6101860" cy="369332"/>
-          </a:xfrm>
-          <a:prstGeom prst="rect">
-            <a:avLst/>
-          </a:prstGeom>
-          <a:noFill/>
-        </p:spPr>
-        <p:txBody>
-          <a:bodyPr wrap="square">
-            <a:spAutoFit/>
-          </a:bodyPr>
-          <a:lstStyle/>
-          <a:p>
-            <a:r>
-              <a:rPr lang="en-US" dirty="0"/>
-              <a:t>https://</a:t>
-            </a:r>
-            <a:r>
-              <a:rPr lang="en-US" dirty="0" err="1"/>
-              <a:t>en.wikipedia.org</a:t>
-            </a:r>
-            <a:r>
-              <a:rPr lang="en-US" dirty="0"/>
-              <a:t>/wiki/</a:t>
-            </a:r>
-            <a:r>
-              <a:rPr lang="en-US" dirty="0" err="1"/>
-              <a:t>Printed_circuit_board</a:t>
-            </a:r>
-            <a:endParaRPr lang="en-US" dirty="0"/>
-          </a:p>
-        </p:txBody>
-      </p:sp>
       <p:sp>
         <p:nvSpPr>
           <p:cNvPr id="8" name="TextBox 7">
@@ -18554,7 +18655,13 @@
     </p:bg>
     <p:spTree>
       <p:nvGrpSpPr>
-        <p:cNvPr id="1" name="Shape 354"/>
+        <p:cNvPr id="1" name="Shape 354">
+          <a:extLst>
+            <a:ext uri="{FF2B5EF4-FFF2-40B4-BE49-F238E27FC236}">
+              <a16:creationId xmlns:a16="http://schemas.microsoft.com/office/drawing/2014/main" id="{D8F0ADDD-1C82-910B-B4BA-669F9510A9DF}"/>
+            </a:ext>
+          </a:extLst>
+        </p:cNvPr>
         <p:cNvGrpSpPr/>
         <p:nvPr/>
       </p:nvGrpSpPr>
@@ -18571,7 +18678,7 @@
           <p:cNvPr id="4" name="Title 3">
             <a:extLst>
               <a:ext uri="{FF2B5EF4-FFF2-40B4-BE49-F238E27FC236}">
-                <a16:creationId xmlns:a16="http://schemas.microsoft.com/office/drawing/2014/main" id="{BDA5F635-2EAE-8131-5835-357097AAD8B5}"/>
+                <a16:creationId xmlns:a16="http://schemas.microsoft.com/office/drawing/2014/main" id="{5CDC8454-04A8-DB3A-EAAF-CE67329FB90D}"/>
               </a:ext>
             </a:extLst>
           </p:cNvPr>
@@ -18600,141 +18707,17 @@
                   <a:schemeClr val="bg1"/>
                 </a:solidFill>
               </a:rPr>
-              <a:t>Generic Computer</a:t>
+              <a:t>Generic CPU</a:t>
             </a:r>
           </a:p>
         </p:txBody>
       </p:sp>
-      <p:sp>
-        <p:nvSpPr>
-          <p:cNvPr id="356" name="Shape 356"/>
-          <p:cNvSpPr txBox="1"/>
-          <p:nvPr/>
-        </p:nvSpPr>
-        <p:spPr>
-          <a:xfrm>
-            <a:off x="2124076" y="1591077"/>
-            <a:ext cx="1638299" cy="1638299"/>
-          </a:xfrm>
-          <a:prstGeom prst="rect">
-            <a:avLst/>
-          </a:prstGeom>
-          <a:noFill/>
-          <a:ln w="76200" cap="rnd" cmpd="sng">
-            <a:solidFill>
-              <a:srgbClr val="00FF00"/>
-            </a:solidFill>
-            <a:prstDash val="solid"/>
-            <a:miter/>
-            <a:headEnd type="none" w="med" len="med"/>
-            <a:tailEnd type="none" w="med" len="med"/>
-          </a:ln>
-        </p:spPr>
-        <p:txBody>
-          <a:bodyPr lIns="0" tIns="0" rIns="0" bIns="0" anchor="ctr" anchorCtr="0">
-            <a:noAutofit/>
-          </a:bodyPr>
-          <a:lstStyle/>
-          <a:p>
-            <a:pPr algn="ctr">
-              <a:buClr>
-                <a:schemeClr val="lt1"/>
-              </a:buClr>
-              <a:buSzPct val="25000"/>
-            </a:pPr>
-            <a:r>
-              <a:rPr lang="en-US" sz="2400">
-                <a:solidFill>
-                  <a:schemeClr val="lt1"/>
-                </a:solidFill>
-                <a:latin typeface="Arial" charset="0"/>
-                <a:ea typeface="Arial" charset="0"/>
-                <a:cs typeface="Arial" charset="0"/>
-                <a:sym typeface="Cabin"/>
-              </a:rPr>
-              <a:t>Input</a:t>
-            </a:r>
-          </a:p>
-          <a:p>
-            <a:pPr algn="ctr">
-              <a:buClr>
-                <a:schemeClr val="lt1"/>
-              </a:buClr>
-              <a:buSzPct val="25000"/>
-            </a:pPr>
-            <a:r>
-              <a:rPr lang="en-US" sz="2400">
-                <a:solidFill>
-                  <a:schemeClr val="lt1"/>
-                </a:solidFill>
-                <a:latin typeface="Arial" charset="0"/>
-                <a:ea typeface="Arial" charset="0"/>
-                <a:cs typeface="Arial" charset="0"/>
-                <a:sym typeface="Cabin"/>
-              </a:rPr>
-              <a:t>and Output</a:t>
-            </a:r>
-          </a:p>
-          <a:p>
-            <a:pPr algn="ctr">
-              <a:buClr>
-                <a:schemeClr val="lt1"/>
-              </a:buClr>
-              <a:buSzPct val="25000"/>
-            </a:pPr>
-            <a:r>
-              <a:rPr lang="en-US" sz="2400">
-                <a:solidFill>
-                  <a:schemeClr val="lt1"/>
-                </a:solidFill>
-                <a:latin typeface="Arial" charset="0"/>
-                <a:ea typeface="Arial" charset="0"/>
-                <a:cs typeface="Arial" charset="0"/>
-                <a:sym typeface="Cabin"/>
-              </a:rPr>
-              <a:t>Devices</a:t>
-            </a:r>
-          </a:p>
-        </p:txBody>
-      </p:sp>
-      <p:cxnSp>
-        <p:nvCxnSpPr>
-          <p:cNvPr id="360" name="Shape 360">
-            <a:extLst>
-              <a:ext uri="{C183D7F6-B498-43B3-948B-1728B52AA6E4}">
-                <adec:decorative xmlns:adec="http://schemas.microsoft.com/office/drawing/2017/decorative" val="1"/>
-              </a:ext>
-            </a:extLst>
-          </p:cNvPr>
-          <p:cNvCxnSpPr/>
-          <p:nvPr/>
-        </p:nvCxnSpPr>
-        <p:spPr>
-          <a:xfrm flipH="1">
-            <a:off x="3773089" y="2436420"/>
-            <a:ext cx="794147" cy="13096"/>
-          </a:xfrm>
-          <a:prstGeom prst="straightConnector1">
-            <a:avLst/>
-          </a:prstGeom>
-          <a:noFill/>
-          <a:ln w="88900" cap="rnd" cmpd="sng">
-            <a:solidFill>
-              <a:srgbClr val="FFFF00"/>
-            </a:solidFill>
-            <a:prstDash val="solid"/>
-            <a:miter/>
-            <a:headEnd type="stealth" w="med" len="med"/>
-            <a:tailEnd type="stealth" w="med" len="med"/>
-          </a:ln>
-        </p:spPr>
-      </p:cxnSp>
       <p:grpSp>
         <p:nvGrpSpPr>
-          <p:cNvPr id="5" name="Group 4" descr="Software is stored in the main memory of the computer and then read from that main memory and executed by the CPU&#13;&#10;">
+          <p:cNvPr id="8" name="Group 7" descr="A block diagram of a CPU with I/O devices, a CPU, memory and secondary memory.  Software is stored in the memory of the computer and then read from that main memory and executed by the CPU.&#13;&#10;">
             <a:extLst>
               <a:ext uri="{FF2B5EF4-FFF2-40B4-BE49-F238E27FC236}">
-                <a16:creationId xmlns:a16="http://schemas.microsoft.com/office/drawing/2014/main" id="{F3760502-87E0-5ECF-5287-FC384E55320D}"/>
+                <a16:creationId xmlns:a16="http://schemas.microsoft.com/office/drawing/2014/main" id="{A42D6C91-4D3C-BC7B-79A6-2924DEAA7608}"/>
               </a:ext>
             </a:extLst>
           </p:cNvPr>
@@ -18743,89 +18726,28 @@
         </p:nvGrpSpPr>
         <p:grpSpPr>
           <a:xfrm>
-            <a:off x="4572001" y="1029102"/>
-            <a:ext cx="2590799" cy="4867274"/>
-            <a:chOff x="4572001" y="1029102"/>
-            <a:chExt cx="2590799" cy="4867274"/>
+            <a:off x="2124076" y="1029102"/>
+            <a:ext cx="9020755" cy="4966330"/>
+            <a:chOff x="2124076" y="1029102"/>
+            <a:chExt cx="9020755" cy="4966330"/>
           </a:xfrm>
         </p:grpSpPr>
         <p:sp>
           <p:nvSpPr>
-            <p:cNvPr id="355" name="Shape 355"/>
+            <p:cNvPr id="356" name="Shape 356">
+              <a:extLst>
+                <a:ext uri="{FF2B5EF4-FFF2-40B4-BE49-F238E27FC236}">
+                  <a16:creationId xmlns:a16="http://schemas.microsoft.com/office/drawing/2014/main" id="{48545ABA-E5D5-95C2-4CFE-EFBBAE34B9E2}"/>
+                </a:ext>
+              </a:extLst>
+            </p:cNvPr>
             <p:cNvSpPr txBox="1"/>
             <p:nvPr/>
           </p:nvSpPr>
           <p:spPr>
             <a:xfrm>
-              <a:off x="4572001" y="1029102"/>
-              <a:ext cx="2590799" cy="4867274"/>
-            </a:xfrm>
-            <a:prstGeom prst="rect">
-              <a:avLst/>
-            </a:prstGeom>
-            <a:noFill/>
-            <a:ln w="76200" cap="rnd" cmpd="sng">
-              <a:solidFill>
-                <a:srgbClr val="00FFFF"/>
-              </a:solidFill>
-              <a:prstDash val="solid"/>
-              <a:miter/>
-              <a:headEnd type="none" w="med" len="med"/>
-              <a:tailEnd type="none" w="med" len="med"/>
-            </a:ln>
-          </p:spPr>
-          <p:txBody>
-            <a:bodyPr lIns="0" tIns="0" rIns="0" bIns="0" anchor="t" anchorCtr="0">
-              <a:noAutofit/>
-            </a:bodyPr>
-            <a:lstStyle/>
-            <a:p>
-              <a:pPr>
-                <a:spcBef>
-                  <a:spcPts val="750"/>
-                </a:spcBef>
-                <a:buClr>
-                  <a:srgbClr val="FF00FF"/>
-                </a:buClr>
-                <a:buSzPct val="25000"/>
-              </a:pPr>
-              <a:r>
-                <a:rPr lang="en-US" sz="2400">
-                  <a:solidFill>
-                    <a:srgbClr val="FF00FF"/>
-                  </a:solidFill>
-                  <a:latin typeface="Arial" charset="0"/>
-                  <a:ea typeface="Arial" charset="0"/>
-                  <a:cs typeface="Arial" charset="0"/>
-                  <a:sym typeface="Cabin"/>
-                </a:rPr>
-                <a:t>  </a:t>
-              </a:r>
-              <a:r>
-                <a:rPr lang="en-US" sz="2400">
-                  <a:solidFill>
-                    <a:srgbClr val="00FFFF"/>
-                  </a:solidFill>
-                  <a:latin typeface="Arial" charset="0"/>
-                  <a:ea typeface="Arial" charset="0"/>
-                  <a:cs typeface="Arial" charset="0"/>
-                  <a:sym typeface="Cabin"/>
-                </a:rPr>
-                <a:t>Software</a:t>
-              </a:r>
-            </a:p>
-          </p:txBody>
-        </p:sp>
-        <p:sp>
-          <p:nvSpPr>
-            <p:cNvPr id="357" name="Shape 357"/>
-            <p:cNvSpPr txBox="1"/>
-            <p:nvPr/>
-          </p:nvSpPr>
-          <p:spPr>
-            <a:xfrm>
-              <a:off x="5048251" y="1667277"/>
-              <a:ext cx="1600199" cy="1485899"/>
+              <a:off x="2124076" y="1591077"/>
+              <a:ext cx="1638299" cy="1638299"/>
             </a:xfrm>
             <a:prstGeom prst="rect">
               <a:avLst/>
@@ -18863,7 +18785,7 @@
                   <a:cs typeface="Arial" charset="0"/>
                   <a:sym typeface="Cabin"/>
                 </a:rPr>
-                <a:t>Central</a:t>
+                <a:t>Input</a:t>
               </a:r>
             </a:p>
             <a:p>
@@ -18883,7 +18805,7 @@
                   <a:cs typeface="Arial" charset="0"/>
                   <a:sym typeface="Cabin"/>
                 </a:rPr>
-                <a:t>Processing</a:t>
+                <a:t>and Output</a:t>
               </a:r>
             </a:p>
             <a:p>
@@ -18903,21 +18825,437 @@
                   <a:cs typeface="Arial" charset="0"/>
                   <a:sym typeface="Cabin"/>
                 </a:rPr>
-                <a:t>Unit</a:t>
+                <a:t>Devices</a:t>
               </a:r>
             </a:p>
           </p:txBody>
         </p:sp>
+        <p:cxnSp>
+          <p:nvCxnSpPr>
+            <p:cNvPr id="360" name="Shape 360">
+              <a:extLst>
+                <a:ext uri="{FF2B5EF4-FFF2-40B4-BE49-F238E27FC236}">
+                  <a16:creationId xmlns:a16="http://schemas.microsoft.com/office/drawing/2014/main" id="{7BF37C51-83E5-789A-1EDD-53DB71E0A243}"/>
+                </a:ext>
+                <a:ext uri="{C183D7F6-B498-43B3-948B-1728B52AA6E4}">
+                  <adec:decorative xmlns:adec="http://schemas.microsoft.com/office/drawing/2017/decorative" val="1"/>
+                </a:ext>
+              </a:extLst>
+            </p:cNvPr>
+            <p:cNvCxnSpPr/>
+            <p:nvPr/>
+          </p:nvCxnSpPr>
+          <p:spPr>
+            <a:xfrm flipH="1">
+              <a:off x="3773089" y="2436420"/>
+              <a:ext cx="794147" cy="13096"/>
+            </a:xfrm>
+            <a:prstGeom prst="straightConnector1">
+              <a:avLst/>
+            </a:prstGeom>
+            <a:noFill/>
+            <a:ln w="88900" cap="rnd" cmpd="sng">
+              <a:solidFill>
+                <a:srgbClr val="FFFF00"/>
+              </a:solidFill>
+              <a:prstDash val="solid"/>
+              <a:miter/>
+              <a:headEnd type="stealth" w="med" len="med"/>
+              <a:tailEnd type="stealth" w="med" len="med"/>
+            </a:ln>
+          </p:spPr>
+        </p:cxnSp>
+        <p:grpSp>
+          <p:nvGrpSpPr>
+            <p:cNvPr id="5" name="Group 4" descr="Software is stored in the main memory of the computer and then read from that main memory and executed by the CPU&#13;&#10;">
+              <a:extLst>
+                <a:ext uri="{FF2B5EF4-FFF2-40B4-BE49-F238E27FC236}">
+                  <a16:creationId xmlns:a16="http://schemas.microsoft.com/office/drawing/2014/main" id="{B8351A8B-2F7C-5CE3-4DFB-0EF1EE7AB8E0}"/>
+                </a:ext>
+              </a:extLst>
+            </p:cNvPr>
+            <p:cNvGrpSpPr/>
+            <p:nvPr/>
+          </p:nvGrpSpPr>
+          <p:grpSpPr>
+            <a:xfrm>
+              <a:off x="4572001" y="1029102"/>
+              <a:ext cx="2590799" cy="4867274"/>
+              <a:chOff x="4572001" y="1029102"/>
+              <a:chExt cx="2590799" cy="4867274"/>
+            </a:xfrm>
+          </p:grpSpPr>
+          <p:sp>
+            <p:nvSpPr>
+              <p:cNvPr id="355" name="Shape 355">
+                <a:extLst>
+                  <a:ext uri="{FF2B5EF4-FFF2-40B4-BE49-F238E27FC236}">
+                    <a16:creationId xmlns:a16="http://schemas.microsoft.com/office/drawing/2014/main" id="{78ABF434-99A5-FBEB-9452-C42954BD99E6}"/>
+                  </a:ext>
+                </a:extLst>
+              </p:cNvPr>
+              <p:cNvSpPr txBox="1"/>
+              <p:nvPr/>
+            </p:nvSpPr>
+            <p:spPr>
+              <a:xfrm>
+                <a:off x="4572001" y="1029102"/>
+                <a:ext cx="2590799" cy="4867274"/>
+              </a:xfrm>
+              <a:prstGeom prst="rect">
+                <a:avLst/>
+              </a:prstGeom>
+              <a:noFill/>
+              <a:ln w="76200" cap="rnd" cmpd="sng">
+                <a:solidFill>
+                  <a:srgbClr val="00FFFF"/>
+                </a:solidFill>
+                <a:prstDash val="solid"/>
+                <a:miter/>
+                <a:headEnd type="none" w="med" len="med"/>
+                <a:tailEnd type="none" w="med" len="med"/>
+              </a:ln>
+            </p:spPr>
+            <p:txBody>
+              <a:bodyPr lIns="0" tIns="0" rIns="0" bIns="0" anchor="t" anchorCtr="0">
+                <a:noAutofit/>
+              </a:bodyPr>
+              <a:lstStyle/>
+              <a:p>
+                <a:pPr>
+                  <a:spcBef>
+                    <a:spcPts val="750"/>
+                  </a:spcBef>
+                  <a:buClr>
+                    <a:srgbClr val="FF00FF"/>
+                  </a:buClr>
+                  <a:buSzPct val="25000"/>
+                </a:pPr>
+                <a:r>
+                  <a:rPr lang="en-US" sz="2400">
+                    <a:solidFill>
+                      <a:srgbClr val="FF00FF"/>
+                    </a:solidFill>
+                    <a:latin typeface="Arial" charset="0"/>
+                    <a:ea typeface="Arial" charset="0"/>
+                    <a:cs typeface="Arial" charset="0"/>
+                    <a:sym typeface="Cabin"/>
+                  </a:rPr>
+                  <a:t>  </a:t>
+                </a:r>
+                <a:r>
+                  <a:rPr lang="en-US" sz="2400">
+                    <a:solidFill>
+                      <a:srgbClr val="00FFFF"/>
+                    </a:solidFill>
+                    <a:latin typeface="Arial" charset="0"/>
+                    <a:ea typeface="Arial" charset="0"/>
+                    <a:cs typeface="Arial" charset="0"/>
+                    <a:sym typeface="Cabin"/>
+                  </a:rPr>
+                  <a:t>Software</a:t>
+                </a:r>
+              </a:p>
+            </p:txBody>
+          </p:sp>
+          <p:sp>
+            <p:nvSpPr>
+              <p:cNvPr id="357" name="Shape 357">
+                <a:extLst>
+                  <a:ext uri="{FF2B5EF4-FFF2-40B4-BE49-F238E27FC236}">
+                    <a16:creationId xmlns:a16="http://schemas.microsoft.com/office/drawing/2014/main" id="{D8A52E73-D122-5CE5-A6CA-C9EFB9995390}"/>
+                  </a:ext>
+                </a:extLst>
+              </p:cNvPr>
+              <p:cNvSpPr txBox="1"/>
+              <p:nvPr/>
+            </p:nvSpPr>
+            <p:spPr>
+              <a:xfrm>
+                <a:off x="5048251" y="1667277"/>
+                <a:ext cx="1600199" cy="1485899"/>
+              </a:xfrm>
+              <a:prstGeom prst="rect">
+                <a:avLst/>
+              </a:prstGeom>
+              <a:noFill/>
+              <a:ln w="76200" cap="rnd" cmpd="sng">
+                <a:solidFill>
+                  <a:srgbClr val="00FF00"/>
+                </a:solidFill>
+                <a:prstDash val="solid"/>
+                <a:miter/>
+                <a:headEnd type="none" w="med" len="med"/>
+                <a:tailEnd type="none" w="med" len="med"/>
+              </a:ln>
+            </p:spPr>
+            <p:txBody>
+              <a:bodyPr lIns="0" tIns="0" rIns="0" bIns="0" anchor="ctr" anchorCtr="0">
+                <a:noAutofit/>
+              </a:bodyPr>
+              <a:lstStyle/>
+              <a:p>
+                <a:pPr algn="ctr">
+                  <a:buClr>
+                    <a:schemeClr val="lt1"/>
+                  </a:buClr>
+                  <a:buSzPct val="25000"/>
+                </a:pPr>
+                <a:r>
+                  <a:rPr lang="en-US" sz="2400">
+                    <a:solidFill>
+                      <a:schemeClr val="lt1"/>
+                    </a:solidFill>
+                    <a:latin typeface="Arial" charset="0"/>
+                    <a:ea typeface="Arial" charset="0"/>
+                    <a:cs typeface="Arial" charset="0"/>
+                    <a:sym typeface="Cabin"/>
+                  </a:rPr>
+                  <a:t>Central</a:t>
+                </a:r>
+              </a:p>
+              <a:p>
+                <a:pPr algn="ctr">
+                  <a:buClr>
+                    <a:schemeClr val="lt1"/>
+                  </a:buClr>
+                  <a:buSzPct val="25000"/>
+                </a:pPr>
+                <a:r>
+                  <a:rPr lang="en-US" sz="2400">
+                    <a:solidFill>
+                      <a:schemeClr val="lt1"/>
+                    </a:solidFill>
+                    <a:latin typeface="Arial" charset="0"/>
+                    <a:ea typeface="Arial" charset="0"/>
+                    <a:cs typeface="Arial" charset="0"/>
+                    <a:sym typeface="Cabin"/>
+                  </a:rPr>
+                  <a:t>Processing</a:t>
+                </a:r>
+              </a:p>
+              <a:p>
+                <a:pPr algn="ctr">
+                  <a:buClr>
+                    <a:schemeClr val="lt1"/>
+                  </a:buClr>
+                  <a:buSzPct val="25000"/>
+                </a:pPr>
+                <a:r>
+                  <a:rPr lang="en-US" sz="2400">
+                    <a:solidFill>
+                      <a:schemeClr val="lt1"/>
+                    </a:solidFill>
+                    <a:latin typeface="Arial" charset="0"/>
+                    <a:ea typeface="Arial" charset="0"/>
+                    <a:cs typeface="Arial" charset="0"/>
+                    <a:sym typeface="Cabin"/>
+                  </a:rPr>
+                  <a:t>Unit</a:t>
+                </a:r>
+              </a:p>
+            </p:txBody>
+          </p:sp>
+          <p:sp>
+            <p:nvSpPr>
+              <p:cNvPr id="358" name="Shape 358">
+                <a:extLst>
+                  <a:ext uri="{FF2B5EF4-FFF2-40B4-BE49-F238E27FC236}">
+                    <a16:creationId xmlns:a16="http://schemas.microsoft.com/office/drawing/2014/main" id="{A1B36257-B584-BEF1-1A01-999EB2747D3B}"/>
+                  </a:ext>
+                </a:extLst>
+              </p:cNvPr>
+              <p:cNvSpPr txBox="1"/>
+              <p:nvPr/>
+            </p:nvSpPr>
+            <p:spPr>
+              <a:xfrm>
+                <a:off x="5048250" y="3943752"/>
+                <a:ext cx="1628775" cy="1600199"/>
+              </a:xfrm>
+              <a:prstGeom prst="rect">
+                <a:avLst/>
+              </a:prstGeom>
+              <a:noFill/>
+              <a:ln w="76200" cap="rnd" cmpd="sng">
+                <a:solidFill>
+                  <a:srgbClr val="00FF00"/>
+                </a:solidFill>
+                <a:prstDash val="solid"/>
+                <a:miter/>
+                <a:headEnd type="none" w="med" len="med"/>
+                <a:tailEnd type="none" w="med" len="med"/>
+              </a:ln>
+            </p:spPr>
+            <p:txBody>
+              <a:bodyPr lIns="0" tIns="0" rIns="0" bIns="0" anchor="ctr" anchorCtr="0">
+                <a:noAutofit/>
+              </a:bodyPr>
+              <a:lstStyle/>
+              <a:p>
+                <a:pPr algn="ctr">
+                  <a:buClr>
+                    <a:schemeClr val="lt1"/>
+                  </a:buClr>
+                  <a:buSzPct val="25000"/>
+                </a:pPr>
+                <a:r>
+                  <a:rPr lang="en-US" sz="2400">
+                    <a:solidFill>
+                      <a:schemeClr val="lt1"/>
+                    </a:solidFill>
+                    <a:latin typeface="Arial" charset="0"/>
+                    <a:ea typeface="Arial" charset="0"/>
+                    <a:cs typeface="Arial" charset="0"/>
+                    <a:sym typeface="Cabin"/>
+                  </a:rPr>
+                  <a:t>Main</a:t>
+                </a:r>
+              </a:p>
+              <a:p>
+                <a:pPr algn="ctr">
+                  <a:buClr>
+                    <a:schemeClr val="lt1"/>
+                  </a:buClr>
+                  <a:buSzPct val="25000"/>
+                </a:pPr>
+                <a:r>
+                  <a:rPr lang="en-US" sz="2400">
+                    <a:solidFill>
+                      <a:schemeClr val="lt1"/>
+                    </a:solidFill>
+                    <a:latin typeface="Arial" charset="0"/>
+                    <a:ea typeface="Arial" charset="0"/>
+                    <a:cs typeface="Arial" charset="0"/>
+                    <a:sym typeface="Cabin"/>
+                  </a:rPr>
+                  <a:t>Memory</a:t>
+                </a:r>
+              </a:p>
+            </p:txBody>
+          </p:sp>
+          <p:cxnSp>
+            <p:nvCxnSpPr>
+              <p:cNvPr id="361" name="Shape 361">
+                <a:extLst>
+                  <a:ext uri="{FF2B5EF4-FFF2-40B4-BE49-F238E27FC236}">
+                    <a16:creationId xmlns:a16="http://schemas.microsoft.com/office/drawing/2014/main" id="{9675E2A7-7FCF-5576-570E-5118C06287A1}"/>
+                  </a:ext>
+                  <a:ext uri="{C183D7F6-B498-43B3-948B-1728B52AA6E4}">
+                    <adec:decorative xmlns:adec="http://schemas.microsoft.com/office/drawing/2017/decorative" val="1"/>
+                  </a:ext>
+                </a:extLst>
+              </p:cNvPr>
+              <p:cNvCxnSpPr/>
+              <p:nvPr/>
+            </p:nvCxnSpPr>
+            <p:spPr>
+              <a:xfrm rot="10800000">
+                <a:off x="5543550" y="3174607"/>
+                <a:ext cx="0" cy="728663"/>
+              </a:xfrm>
+              <a:prstGeom prst="straightConnector1">
+                <a:avLst/>
+              </a:prstGeom>
+              <a:noFill/>
+              <a:ln w="88900" cap="rnd" cmpd="sng">
+                <a:solidFill>
+                  <a:srgbClr val="FFFF00"/>
+                </a:solidFill>
+                <a:prstDash val="solid"/>
+                <a:miter/>
+                <a:headEnd type="stealth" w="med" len="med"/>
+                <a:tailEnd type="none" w="med" len="med"/>
+              </a:ln>
+            </p:spPr>
+          </p:cxnSp>
+          <p:cxnSp>
+            <p:nvCxnSpPr>
+              <p:cNvPr id="362" name="Shape 362">
+                <a:extLst>
+                  <a:ext uri="{FF2B5EF4-FFF2-40B4-BE49-F238E27FC236}">
+                    <a16:creationId xmlns:a16="http://schemas.microsoft.com/office/drawing/2014/main" id="{4EAE6301-450D-4622-4C56-DB5693E0091C}"/>
+                  </a:ext>
+                  <a:ext uri="{C183D7F6-B498-43B3-948B-1728B52AA6E4}">
+                    <adec:decorative xmlns:adec="http://schemas.microsoft.com/office/drawing/2017/decorative" val="1"/>
+                  </a:ext>
+                </a:extLst>
+              </p:cNvPr>
+              <p:cNvCxnSpPr/>
+              <p:nvPr/>
+            </p:nvCxnSpPr>
+            <p:spPr>
+              <a:xfrm>
+                <a:off x="6259115" y="3187704"/>
+                <a:ext cx="0" cy="689372"/>
+              </a:xfrm>
+              <a:prstGeom prst="straightConnector1">
+                <a:avLst/>
+              </a:prstGeom>
+              <a:noFill/>
+              <a:ln w="88900" cap="rnd" cmpd="sng">
+                <a:solidFill>
+                  <a:srgbClr val="FFFF00"/>
+                </a:solidFill>
+                <a:prstDash val="solid"/>
+                <a:miter/>
+                <a:headEnd type="stealth" w="med" len="med"/>
+                <a:tailEnd type="none" w="med" len="med"/>
+              </a:ln>
+            </p:spPr>
+          </p:cxnSp>
+        </p:grpSp>
+        <p:cxnSp>
+          <p:nvCxnSpPr>
+            <p:cNvPr id="364" name="Shape 364">
+              <a:extLst>
+                <a:ext uri="{FF2B5EF4-FFF2-40B4-BE49-F238E27FC236}">
+                  <a16:creationId xmlns:a16="http://schemas.microsoft.com/office/drawing/2014/main" id="{2C53AC17-89ED-0A5D-BE7A-A3B3354AAD44}"/>
+                </a:ext>
+                <a:ext uri="{C183D7F6-B498-43B3-948B-1728B52AA6E4}">
+                  <adec:decorative xmlns:adec="http://schemas.microsoft.com/office/drawing/2017/decorative" val="1"/>
+                </a:ext>
+              </a:extLst>
+            </p:cNvPr>
+            <p:cNvCxnSpPr/>
+            <p:nvPr/>
+          </p:nvCxnSpPr>
+          <p:spPr>
+            <a:xfrm>
+              <a:off x="7215187" y="3658001"/>
+              <a:ext cx="1184672" cy="0"/>
+            </a:xfrm>
+            <a:prstGeom prst="straightConnector1">
+              <a:avLst/>
+            </a:prstGeom>
+            <a:noFill/>
+            <a:ln w="88900" cap="rnd" cmpd="sng">
+              <a:solidFill>
+                <a:srgbClr val="FFFF00"/>
+              </a:solidFill>
+              <a:prstDash val="solid"/>
+              <a:miter/>
+              <a:headEnd type="stealth" w="med" len="med"/>
+              <a:tailEnd type="none" w="med" len="med"/>
+            </a:ln>
+          </p:spPr>
+        </p:cxnSp>
         <p:sp>
           <p:nvSpPr>
-            <p:cNvPr id="358" name="Shape 358"/>
+            <p:cNvPr id="359" name="Shape 359">
+              <a:extLst>
+                <a:ext uri="{FF2B5EF4-FFF2-40B4-BE49-F238E27FC236}">
+                  <a16:creationId xmlns:a16="http://schemas.microsoft.com/office/drawing/2014/main" id="{1120FF52-697A-4AC7-537E-6D293BBCDF27}"/>
+                </a:ext>
+              </a:extLst>
+            </p:cNvPr>
             <p:cNvSpPr txBox="1"/>
             <p:nvPr/>
           </p:nvSpPr>
           <p:spPr>
             <a:xfrm>
-              <a:off x="5048250" y="3943752"/>
-              <a:ext cx="1628775" cy="1600199"/>
+              <a:off x="8448676" y="2572152"/>
+              <a:ext cx="1638299" cy="1638299"/>
             </a:xfrm>
             <a:prstGeom prst="rect">
               <a:avLst/>
@@ -18946,7 +19284,7 @@
                 <a:buSzPct val="25000"/>
               </a:pPr>
               <a:r>
-                <a:rPr lang="en-US" sz="2400" dirty="0">
+                <a:rPr lang="en-US" sz="2400">
                   <a:solidFill>
                     <a:schemeClr val="lt1"/>
                   </a:solidFill>
@@ -18955,7 +19293,7 @@
                   <a:cs typeface="Arial" charset="0"/>
                   <a:sym typeface="Cabin"/>
                 </a:rPr>
-                <a:t>Main</a:t>
+                <a:t>Secondary</a:t>
               </a:r>
             </a:p>
             <a:p>
@@ -18966,7 +19304,7 @@
                 <a:buSzPct val="25000"/>
               </a:pPr>
               <a:r>
-                <a:rPr lang="en-US" sz="2400" dirty="0">
+                <a:rPr lang="en-US" sz="2400">
                   <a:solidFill>
                     <a:schemeClr val="lt1"/>
                   </a:solidFill>
@@ -18982,8 +19320,11 @@
         </p:sp>
         <p:cxnSp>
           <p:nvCxnSpPr>
-            <p:cNvPr id="361" name="Shape 361">
+            <p:cNvPr id="363" name="Shape 363">
               <a:extLst>
+                <a:ext uri="{FF2B5EF4-FFF2-40B4-BE49-F238E27FC236}">
+                  <a16:creationId xmlns:a16="http://schemas.microsoft.com/office/drawing/2014/main" id="{43BCECE8-1697-ACC1-CEC4-C187AEF607A0}"/>
+                </a:ext>
                 <a:ext uri="{C183D7F6-B498-43B3-948B-1728B52AA6E4}">
                   <adec:decorative xmlns:adec="http://schemas.microsoft.com/office/drawing/2017/decorative" val="1"/>
                 </a:ext>
@@ -18993,9 +19334,9 @@
             <p:nvPr/>
           </p:nvCxnSpPr>
           <p:spPr>
-            <a:xfrm rot="10800000">
-              <a:off x="5543550" y="3174607"/>
-              <a:ext cx="0" cy="728663"/>
+            <a:xfrm flipH="1">
+              <a:off x="7241382" y="2904336"/>
+              <a:ext cx="1171574" cy="13096"/>
             </a:xfrm>
             <a:prstGeom prst="straightConnector1">
               <a:avLst/>
@@ -19012,184 +19353,54 @@
             </a:ln>
           </p:spPr>
         </p:cxnSp>
-        <p:cxnSp>
-          <p:nvCxnSpPr>
-            <p:cNvPr id="362" name="Shape 362">
+        <p:sp>
+          <p:nvSpPr>
+            <p:cNvPr id="6" name="TextBox 5">
               <a:extLst>
-                <a:ext uri="{C183D7F6-B498-43B3-948B-1728B52AA6E4}">
-                  <adec:decorative xmlns:adec="http://schemas.microsoft.com/office/drawing/2017/decorative" val="1"/>
+                <a:ext uri="{FF2B5EF4-FFF2-40B4-BE49-F238E27FC236}">
+                  <a16:creationId xmlns:a16="http://schemas.microsoft.com/office/drawing/2014/main" id="{2B87C422-647C-9DB7-1CCC-834A8F1E803C}"/>
                 </a:ext>
               </a:extLst>
             </p:cNvPr>
-            <p:cNvCxnSpPr/>
+            <p:cNvSpPr txBox="1"/>
             <p:nvPr/>
-          </p:nvCxnSpPr>
+          </p:nvSpPr>
           <p:spPr>
             <a:xfrm>
-              <a:off x="6259115" y="3187704"/>
-              <a:ext cx="0" cy="689372"/>
+              <a:off x="10960100" y="5626100"/>
+              <a:ext cx="184731" cy="369332"/>
             </a:xfrm>
-            <a:prstGeom prst="straightConnector1">
+            <a:prstGeom prst="rect">
               <a:avLst/>
             </a:prstGeom>
             <a:noFill/>
-            <a:ln w="88900" cap="rnd" cmpd="sng">
-              <a:solidFill>
-                <a:srgbClr val="FFFF00"/>
-              </a:solidFill>
-              <a:prstDash val="solid"/>
-              <a:miter/>
-              <a:headEnd type="stealth" w="med" len="med"/>
-              <a:tailEnd type="none" w="med" len="med"/>
-            </a:ln>
           </p:spPr>
-        </p:cxnSp>
+          <p:txBody>
+            <a:bodyPr wrap="none" rtlCol="0">
+              <a:spAutoFit/>
+            </a:bodyPr>
+            <a:lstStyle/>
+            <a:p>
+              <a:endParaRPr lang="en-US" dirty="0"/>
+            </a:p>
+          </p:txBody>
+        </p:sp>
       </p:grpSp>
-      <p:cxnSp>
-        <p:nvCxnSpPr>
-          <p:cNvPr id="364" name="Shape 364">
-            <a:extLst>
-              <a:ext uri="{C183D7F6-B498-43B3-948B-1728B52AA6E4}">
-                <adec:decorative xmlns:adec="http://schemas.microsoft.com/office/drawing/2017/decorative" val="1"/>
-              </a:ext>
-            </a:extLst>
-          </p:cNvPr>
-          <p:cNvCxnSpPr/>
-          <p:nvPr/>
-        </p:nvCxnSpPr>
-        <p:spPr>
-          <a:xfrm>
-            <a:off x="7215187" y="3658001"/>
-            <a:ext cx="1184672" cy="0"/>
-          </a:xfrm>
-          <a:prstGeom prst="straightConnector1">
-            <a:avLst/>
-          </a:prstGeom>
-          <a:noFill/>
-          <a:ln w="88900" cap="rnd" cmpd="sng">
-            <a:solidFill>
-              <a:srgbClr val="FFFF00"/>
-            </a:solidFill>
-            <a:prstDash val="solid"/>
-            <a:miter/>
-            <a:headEnd type="stealth" w="med" len="med"/>
-            <a:tailEnd type="none" w="med" len="med"/>
-          </a:ln>
-        </p:spPr>
-      </p:cxnSp>
-      <p:cxnSp>
-        <p:nvCxnSpPr>
-          <p:cNvPr id="363" name="Shape 363">
-            <a:extLst>
-              <a:ext uri="{C183D7F6-B498-43B3-948B-1728B52AA6E4}">
-                <adec:decorative xmlns:adec="http://schemas.microsoft.com/office/drawing/2017/decorative" val="1"/>
-              </a:ext>
-            </a:extLst>
-          </p:cNvPr>
-          <p:cNvCxnSpPr/>
-          <p:nvPr/>
-        </p:nvCxnSpPr>
-        <p:spPr>
-          <a:xfrm flipH="1">
-            <a:off x="7241382" y="2904336"/>
-            <a:ext cx="1171574" cy="13096"/>
-          </a:xfrm>
-          <a:prstGeom prst="straightConnector1">
-            <a:avLst/>
-          </a:prstGeom>
-          <a:noFill/>
-          <a:ln w="88900" cap="rnd" cmpd="sng">
-            <a:solidFill>
-              <a:srgbClr val="FFFF00"/>
-            </a:solidFill>
-            <a:prstDash val="solid"/>
-            <a:miter/>
-            <a:headEnd type="stealth" w="med" len="med"/>
-            <a:tailEnd type="none" w="med" len="med"/>
-          </a:ln>
-        </p:spPr>
-      </p:cxnSp>
       <p:sp>
         <p:nvSpPr>
-          <p:cNvPr id="359" name="Shape 359"/>
-          <p:cNvSpPr txBox="1"/>
-          <p:nvPr/>
-        </p:nvSpPr>
-        <p:spPr>
-          <a:xfrm>
-            <a:off x="8448676" y="2572152"/>
-            <a:ext cx="1638299" cy="1638299"/>
-          </a:xfrm>
-          <a:prstGeom prst="rect">
-            <a:avLst/>
-          </a:prstGeom>
-          <a:noFill/>
-          <a:ln w="76200" cap="rnd" cmpd="sng">
-            <a:solidFill>
-              <a:srgbClr val="00FF00"/>
-            </a:solidFill>
-            <a:prstDash val="solid"/>
-            <a:miter/>
-            <a:headEnd type="none" w="med" len="med"/>
-            <a:tailEnd type="none" w="med" len="med"/>
-          </a:ln>
-        </p:spPr>
-        <p:txBody>
-          <a:bodyPr lIns="0" tIns="0" rIns="0" bIns="0" anchor="ctr" anchorCtr="0">
-            <a:noAutofit/>
-          </a:bodyPr>
-          <a:lstStyle/>
-          <a:p>
-            <a:pPr algn="ctr">
-              <a:buClr>
-                <a:schemeClr val="lt1"/>
-              </a:buClr>
-              <a:buSzPct val="25000"/>
-            </a:pPr>
-            <a:r>
-              <a:rPr lang="en-US" sz="2400">
-                <a:solidFill>
-                  <a:schemeClr val="lt1"/>
-                </a:solidFill>
-                <a:latin typeface="Arial" charset="0"/>
-                <a:ea typeface="Arial" charset="0"/>
-                <a:cs typeface="Arial" charset="0"/>
-                <a:sym typeface="Cabin"/>
-              </a:rPr>
-              <a:t>Secondary</a:t>
-            </a:r>
-          </a:p>
-          <a:p>
-            <a:pPr algn="ctr">
-              <a:buClr>
-                <a:schemeClr val="lt1"/>
-              </a:buClr>
-              <a:buSzPct val="25000"/>
-            </a:pPr>
-            <a:r>
-              <a:rPr lang="en-US" sz="2400">
-                <a:solidFill>
-                  <a:schemeClr val="lt1"/>
-                </a:solidFill>
-                <a:latin typeface="Arial" charset="0"/>
-                <a:ea typeface="Arial" charset="0"/>
-                <a:cs typeface="Arial" charset="0"/>
-                <a:sym typeface="Cabin"/>
-              </a:rPr>
-              <a:t>Memory</a:t>
-            </a:r>
-          </a:p>
-        </p:txBody>
-      </p:sp>
-      <p:sp>
-        <p:nvSpPr>
-          <p:cNvPr id="366" name="Shape 366" descr="There is a thought bubble where the CPU is thinking, “What Next?”&#13;&#10;"/>
+          <p:cNvPr id="366" name="Shape 366" descr="There is a thought bubble where the CPU is thinking, “What Next?”&#13;&#10;">
+            <a:extLst>
+              <a:ext uri="{FF2B5EF4-FFF2-40B4-BE49-F238E27FC236}">
+                <a16:creationId xmlns:a16="http://schemas.microsoft.com/office/drawing/2014/main" id="{D2559973-1E23-6D91-A272-57E882B9F30D}"/>
+              </a:ext>
+            </a:extLst>
+          </p:cNvPr>
           <p:cNvSpPr/>
           <p:nvPr/>
         </p:nvSpPr>
         <p:spPr>
           <a:xfrm>
-            <a:off x="6886575" y="1184304"/>
+            <a:off x="6791325" y="1212858"/>
             <a:ext cx="1352550" cy="952500"/>
           </a:xfrm>
           <a:prstGeom prst="wedgeEllipseCallout">
@@ -19256,6 +19467,11 @@
         </p:txBody>
       </p:sp>
     </p:spTree>
+    <p:extLst>
+      <p:ext uri="{BB962C8B-B14F-4D97-AF65-F5344CB8AC3E}">
+        <p14:creationId xmlns:p14="http://schemas.microsoft.com/office/powerpoint/2010/main" val="4282081937"/>
+      </p:ext>
+    </p:extLst>
   </p:cSld>
   <p:clrMapOvr>
     <a:masterClrMapping/>
@@ -19326,7 +19542,7 @@
               <a:buSzPct val="25000"/>
             </a:pPr>
             <a:r>
-              <a:rPr lang="en-US" sz="5550">
+              <a:rPr lang="en-US" sz="5550" dirty="0">
                 <a:solidFill>
                   <a:srgbClr val="FFD966"/>
                 </a:solidFill>
@@ -19347,7 +19563,7 @@
             <a:spLocks noGrp="1"/>
           </p:cNvSpPr>
           <p:nvPr>
-            <p:ph type="body" idx="1"/>
+            <p:ph idx="1"/>
           </p:nvPr>
         </p:nvSpPr>
         <p:spPr>
@@ -19785,7 +20001,7 @@
         <p:cNvPr id="1" name="Shape 354">
           <a:extLst>
             <a:ext uri="{FF2B5EF4-FFF2-40B4-BE49-F238E27FC236}">
-              <a16:creationId xmlns:a16="http://schemas.microsoft.com/office/drawing/2014/main" id="{B448E17A-6DF6-83D1-DE4E-D121D9F588D6}"/>
+              <a16:creationId xmlns:a16="http://schemas.microsoft.com/office/drawing/2014/main" id="{E59B4457-AD4E-3F6C-18FC-59A3EE666700}"/>
             </a:ext>
           </a:extLst>
         </p:cNvPr>
@@ -19805,7 +20021,7 @@
           <p:cNvPr id="4" name="Title 3">
             <a:extLst>
               <a:ext uri="{FF2B5EF4-FFF2-40B4-BE49-F238E27FC236}">
-                <a16:creationId xmlns:a16="http://schemas.microsoft.com/office/drawing/2014/main" id="{C3C254F6-4A21-5057-04E0-424FF2102788}"/>
+                <a16:creationId xmlns:a16="http://schemas.microsoft.com/office/drawing/2014/main" id="{90CEF3B3-73E1-0F71-1679-86AED7F821BD}"/>
               </a:ext>
             </a:extLst>
           </p:cNvPr>
@@ -19841,10 +20057,10 @@
       </p:sp>
       <p:grpSp>
         <p:nvGrpSpPr>
-          <p:cNvPr id="5" name="Group 4" descr="Software is stored in the main memory of the computer and then read from that main memory and executed by the CPU&#13;&#10;">
+          <p:cNvPr id="8" name="Group 7" descr="A block diagram of a CPU with I/O devices, a CPU, memory and secondary memory.  Software is stored in the memory of the computer and then read from that main memory and executed by the CPU.&#13;&#10;">
             <a:extLst>
               <a:ext uri="{FF2B5EF4-FFF2-40B4-BE49-F238E27FC236}">
-                <a16:creationId xmlns:a16="http://schemas.microsoft.com/office/drawing/2014/main" id="{67491EBF-0D55-687E-4C3C-E529747C2B68}"/>
+                <a16:creationId xmlns:a16="http://schemas.microsoft.com/office/drawing/2014/main" id="{C84875F0-FECE-AC89-AF5B-54AA5CE8C42F}"/>
               </a:ext>
             </a:extLst>
           </p:cNvPr>
@@ -19853,18 +20069,18 @@
         </p:nvGrpSpPr>
         <p:grpSpPr>
           <a:xfrm>
-            <a:off x="4572001" y="1029102"/>
-            <a:ext cx="2590799" cy="4867274"/>
-            <a:chOff x="4572001" y="1029102"/>
-            <a:chExt cx="2590799" cy="4867274"/>
+            <a:off x="2124076" y="1029102"/>
+            <a:ext cx="9020755" cy="4966330"/>
+            <a:chOff x="2124076" y="1029102"/>
+            <a:chExt cx="9020755" cy="4966330"/>
           </a:xfrm>
         </p:grpSpPr>
         <p:sp>
           <p:nvSpPr>
-            <p:cNvPr id="355" name="Shape 355">
+            <p:cNvPr id="356" name="Shape 356">
               <a:extLst>
                 <a:ext uri="{FF2B5EF4-FFF2-40B4-BE49-F238E27FC236}">
-                  <a16:creationId xmlns:a16="http://schemas.microsoft.com/office/drawing/2014/main" id="{1C4B1A66-416D-47EF-0840-C018E50EB727}"/>
+                  <a16:creationId xmlns:a16="http://schemas.microsoft.com/office/drawing/2014/main" id="{86862851-9CBA-FDAC-F598-D8E6E518AA38}"/>
                 </a:ext>
               </a:extLst>
             </p:cNvPr>
@@ -19873,81 +20089,8 @@
           </p:nvSpPr>
           <p:spPr>
             <a:xfrm>
-              <a:off x="4572001" y="1029102"/>
-              <a:ext cx="2590799" cy="4867274"/>
-            </a:xfrm>
-            <a:prstGeom prst="rect">
-              <a:avLst/>
-            </a:prstGeom>
-            <a:noFill/>
-            <a:ln w="76200" cap="rnd" cmpd="sng">
-              <a:solidFill>
-                <a:srgbClr val="00FFFF"/>
-              </a:solidFill>
-              <a:prstDash val="solid"/>
-              <a:miter/>
-              <a:headEnd type="none" w="med" len="med"/>
-              <a:tailEnd type="none" w="med" len="med"/>
-            </a:ln>
-          </p:spPr>
-          <p:txBody>
-            <a:bodyPr lIns="0" tIns="0" rIns="0" bIns="0" anchor="t" anchorCtr="0">
-              <a:noAutofit/>
-            </a:bodyPr>
-            <a:lstStyle/>
-            <a:p>
-              <a:pPr>
-                <a:spcBef>
-                  <a:spcPts val="750"/>
-                </a:spcBef>
-                <a:buClr>
-                  <a:srgbClr val="FF00FF"/>
-                </a:buClr>
-                <a:buSzPct val="25000"/>
-              </a:pPr>
-              <a:r>
-                <a:rPr lang="en-US" sz="2400">
-                  <a:solidFill>
-                    <a:srgbClr val="FF00FF"/>
-                  </a:solidFill>
-                  <a:latin typeface="Arial" charset="0"/>
-                  <a:ea typeface="Arial" charset="0"/>
-                  <a:cs typeface="Arial" charset="0"/>
-                  <a:sym typeface="Cabin"/>
-                </a:rPr>
-                <a:t>  </a:t>
-              </a:r>
-              <a:r>
-                <a:rPr lang="en-US" sz="2400">
-                  <a:solidFill>
-                    <a:srgbClr val="00FFFF"/>
-                  </a:solidFill>
-                  <a:latin typeface="Arial" charset="0"/>
-                  <a:ea typeface="Arial" charset="0"/>
-                  <a:cs typeface="Arial" charset="0"/>
-                  <a:sym typeface="Cabin"/>
-                </a:rPr>
-                <a:t>Software</a:t>
-              </a:r>
-            </a:p>
-          </p:txBody>
-        </p:sp>
-        <p:sp>
-          <p:nvSpPr>
-            <p:cNvPr id="357" name="Shape 357">
-              <a:extLst>
-                <a:ext uri="{FF2B5EF4-FFF2-40B4-BE49-F238E27FC236}">
-                  <a16:creationId xmlns:a16="http://schemas.microsoft.com/office/drawing/2014/main" id="{99333684-7585-E036-B65C-E9438137A394}"/>
-                </a:ext>
-              </a:extLst>
-            </p:cNvPr>
-            <p:cNvSpPr txBox="1"/>
-            <p:nvPr/>
-          </p:nvSpPr>
-          <p:spPr>
-            <a:xfrm>
-              <a:off x="5048251" y="1667277"/>
-              <a:ext cx="1600199" cy="1485899"/>
+              <a:off x="2124076" y="1591077"/>
+              <a:ext cx="1638299" cy="1638299"/>
             </a:xfrm>
             <a:prstGeom prst="rect">
               <a:avLst/>
@@ -19985,7 +20128,7 @@
                   <a:cs typeface="Arial" charset="0"/>
                   <a:sym typeface="Cabin"/>
                 </a:rPr>
-                <a:t>Central</a:t>
+                <a:t>Input</a:t>
               </a:r>
             </a:p>
             <a:p>
@@ -20005,7 +20148,7 @@
                   <a:cs typeface="Arial" charset="0"/>
                   <a:sym typeface="Cabin"/>
                 </a:rPr>
-                <a:t>Processing</a:t>
+                <a:t>and Output</a:t>
               </a:r>
             </a:p>
             <a:p>
@@ -20025,17 +20168,427 @@
                   <a:cs typeface="Arial" charset="0"/>
                   <a:sym typeface="Cabin"/>
                 </a:rPr>
-                <a:t>Unit</a:t>
+                <a:t>Devices</a:t>
               </a:r>
             </a:p>
           </p:txBody>
         </p:sp>
+        <p:cxnSp>
+          <p:nvCxnSpPr>
+            <p:cNvPr id="360" name="Shape 360">
+              <a:extLst>
+                <a:ext uri="{FF2B5EF4-FFF2-40B4-BE49-F238E27FC236}">
+                  <a16:creationId xmlns:a16="http://schemas.microsoft.com/office/drawing/2014/main" id="{137161B3-2189-FBB4-6835-6FDD87412228}"/>
+                </a:ext>
+                <a:ext uri="{C183D7F6-B498-43B3-948B-1728B52AA6E4}">
+                  <adec:decorative xmlns:adec="http://schemas.microsoft.com/office/drawing/2017/decorative" val="1"/>
+                </a:ext>
+              </a:extLst>
+            </p:cNvPr>
+            <p:cNvCxnSpPr/>
+            <p:nvPr/>
+          </p:nvCxnSpPr>
+          <p:spPr>
+            <a:xfrm flipH="1">
+              <a:off x="3773089" y="2436420"/>
+              <a:ext cx="794147" cy="13096"/>
+            </a:xfrm>
+            <a:prstGeom prst="straightConnector1">
+              <a:avLst/>
+            </a:prstGeom>
+            <a:noFill/>
+            <a:ln w="88900" cap="rnd" cmpd="sng">
+              <a:solidFill>
+                <a:srgbClr val="FFFF00"/>
+              </a:solidFill>
+              <a:prstDash val="solid"/>
+              <a:miter/>
+              <a:headEnd type="stealth" w="med" len="med"/>
+              <a:tailEnd type="stealth" w="med" len="med"/>
+            </a:ln>
+          </p:spPr>
+        </p:cxnSp>
+        <p:grpSp>
+          <p:nvGrpSpPr>
+            <p:cNvPr id="5" name="Group 4" descr="Software is stored in the main memory of the computer and then read from that main memory and executed by the CPU&#13;&#10;">
+              <a:extLst>
+                <a:ext uri="{FF2B5EF4-FFF2-40B4-BE49-F238E27FC236}">
+                  <a16:creationId xmlns:a16="http://schemas.microsoft.com/office/drawing/2014/main" id="{D068E129-36BA-363A-8F10-8EB908FE10DA}"/>
+                </a:ext>
+              </a:extLst>
+            </p:cNvPr>
+            <p:cNvGrpSpPr/>
+            <p:nvPr/>
+          </p:nvGrpSpPr>
+          <p:grpSpPr>
+            <a:xfrm>
+              <a:off x="4572001" y="1029102"/>
+              <a:ext cx="2590799" cy="4867274"/>
+              <a:chOff x="4572001" y="1029102"/>
+              <a:chExt cx="2590799" cy="4867274"/>
+            </a:xfrm>
+          </p:grpSpPr>
+          <p:sp>
+            <p:nvSpPr>
+              <p:cNvPr id="355" name="Shape 355">
+                <a:extLst>
+                  <a:ext uri="{FF2B5EF4-FFF2-40B4-BE49-F238E27FC236}">
+                    <a16:creationId xmlns:a16="http://schemas.microsoft.com/office/drawing/2014/main" id="{16B1B1DC-6E57-26DF-598C-905385A9AC77}"/>
+                  </a:ext>
+                </a:extLst>
+              </p:cNvPr>
+              <p:cNvSpPr txBox="1"/>
+              <p:nvPr/>
+            </p:nvSpPr>
+            <p:spPr>
+              <a:xfrm>
+                <a:off x="4572001" y="1029102"/>
+                <a:ext cx="2590799" cy="4867274"/>
+              </a:xfrm>
+              <a:prstGeom prst="rect">
+                <a:avLst/>
+              </a:prstGeom>
+              <a:noFill/>
+              <a:ln w="76200" cap="rnd" cmpd="sng">
+                <a:solidFill>
+                  <a:srgbClr val="00FFFF"/>
+                </a:solidFill>
+                <a:prstDash val="solid"/>
+                <a:miter/>
+                <a:headEnd type="none" w="med" len="med"/>
+                <a:tailEnd type="none" w="med" len="med"/>
+              </a:ln>
+            </p:spPr>
+            <p:txBody>
+              <a:bodyPr lIns="0" tIns="0" rIns="0" bIns="0" anchor="t" anchorCtr="0">
+                <a:noAutofit/>
+              </a:bodyPr>
+              <a:lstStyle/>
+              <a:p>
+                <a:pPr>
+                  <a:spcBef>
+                    <a:spcPts val="750"/>
+                  </a:spcBef>
+                  <a:buClr>
+                    <a:srgbClr val="FF00FF"/>
+                  </a:buClr>
+                  <a:buSzPct val="25000"/>
+                </a:pPr>
+                <a:r>
+                  <a:rPr lang="en-US" sz="2400">
+                    <a:solidFill>
+                      <a:srgbClr val="FF00FF"/>
+                    </a:solidFill>
+                    <a:latin typeface="Arial" charset="0"/>
+                    <a:ea typeface="Arial" charset="0"/>
+                    <a:cs typeface="Arial" charset="0"/>
+                    <a:sym typeface="Cabin"/>
+                  </a:rPr>
+                  <a:t>  </a:t>
+                </a:r>
+                <a:r>
+                  <a:rPr lang="en-US" sz="2400">
+                    <a:solidFill>
+                      <a:srgbClr val="00FFFF"/>
+                    </a:solidFill>
+                    <a:latin typeface="Arial" charset="0"/>
+                    <a:ea typeface="Arial" charset="0"/>
+                    <a:cs typeface="Arial" charset="0"/>
+                    <a:sym typeface="Cabin"/>
+                  </a:rPr>
+                  <a:t>Software</a:t>
+                </a:r>
+              </a:p>
+            </p:txBody>
+          </p:sp>
+          <p:sp>
+            <p:nvSpPr>
+              <p:cNvPr id="357" name="Shape 357">
+                <a:extLst>
+                  <a:ext uri="{FF2B5EF4-FFF2-40B4-BE49-F238E27FC236}">
+                    <a16:creationId xmlns:a16="http://schemas.microsoft.com/office/drawing/2014/main" id="{AB57C8A0-5C39-6EEB-6361-1BC7417AA63F}"/>
+                  </a:ext>
+                </a:extLst>
+              </p:cNvPr>
+              <p:cNvSpPr txBox="1"/>
+              <p:nvPr/>
+            </p:nvSpPr>
+            <p:spPr>
+              <a:xfrm>
+                <a:off x="5048251" y="1667277"/>
+                <a:ext cx="1600199" cy="1485899"/>
+              </a:xfrm>
+              <a:prstGeom prst="rect">
+                <a:avLst/>
+              </a:prstGeom>
+              <a:noFill/>
+              <a:ln w="76200" cap="rnd" cmpd="sng">
+                <a:solidFill>
+                  <a:srgbClr val="00FF00"/>
+                </a:solidFill>
+                <a:prstDash val="solid"/>
+                <a:miter/>
+                <a:headEnd type="none" w="med" len="med"/>
+                <a:tailEnd type="none" w="med" len="med"/>
+              </a:ln>
+            </p:spPr>
+            <p:txBody>
+              <a:bodyPr lIns="0" tIns="0" rIns="0" bIns="0" anchor="ctr" anchorCtr="0">
+                <a:noAutofit/>
+              </a:bodyPr>
+              <a:lstStyle/>
+              <a:p>
+                <a:pPr algn="ctr">
+                  <a:buClr>
+                    <a:schemeClr val="lt1"/>
+                  </a:buClr>
+                  <a:buSzPct val="25000"/>
+                </a:pPr>
+                <a:r>
+                  <a:rPr lang="en-US" sz="2400">
+                    <a:solidFill>
+                      <a:schemeClr val="lt1"/>
+                    </a:solidFill>
+                    <a:latin typeface="Arial" charset="0"/>
+                    <a:ea typeface="Arial" charset="0"/>
+                    <a:cs typeface="Arial" charset="0"/>
+                    <a:sym typeface="Cabin"/>
+                  </a:rPr>
+                  <a:t>Central</a:t>
+                </a:r>
+              </a:p>
+              <a:p>
+                <a:pPr algn="ctr">
+                  <a:buClr>
+                    <a:schemeClr val="lt1"/>
+                  </a:buClr>
+                  <a:buSzPct val="25000"/>
+                </a:pPr>
+                <a:r>
+                  <a:rPr lang="en-US" sz="2400">
+                    <a:solidFill>
+                      <a:schemeClr val="lt1"/>
+                    </a:solidFill>
+                    <a:latin typeface="Arial" charset="0"/>
+                    <a:ea typeface="Arial" charset="0"/>
+                    <a:cs typeface="Arial" charset="0"/>
+                    <a:sym typeface="Cabin"/>
+                  </a:rPr>
+                  <a:t>Processing</a:t>
+                </a:r>
+              </a:p>
+              <a:p>
+                <a:pPr algn="ctr">
+                  <a:buClr>
+                    <a:schemeClr val="lt1"/>
+                  </a:buClr>
+                  <a:buSzPct val="25000"/>
+                </a:pPr>
+                <a:r>
+                  <a:rPr lang="en-US" sz="2400">
+                    <a:solidFill>
+                      <a:schemeClr val="lt1"/>
+                    </a:solidFill>
+                    <a:latin typeface="Arial" charset="0"/>
+                    <a:ea typeface="Arial" charset="0"/>
+                    <a:cs typeface="Arial" charset="0"/>
+                    <a:sym typeface="Cabin"/>
+                  </a:rPr>
+                  <a:t>Unit</a:t>
+                </a:r>
+              </a:p>
+            </p:txBody>
+          </p:sp>
+          <p:sp>
+            <p:nvSpPr>
+              <p:cNvPr id="358" name="Shape 358">
+                <a:extLst>
+                  <a:ext uri="{FF2B5EF4-FFF2-40B4-BE49-F238E27FC236}">
+                    <a16:creationId xmlns:a16="http://schemas.microsoft.com/office/drawing/2014/main" id="{A78C4B9E-CADF-A807-5554-E45363B4CEA7}"/>
+                  </a:ext>
+                </a:extLst>
+              </p:cNvPr>
+              <p:cNvSpPr txBox="1"/>
+              <p:nvPr/>
+            </p:nvSpPr>
+            <p:spPr>
+              <a:xfrm>
+                <a:off x="5048250" y="3943752"/>
+                <a:ext cx="1628775" cy="1600199"/>
+              </a:xfrm>
+              <a:prstGeom prst="rect">
+                <a:avLst/>
+              </a:prstGeom>
+              <a:noFill/>
+              <a:ln w="76200" cap="rnd" cmpd="sng">
+                <a:solidFill>
+                  <a:srgbClr val="00FF00"/>
+                </a:solidFill>
+                <a:prstDash val="solid"/>
+                <a:miter/>
+                <a:headEnd type="none" w="med" len="med"/>
+                <a:tailEnd type="none" w="med" len="med"/>
+              </a:ln>
+            </p:spPr>
+            <p:txBody>
+              <a:bodyPr lIns="0" tIns="0" rIns="0" bIns="0" anchor="ctr" anchorCtr="0">
+                <a:noAutofit/>
+              </a:bodyPr>
+              <a:lstStyle/>
+              <a:p>
+                <a:pPr algn="ctr">
+                  <a:buClr>
+                    <a:schemeClr val="lt1"/>
+                  </a:buClr>
+                  <a:buSzPct val="25000"/>
+                </a:pPr>
+                <a:r>
+                  <a:rPr lang="en-US" sz="2400">
+                    <a:solidFill>
+                      <a:schemeClr val="lt1"/>
+                    </a:solidFill>
+                    <a:latin typeface="Arial" charset="0"/>
+                    <a:ea typeface="Arial" charset="0"/>
+                    <a:cs typeface="Arial" charset="0"/>
+                    <a:sym typeface="Cabin"/>
+                  </a:rPr>
+                  <a:t>Main</a:t>
+                </a:r>
+              </a:p>
+              <a:p>
+                <a:pPr algn="ctr">
+                  <a:buClr>
+                    <a:schemeClr val="lt1"/>
+                  </a:buClr>
+                  <a:buSzPct val="25000"/>
+                </a:pPr>
+                <a:r>
+                  <a:rPr lang="en-US" sz="2400">
+                    <a:solidFill>
+                      <a:schemeClr val="lt1"/>
+                    </a:solidFill>
+                    <a:latin typeface="Arial" charset="0"/>
+                    <a:ea typeface="Arial" charset="0"/>
+                    <a:cs typeface="Arial" charset="0"/>
+                    <a:sym typeface="Cabin"/>
+                  </a:rPr>
+                  <a:t>Memory</a:t>
+                </a:r>
+              </a:p>
+            </p:txBody>
+          </p:sp>
+          <p:cxnSp>
+            <p:nvCxnSpPr>
+              <p:cNvPr id="361" name="Shape 361">
+                <a:extLst>
+                  <a:ext uri="{FF2B5EF4-FFF2-40B4-BE49-F238E27FC236}">
+                    <a16:creationId xmlns:a16="http://schemas.microsoft.com/office/drawing/2014/main" id="{F8151263-FE84-93BE-E558-1793AF3AC2B0}"/>
+                  </a:ext>
+                  <a:ext uri="{C183D7F6-B498-43B3-948B-1728B52AA6E4}">
+                    <adec:decorative xmlns:adec="http://schemas.microsoft.com/office/drawing/2017/decorative" val="1"/>
+                  </a:ext>
+                </a:extLst>
+              </p:cNvPr>
+              <p:cNvCxnSpPr/>
+              <p:nvPr/>
+            </p:nvCxnSpPr>
+            <p:spPr>
+              <a:xfrm rot="10800000">
+                <a:off x="5543550" y="3174607"/>
+                <a:ext cx="0" cy="728663"/>
+              </a:xfrm>
+              <a:prstGeom prst="straightConnector1">
+                <a:avLst/>
+              </a:prstGeom>
+              <a:noFill/>
+              <a:ln w="88900" cap="rnd" cmpd="sng">
+                <a:solidFill>
+                  <a:srgbClr val="FFFF00"/>
+                </a:solidFill>
+                <a:prstDash val="solid"/>
+                <a:miter/>
+                <a:headEnd type="stealth" w="med" len="med"/>
+                <a:tailEnd type="none" w="med" len="med"/>
+              </a:ln>
+            </p:spPr>
+          </p:cxnSp>
+          <p:cxnSp>
+            <p:nvCxnSpPr>
+              <p:cNvPr id="362" name="Shape 362">
+                <a:extLst>
+                  <a:ext uri="{FF2B5EF4-FFF2-40B4-BE49-F238E27FC236}">
+                    <a16:creationId xmlns:a16="http://schemas.microsoft.com/office/drawing/2014/main" id="{C2DC34E0-7BFE-16B8-F773-DF48FE4DCF0C}"/>
+                  </a:ext>
+                  <a:ext uri="{C183D7F6-B498-43B3-948B-1728B52AA6E4}">
+                    <adec:decorative xmlns:adec="http://schemas.microsoft.com/office/drawing/2017/decorative" val="1"/>
+                  </a:ext>
+                </a:extLst>
+              </p:cNvPr>
+              <p:cNvCxnSpPr/>
+              <p:nvPr/>
+            </p:nvCxnSpPr>
+            <p:spPr>
+              <a:xfrm>
+                <a:off x="6259115" y="3187704"/>
+                <a:ext cx="0" cy="689372"/>
+              </a:xfrm>
+              <a:prstGeom prst="straightConnector1">
+                <a:avLst/>
+              </a:prstGeom>
+              <a:noFill/>
+              <a:ln w="88900" cap="rnd" cmpd="sng">
+                <a:solidFill>
+                  <a:srgbClr val="FFFF00"/>
+                </a:solidFill>
+                <a:prstDash val="solid"/>
+                <a:miter/>
+                <a:headEnd type="stealth" w="med" len="med"/>
+                <a:tailEnd type="none" w="med" len="med"/>
+              </a:ln>
+            </p:spPr>
+          </p:cxnSp>
+        </p:grpSp>
+        <p:cxnSp>
+          <p:nvCxnSpPr>
+            <p:cNvPr id="364" name="Shape 364">
+              <a:extLst>
+                <a:ext uri="{FF2B5EF4-FFF2-40B4-BE49-F238E27FC236}">
+                  <a16:creationId xmlns:a16="http://schemas.microsoft.com/office/drawing/2014/main" id="{5FED8BE9-37BC-9704-486C-127BE3D19DCC}"/>
+                </a:ext>
+                <a:ext uri="{C183D7F6-B498-43B3-948B-1728B52AA6E4}">
+                  <adec:decorative xmlns:adec="http://schemas.microsoft.com/office/drawing/2017/decorative" val="1"/>
+                </a:ext>
+              </a:extLst>
+            </p:cNvPr>
+            <p:cNvCxnSpPr/>
+            <p:nvPr/>
+          </p:nvCxnSpPr>
+          <p:spPr>
+            <a:xfrm>
+              <a:off x="7215187" y="3658001"/>
+              <a:ext cx="1184672" cy="0"/>
+            </a:xfrm>
+            <a:prstGeom prst="straightConnector1">
+              <a:avLst/>
+            </a:prstGeom>
+            <a:noFill/>
+            <a:ln w="88900" cap="rnd" cmpd="sng">
+              <a:solidFill>
+                <a:srgbClr val="FFFF00"/>
+              </a:solidFill>
+              <a:prstDash val="solid"/>
+              <a:miter/>
+              <a:headEnd type="stealth" w="med" len="med"/>
+              <a:tailEnd type="none" w="med" len="med"/>
+            </a:ln>
+          </p:spPr>
+        </p:cxnSp>
         <p:sp>
           <p:nvSpPr>
-            <p:cNvPr id="358" name="Shape 358">
+            <p:cNvPr id="359" name="Shape 359">
               <a:extLst>
                 <a:ext uri="{FF2B5EF4-FFF2-40B4-BE49-F238E27FC236}">
-                  <a16:creationId xmlns:a16="http://schemas.microsoft.com/office/drawing/2014/main" id="{C5B1BDA2-DB0D-DD42-57FB-0140F34EC335}"/>
+                  <a16:creationId xmlns:a16="http://schemas.microsoft.com/office/drawing/2014/main" id="{515DC897-94EB-948C-DC52-9AAD5980A696}"/>
                 </a:ext>
               </a:extLst>
             </p:cNvPr>
@@ -20044,8 +20597,8 @@
           </p:nvSpPr>
           <p:spPr>
             <a:xfrm>
-              <a:off x="5048250" y="3943752"/>
-              <a:ext cx="1628775" cy="1600199"/>
+              <a:off x="8448676" y="2572152"/>
+              <a:ext cx="1638299" cy="1638299"/>
             </a:xfrm>
             <a:prstGeom prst="rect">
               <a:avLst/>
@@ -20083,7 +20636,7 @@
                   <a:cs typeface="Arial" charset="0"/>
                   <a:sym typeface="Cabin"/>
                 </a:rPr>
-                <a:t>Main</a:t>
+                <a:t>Secondary</a:t>
               </a:r>
             </a:p>
             <a:p>
@@ -20110,10 +20663,10 @@
         </p:sp>
         <p:cxnSp>
           <p:nvCxnSpPr>
-            <p:cNvPr id="361" name="Shape 361">
+            <p:cNvPr id="363" name="Shape 363">
               <a:extLst>
                 <a:ext uri="{FF2B5EF4-FFF2-40B4-BE49-F238E27FC236}">
-                  <a16:creationId xmlns:a16="http://schemas.microsoft.com/office/drawing/2014/main" id="{68ACE3FF-2F10-0C0C-CB0A-50F4DC7506AE}"/>
+                  <a16:creationId xmlns:a16="http://schemas.microsoft.com/office/drawing/2014/main" id="{20657B54-F144-8952-3036-2331D60E32CC}"/>
                 </a:ext>
                 <a:ext uri="{C183D7F6-B498-43B3-948B-1728B52AA6E4}">
                   <adec:decorative xmlns:adec="http://schemas.microsoft.com/office/drawing/2017/decorative" val="1"/>
@@ -20124,9 +20677,9 @@
             <p:nvPr/>
           </p:nvCxnSpPr>
           <p:spPr>
-            <a:xfrm rot="10800000">
-              <a:off x="5543550" y="3174607"/>
-              <a:ext cx="0" cy="728663"/>
+            <a:xfrm flipH="1">
+              <a:off x="7241382" y="2904336"/>
+              <a:ext cx="1171574" cy="13096"/>
             </a:xfrm>
             <a:prstGeom prst="straightConnector1">
               <a:avLst/>
@@ -20143,181 +20696,45 @@
             </a:ln>
           </p:spPr>
         </p:cxnSp>
-        <p:cxnSp>
-          <p:nvCxnSpPr>
-            <p:cNvPr id="362" name="Shape 362">
+        <p:sp>
+          <p:nvSpPr>
+            <p:cNvPr id="6" name="TextBox 5">
               <a:extLst>
                 <a:ext uri="{FF2B5EF4-FFF2-40B4-BE49-F238E27FC236}">
-                  <a16:creationId xmlns:a16="http://schemas.microsoft.com/office/drawing/2014/main" id="{E78113D4-B174-0B67-B8D0-995932DF0DB6}"/>
-                </a:ext>
-                <a:ext uri="{C183D7F6-B498-43B3-948B-1728B52AA6E4}">
-                  <adec:decorative xmlns:adec="http://schemas.microsoft.com/office/drawing/2017/decorative" val="1"/>
+                  <a16:creationId xmlns:a16="http://schemas.microsoft.com/office/drawing/2014/main" id="{6E315B0C-E5A7-8D7C-2CE8-D50622F61F0B}"/>
                 </a:ext>
               </a:extLst>
             </p:cNvPr>
-            <p:cNvCxnSpPr/>
+            <p:cNvSpPr txBox="1"/>
             <p:nvPr/>
-          </p:nvCxnSpPr>
+          </p:nvSpPr>
           <p:spPr>
             <a:xfrm>
-              <a:off x="6259115" y="3187704"/>
-              <a:ext cx="0" cy="689372"/>
+              <a:off x="10960100" y="5626100"/>
+              <a:ext cx="184731" cy="369332"/>
             </a:xfrm>
-            <a:prstGeom prst="straightConnector1">
+            <a:prstGeom prst="rect">
               <a:avLst/>
             </a:prstGeom>
             <a:noFill/>
-            <a:ln w="88900" cap="rnd" cmpd="sng">
-              <a:solidFill>
-                <a:srgbClr val="FFFF00"/>
-              </a:solidFill>
-              <a:prstDash val="solid"/>
-              <a:miter/>
-              <a:headEnd type="stealth" w="med" len="med"/>
-              <a:tailEnd type="none" w="med" len="med"/>
-            </a:ln>
           </p:spPr>
-        </p:cxnSp>
+          <p:txBody>
+            <a:bodyPr wrap="none" rtlCol="0">
+              <a:spAutoFit/>
+            </a:bodyPr>
+            <a:lstStyle/>
+            <a:p>
+              <a:endParaRPr lang="en-US" dirty="0"/>
+            </a:p>
+          </p:txBody>
+        </p:sp>
       </p:grpSp>
       <p:sp>
         <p:nvSpPr>
-          <p:cNvPr id="356" name="Shape 356">
+          <p:cNvPr id="366" name="Shape 366" descr="There is a thought bubble where the CPU is thinking, “What Next?”&#13;&#10;">
             <a:extLst>
               <a:ext uri="{FF2B5EF4-FFF2-40B4-BE49-F238E27FC236}">
-                <a16:creationId xmlns:a16="http://schemas.microsoft.com/office/drawing/2014/main" id="{BD919C3F-B936-7196-67C5-F895A39E998F}"/>
-              </a:ext>
-            </a:extLst>
-          </p:cNvPr>
-          <p:cNvSpPr txBox="1"/>
-          <p:nvPr/>
-        </p:nvSpPr>
-        <p:spPr>
-          <a:xfrm>
-            <a:off x="2124076" y="1591077"/>
-            <a:ext cx="1638299" cy="1638299"/>
-          </a:xfrm>
-          <a:prstGeom prst="rect">
-            <a:avLst/>
-          </a:prstGeom>
-          <a:noFill/>
-          <a:ln w="76200" cap="rnd" cmpd="sng">
-            <a:solidFill>
-              <a:srgbClr val="00FF00"/>
-            </a:solidFill>
-            <a:prstDash val="solid"/>
-            <a:miter/>
-            <a:headEnd type="none" w="med" len="med"/>
-            <a:tailEnd type="none" w="med" len="med"/>
-          </a:ln>
-        </p:spPr>
-        <p:txBody>
-          <a:bodyPr lIns="0" tIns="0" rIns="0" bIns="0" anchor="ctr" anchorCtr="0">
-            <a:noAutofit/>
-          </a:bodyPr>
-          <a:lstStyle/>
-          <a:p>
-            <a:pPr algn="ctr">
-              <a:buClr>
-                <a:schemeClr val="lt1"/>
-              </a:buClr>
-              <a:buSzPct val="25000"/>
-            </a:pPr>
-            <a:r>
-              <a:rPr lang="en-US" sz="2400">
-                <a:solidFill>
-                  <a:schemeClr val="lt1"/>
-                </a:solidFill>
-                <a:latin typeface="Arial" charset="0"/>
-                <a:ea typeface="Arial" charset="0"/>
-                <a:cs typeface="Arial" charset="0"/>
-                <a:sym typeface="Cabin"/>
-              </a:rPr>
-              <a:t>Input</a:t>
-            </a:r>
-          </a:p>
-          <a:p>
-            <a:pPr algn="ctr">
-              <a:buClr>
-                <a:schemeClr val="lt1"/>
-              </a:buClr>
-              <a:buSzPct val="25000"/>
-            </a:pPr>
-            <a:r>
-              <a:rPr lang="en-US" sz="2400">
-                <a:solidFill>
-                  <a:schemeClr val="lt1"/>
-                </a:solidFill>
-                <a:latin typeface="Arial" charset="0"/>
-                <a:ea typeface="Arial" charset="0"/>
-                <a:cs typeface="Arial" charset="0"/>
-                <a:sym typeface="Cabin"/>
-              </a:rPr>
-              <a:t>and Output</a:t>
-            </a:r>
-          </a:p>
-          <a:p>
-            <a:pPr algn="ctr">
-              <a:buClr>
-                <a:schemeClr val="lt1"/>
-              </a:buClr>
-              <a:buSzPct val="25000"/>
-            </a:pPr>
-            <a:r>
-              <a:rPr lang="en-US" sz="2400">
-                <a:solidFill>
-                  <a:schemeClr val="lt1"/>
-                </a:solidFill>
-                <a:latin typeface="Arial" charset="0"/>
-                <a:ea typeface="Arial" charset="0"/>
-                <a:cs typeface="Arial" charset="0"/>
-                <a:sym typeface="Cabin"/>
-              </a:rPr>
-              <a:t>Devices</a:t>
-            </a:r>
-          </a:p>
-        </p:txBody>
-      </p:sp>
-      <p:cxnSp>
-        <p:nvCxnSpPr>
-          <p:cNvPr id="360" name="Shape 360">
-            <a:extLst>
-              <a:ext uri="{FF2B5EF4-FFF2-40B4-BE49-F238E27FC236}">
-                <a16:creationId xmlns:a16="http://schemas.microsoft.com/office/drawing/2014/main" id="{FABBF0BC-3B7E-2064-1308-A1382D70DAAF}"/>
-              </a:ext>
-              <a:ext uri="{C183D7F6-B498-43B3-948B-1728B52AA6E4}">
-                <adec:decorative xmlns:adec="http://schemas.microsoft.com/office/drawing/2017/decorative" val="1"/>
-              </a:ext>
-            </a:extLst>
-          </p:cNvPr>
-          <p:cNvCxnSpPr/>
-          <p:nvPr/>
-        </p:nvCxnSpPr>
-        <p:spPr>
-          <a:xfrm flipH="1">
-            <a:off x="3773089" y="2436420"/>
-            <a:ext cx="794147" cy="13096"/>
-          </a:xfrm>
-          <a:prstGeom prst="straightConnector1">
-            <a:avLst/>
-          </a:prstGeom>
-          <a:noFill/>
-          <a:ln w="88900" cap="rnd" cmpd="sng">
-            <a:solidFill>
-              <a:srgbClr val="FFFF00"/>
-            </a:solidFill>
-            <a:prstDash val="solid"/>
-            <a:miter/>
-            <a:headEnd type="stealth" w="med" len="med"/>
-            <a:tailEnd type="stealth" w="med" len="med"/>
-          </a:ln>
-        </p:spPr>
-      </p:cxnSp>
-      <p:sp>
-        <p:nvSpPr>
-          <p:cNvPr id="366" name="Shape 366" descr="There is a thought bubble where the CPU is thinking, “What Next?”&#13;&#10;">
-            <a:extLst>
-              <a:ext uri="{FF2B5EF4-FFF2-40B4-BE49-F238E27FC236}">
-                <a16:creationId xmlns:a16="http://schemas.microsoft.com/office/drawing/2014/main" id="{1AD3CFBB-2176-2FD7-4E4E-ABBFD98F2430}"/>
+                <a16:creationId xmlns:a16="http://schemas.microsoft.com/office/drawing/2014/main" id="{D2F79F18-9292-BB0C-BF8A-4A2D2132E256}"/>
               </a:ext>
             </a:extLst>
           </p:cNvPr>
@@ -20326,7 +20743,7 @@
         </p:nvSpPr>
         <p:spPr>
           <a:xfrm>
-            <a:off x="6819900" y="1442507"/>
+            <a:off x="6791325" y="1212858"/>
             <a:ext cx="1352550" cy="952500"/>
           </a:xfrm>
           <a:prstGeom prst="wedgeEllipseCallout">
@@ -20392,125 +20809,12 @@
           </a:p>
         </p:txBody>
       </p:sp>
-      <p:cxnSp>
-        <p:nvCxnSpPr>
-          <p:cNvPr id="364" name="Shape 364">
-            <a:extLst>
-              <a:ext uri="{FF2B5EF4-FFF2-40B4-BE49-F238E27FC236}">
-                <a16:creationId xmlns:a16="http://schemas.microsoft.com/office/drawing/2014/main" id="{F1186173-3036-DBF3-428B-20C5D1149F42}"/>
-              </a:ext>
-              <a:ext uri="{C183D7F6-B498-43B3-948B-1728B52AA6E4}">
-                <adec:decorative xmlns:adec="http://schemas.microsoft.com/office/drawing/2017/decorative" val="1"/>
-              </a:ext>
-            </a:extLst>
-          </p:cNvPr>
-          <p:cNvCxnSpPr/>
-          <p:nvPr/>
-        </p:nvCxnSpPr>
-        <p:spPr>
-          <a:xfrm>
-            <a:off x="7215187" y="3658001"/>
-            <a:ext cx="1184672" cy="0"/>
-          </a:xfrm>
-          <a:prstGeom prst="straightConnector1">
-            <a:avLst/>
-          </a:prstGeom>
-          <a:noFill/>
-          <a:ln w="88900" cap="rnd" cmpd="sng">
-            <a:solidFill>
-              <a:srgbClr val="FFFF00"/>
-            </a:solidFill>
-            <a:prstDash val="solid"/>
-            <a:miter/>
-            <a:headEnd type="stealth" w="med" len="med"/>
-            <a:tailEnd type="none" w="med" len="med"/>
-          </a:ln>
-        </p:spPr>
-      </p:cxnSp>
-      <p:sp>
-        <p:nvSpPr>
-          <p:cNvPr id="359" name="Shape 359">
-            <a:extLst>
-              <a:ext uri="{FF2B5EF4-FFF2-40B4-BE49-F238E27FC236}">
-                <a16:creationId xmlns:a16="http://schemas.microsoft.com/office/drawing/2014/main" id="{527D86C9-7B19-9136-F116-BC31B34FA6C7}"/>
-              </a:ext>
-            </a:extLst>
-          </p:cNvPr>
-          <p:cNvSpPr txBox="1"/>
-          <p:nvPr/>
-        </p:nvSpPr>
-        <p:spPr>
-          <a:xfrm>
-            <a:off x="8448676" y="2572152"/>
-            <a:ext cx="1638299" cy="1638299"/>
-          </a:xfrm>
-          <a:prstGeom prst="rect">
-            <a:avLst/>
-          </a:prstGeom>
-          <a:noFill/>
-          <a:ln w="76200" cap="rnd" cmpd="sng">
-            <a:solidFill>
-              <a:srgbClr val="00FF00"/>
-            </a:solidFill>
-            <a:prstDash val="solid"/>
-            <a:miter/>
-            <a:headEnd type="none" w="med" len="med"/>
-            <a:tailEnd type="none" w="med" len="med"/>
-          </a:ln>
-        </p:spPr>
-        <p:txBody>
-          <a:bodyPr lIns="0" tIns="0" rIns="0" bIns="0" anchor="ctr" anchorCtr="0">
-            <a:noAutofit/>
-          </a:bodyPr>
-          <a:lstStyle/>
-          <a:p>
-            <a:pPr algn="ctr">
-              <a:buClr>
-                <a:schemeClr val="lt1"/>
-              </a:buClr>
-              <a:buSzPct val="25000"/>
-            </a:pPr>
-            <a:r>
-              <a:rPr lang="en-US" sz="2400">
-                <a:solidFill>
-                  <a:schemeClr val="lt1"/>
-                </a:solidFill>
-                <a:latin typeface="Arial" charset="0"/>
-                <a:ea typeface="Arial" charset="0"/>
-                <a:cs typeface="Arial" charset="0"/>
-                <a:sym typeface="Cabin"/>
-              </a:rPr>
-              <a:t>Secondary</a:t>
-            </a:r>
-          </a:p>
-          <a:p>
-            <a:pPr algn="ctr">
-              <a:buClr>
-                <a:schemeClr val="lt1"/>
-              </a:buClr>
-              <a:buSzPct val="25000"/>
-            </a:pPr>
-            <a:r>
-              <a:rPr lang="en-US" sz="2400">
-                <a:solidFill>
-                  <a:schemeClr val="lt1"/>
-                </a:solidFill>
-                <a:latin typeface="Arial" charset="0"/>
-                <a:ea typeface="Arial" charset="0"/>
-                <a:cs typeface="Arial" charset="0"/>
-                <a:sym typeface="Cabin"/>
-              </a:rPr>
-              <a:t>Memory</a:t>
-            </a:r>
-          </a:p>
-        </p:txBody>
-      </p:sp>
       <p:grpSp>
         <p:nvGrpSpPr>
-          <p:cNvPr id="7" name="Group 6" descr="Within the memory there is a stick figure of the programmer writing the instructions to provide to the CPU.  In this case this instruction is Python – &quot;if x &lt; 3 : print&quot;&#13;&#10;">
+          <p:cNvPr id="7" name="Group 6" descr="Within the memory there is a stick figure of the programmer writing the instructions to provide to the CPU.  In this case this instruction is in Python and is &quot;if x&lt;3: print&quot;&#13;&#10;&#13;&#10;">
             <a:extLst>
               <a:ext uri="{FF2B5EF4-FFF2-40B4-BE49-F238E27FC236}">
-                <a16:creationId xmlns:a16="http://schemas.microsoft.com/office/drawing/2014/main" id="{D64E99A1-FC0A-1C3C-1A5B-1566C26F43AF}"/>
+                <a16:creationId xmlns:a16="http://schemas.microsoft.com/office/drawing/2014/main" id="{88B0A6AF-1194-E257-27F3-F3F07116F335}"/>
               </a:ext>
             </a:extLst>
           </p:cNvPr>
@@ -20519,10 +20823,10 @@
         </p:nvGrpSpPr>
         <p:grpSpPr>
           <a:xfrm>
-            <a:off x="5161358" y="3176078"/>
-            <a:ext cx="2668192" cy="1391839"/>
-            <a:chOff x="5161358" y="3176078"/>
-            <a:chExt cx="2668192" cy="1391839"/>
+            <a:off x="5161358" y="2971800"/>
+            <a:ext cx="2668192" cy="1596117"/>
+            <a:chOff x="5161358" y="2971800"/>
+            <a:chExt cx="2668192" cy="1596117"/>
           </a:xfrm>
         </p:grpSpPr>
         <p:pic>
@@ -20530,7 +20834,7 @@
             <p:cNvPr id="3" name="Shape 391" descr="A stick figure of a human alluding to the fact that our input is in the form of a program which we write and is loaded in to the main memory for execution.">
               <a:extLst>
                 <a:ext uri="{FF2B5EF4-FFF2-40B4-BE49-F238E27FC236}">
-                  <a16:creationId xmlns:a16="http://schemas.microsoft.com/office/drawing/2014/main" id="{FF6ECBF9-8EDF-72FD-8DD9-8F431B068A1C}"/>
+                  <a16:creationId xmlns:a16="http://schemas.microsoft.com/office/drawing/2014/main" id="{D99B6CA4-3F16-AE21-C7E7-0D76E75CB18B}"/>
                 </a:ext>
               </a:extLst>
             </p:cNvPr>
@@ -20560,10 +20864,10 @@
         </p:pic>
         <p:sp>
           <p:nvSpPr>
-            <p:cNvPr id="6" name="Shape 392">
+            <p:cNvPr id="2" name="Shape 410">
               <a:extLst>
                 <a:ext uri="{FF2B5EF4-FFF2-40B4-BE49-F238E27FC236}">
-                  <a16:creationId xmlns:a16="http://schemas.microsoft.com/office/drawing/2014/main" id="{AC983F26-B977-B745-936D-58D64B67B2AE}"/>
+                  <a16:creationId xmlns:a16="http://schemas.microsoft.com/office/drawing/2014/main" id="{6366FC01-2DDD-4C21-0D9A-55E17FBB5B7C}"/>
                 </a:ext>
               </a:extLst>
             </p:cNvPr>
@@ -20572,13 +20876,13 @@
           </p:nvSpPr>
           <p:spPr>
             <a:xfrm>
-              <a:off x="5753101" y="3176078"/>
+              <a:off x="5753101" y="2971800"/>
               <a:ext cx="2076449" cy="952500"/>
             </a:xfrm>
             <a:prstGeom prst="wedgeEllipseCallout">
               <a:avLst>
-                <a:gd name="adj1" fmla="val -17963"/>
-                <a:gd name="adj2" fmla="val 84303"/>
+                <a:gd name="adj1" fmla="val -23159"/>
+                <a:gd name="adj2" fmla="val 71986"/>
               </a:avLst>
             </a:prstGeom>
             <a:solidFill>
@@ -20624,45 +20928,10 @@
           </p:txBody>
         </p:sp>
       </p:grpSp>
-      <p:cxnSp>
-        <p:nvCxnSpPr>
-          <p:cNvPr id="363" name="Shape 363">
-            <a:extLst>
-              <a:ext uri="{FF2B5EF4-FFF2-40B4-BE49-F238E27FC236}">
-                <a16:creationId xmlns:a16="http://schemas.microsoft.com/office/drawing/2014/main" id="{95C5F559-014F-F11F-E06E-8B36F4EFA3B2}"/>
-              </a:ext>
-              <a:ext uri="{C183D7F6-B498-43B3-948B-1728B52AA6E4}">
-                <adec:decorative xmlns:adec="http://schemas.microsoft.com/office/drawing/2017/decorative" val="1"/>
-              </a:ext>
-            </a:extLst>
-          </p:cNvPr>
-          <p:cNvCxnSpPr/>
-          <p:nvPr/>
-        </p:nvCxnSpPr>
-        <p:spPr>
-          <a:xfrm flipH="1">
-            <a:off x="7241382" y="2904336"/>
-            <a:ext cx="1171574" cy="13096"/>
-          </a:xfrm>
-          <a:prstGeom prst="straightConnector1">
-            <a:avLst/>
-          </a:prstGeom>
-          <a:noFill/>
-          <a:ln w="88900" cap="rnd" cmpd="sng">
-            <a:solidFill>
-              <a:srgbClr val="FFFF00"/>
-            </a:solidFill>
-            <a:prstDash val="solid"/>
-            <a:miter/>
-            <a:headEnd type="stealth" w="med" len="med"/>
-            <a:tailEnd type="none" w="med" len="med"/>
-          </a:ln>
-        </p:spPr>
-      </p:cxnSp>
     </p:spTree>
     <p:extLst>
       <p:ext uri="{BB962C8B-B14F-4D97-AF65-F5344CB8AC3E}">
-        <p14:creationId xmlns:p14="http://schemas.microsoft.com/office/powerpoint/2010/main" val="1991571979"/>
+        <p14:creationId xmlns:p14="http://schemas.microsoft.com/office/powerpoint/2010/main" val="4170182697"/>
       </p:ext>
     </p:extLst>
   </p:cSld>
@@ -20688,7 +20957,7 @@
         <p:cNvPr id="1" name="Shape 354">
           <a:extLst>
             <a:ext uri="{FF2B5EF4-FFF2-40B4-BE49-F238E27FC236}">
-              <a16:creationId xmlns:a16="http://schemas.microsoft.com/office/drawing/2014/main" id="{D8F0ADDD-1C82-910B-B4BA-669F9510A9DF}"/>
+              <a16:creationId xmlns:a16="http://schemas.microsoft.com/office/drawing/2014/main" id="{93062E5A-8889-9404-1B24-B789E53AB254}"/>
             </a:ext>
           </a:extLst>
         </p:cNvPr>
@@ -20708,7 +20977,7 @@
           <p:cNvPr id="4" name="Title 3">
             <a:extLst>
               <a:ext uri="{FF2B5EF4-FFF2-40B4-BE49-F238E27FC236}">
-                <a16:creationId xmlns:a16="http://schemas.microsoft.com/office/drawing/2014/main" id="{5CDC8454-04A8-DB3A-EAAF-CE67329FB90D}"/>
+                <a16:creationId xmlns:a16="http://schemas.microsoft.com/office/drawing/2014/main" id="{6884DC15-FF15-7D44-3338-6220525AEB93}"/>
               </a:ext>
             </a:extLst>
           </p:cNvPr>
@@ -20742,145 +21011,12 @@
           </a:p>
         </p:txBody>
       </p:sp>
-      <p:sp>
-        <p:nvSpPr>
-          <p:cNvPr id="356" name="Shape 356">
-            <a:extLst>
-              <a:ext uri="{FF2B5EF4-FFF2-40B4-BE49-F238E27FC236}">
-                <a16:creationId xmlns:a16="http://schemas.microsoft.com/office/drawing/2014/main" id="{48545ABA-E5D5-95C2-4CFE-EFBBAE34B9E2}"/>
-              </a:ext>
-            </a:extLst>
-          </p:cNvPr>
-          <p:cNvSpPr txBox="1"/>
-          <p:nvPr/>
-        </p:nvSpPr>
-        <p:spPr>
-          <a:xfrm>
-            <a:off x="2124076" y="1591077"/>
-            <a:ext cx="1638299" cy="1638299"/>
-          </a:xfrm>
-          <a:prstGeom prst="rect">
-            <a:avLst/>
-          </a:prstGeom>
-          <a:noFill/>
-          <a:ln w="76200" cap="rnd" cmpd="sng">
-            <a:solidFill>
-              <a:srgbClr val="00FF00"/>
-            </a:solidFill>
-            <a:prstDash val="solid"/>
-            <a:miter/>
-            <a:headEnd type="none" w="med" len="med"/>
-            <a:tailEnd type="none" w="med" len="med"/>
-          </a:ln>
-        </p:spPr>
-        <p:txBody>
-          <a:bodyPr lIns="0" tIns="0" rIns="0" bIns="0" anchor="ctr" anchorCtr="0">
-            <a:noAutofit/>
-          </a:bodyPr>
-          <a:lstStyle/>
-          <a:p>
-            <a:pPr algn="ctr">
-              <a:buClr>
-                <a:schemeClr val="lt1"/>
-              </a:buClr>
-              <a:buSzPct val="25000"/>
-            </a:pPr>
-            <a:r>
-              <a:rPr lang="en-US" sz="2400">
-                <a:solidFill>
-                  <a:schemeClr val="lt1"/>
-                </a:solidFill>
-                <a:latin typeface="Arial" charset="0"/>
-                <a:ea typeface="Arial" charset="0"/>
-                <a:cs typeface="Arial" charset="0"/>
-                <a:sym typeface="Cabin"/>
-              </a:rPr>
-              <a:t>Input</a:t>
-            </a:r>
-          </a:p>
-          <a:p>
-            <a:pPr algn="ctr">
-              <a:buClr>
-                <a:schemeClr val="lt1"/>
-              </a:buClr>
-              <a:buSzPct val="25000"/>
-            </a:pPr>
-            <a:r>
-              <a:rPr lang="en-US" sz="2400">
-                <a:solidFill>
-                  <a:schemeClr val="lt1"/>
-                </a:solidFill>
-                <a:latin typeface="Arial" charset="0"/>
-                <a:ea typeface="Arial" charset="0"/>
-                <a:cs typeface="Arial" charset="0"/>
-                <a:sym typeface="Cabin"/>
-              </a:rPr>
-              <a:t>and Output</a:t>
-            </a:r>
-          </a:p>
-          <a:p>
-            <a:pPr algn="ctr">
-              <a:buClr>
-                <a:schemeClr val="lt1"/>
-              </a:buClr>
-              <a:buSzPct val="25000"/>
-            </a:pPr>
-            <a:r>
-              <a:rPr lang="en-US" sz="2400">
-                <a:solidFill>
-                  <a:schemeClr val="lt1"/>
-                </a:solidFill>
-                <a:latin typeface="Arial" charset="0"/>
-                <a:ea typeface="Arial" charset="0"/>
-                <a:cs typeface="Arial" charset="0"/>
-                <a:sym typeface="Cabin"/>
-              </a:rPr>
-              <a:t>Devices</a:t>
-            </a:r>
-          </a:p>
-        </p:txBody>
-      </p:sp>
-      <p:cxnSp>
-        <p:nvCxnSpPr>
-          <p:cNvPr id="360" name="Shape 360">
-            <a:extLst>
-              <a:ext uri="{FF2B5EF4-FFF2-40B4-BE49-F238E27FC236}">
-                <a16:creationId xmlns:a16="http://schemas.microsoft.com/office/drawing/2014/main" id="{7BF37C51-83E5-789A-1EDD-53DB71E0A243}"/>
-              </a:ext>
-              <a:ext uri="{C183D7F6-B498-43B3-948B-1728B52AA6E4}">
-                <adec:decorative xmlns:adec="http://schemas.microsoft.com/office/drawing/2017/decorative" val="1"/>
-              </a:ext>
-            </a:extLst>
-          </p:cNvPr>
-          <p:cNvCxnSpPr/>
-          <p:nvPr/>
-        </p:nvCxnSpPr>
-        <p:spPr>
-          <a:xfrm flipH="1">
-            <a:off x="3773089" y="2436420"/>
-            <a:ext cx="794147" cy="13096"/>
-          </a:xfrm>
-          <a:prstGeom prst="straightConnector1">
-            <a:avLst/>
-          </a:prstGeom>
-          <a:noFill/>
-          <a:ln w="88900" cap="rnd" cmpd="sng">
-            <a:solidFill>
-              <a:srgbClr val="FFFF00"/>
-            </a:solidFill>
-            <a:prstDash val="solid"/>
-            <a:miter/>
-            <a:headEnd type="stealth" w="med" len="med"/>
-            <a:tailEnd type="stealth" w="med" len="med"/>
-          </a:ln>
-        </p:spPr>
-      </p:cxnSp>
       <p:grpSp>
         <p:nvGrpSpPr>
-          <p:cNvPr id="5" name="Group 4" descr="Software is stored in the main memory of the computer and then read from that main memory and executed by the CPU&#13;&#10;">
+          <p:cNvPr id="8" name="Group 7" descr="A block diagram of a CPU with I/O devices, a CPU, memory and secondary memory.  Software is stored in the memory of the computer and then read from that main memory and executed by the CPU.&#13;&#10;">
             <a:extLst>
               <a:ext uri="{FF2B5EF4-FFF2-40B4-BE49-F238E27FC236}">
-                <a16:creationId xmlns:a16="http://schemas.microsoft.com/office/drawing/2014/main" id="{B8351A8B-2F7C-5CE3-4DFB-0EF1EE7AB8E0}"/>
+                <a16:creationId xmlns:a16="http://schemas.microsoft.com/office/drawing/2014/main" id="{53448935-7363-58E8-7785-4320406412D7}"/>
               </a:ext>
             </a:extLst>
           </p:cNvPr>
@@ -20889,18 +21025,18 @@
         </p:nvGrpSpPr>
         <p:grpSpPr>
           <a:xfrm>
-            <a:off x="4572001" y="1029102"/>
-            <a:ext cx="2590799" cy="4867274"/>
-            <a:chOff x="4572001" y="1029102"/>
-            <a:chExt cx="2590799" cy="4867274"/>
+            <a:off x="2124076" y="1029102"/>
+            <a:ext cx="9020755" cy="4966330"/>
+            <a:chOff x="2124076" y="1029102"/>
+            <a:chExt cx="9020755" cy="4966330"/>
           </a:xfrm>
         </p:grpSpPr>
         <p:sp>
           <p:nvSpPr>
-            <p:cNvPr id="355" name="Shape 355">
+            <p:cNvPr id="356" name="Shape 356">
               <a:extLst>
                 <a:ext uri="{FF2B5EF4-FFF2-40B4-BE49-F238E27FC236}">
-                  <a16:creationId xmlns:a16="http://schemas.microsoft.com/office/drawing/2014/main" id="{78ABF434-99A5-FBEB-9452-C42954BD99E6}"/>
+                  <a16:creationId xmlns:a16="http://schemas.microsoft.com/office/drawing/2014/main" id="{32D5F5EC-8065-CEFA-E85A-ED98E3EF8445}"/>
                 </a:ext>
               </a:extLst>
             </p:cNvPr>
@@ -20909,81 +21045,8 @@
           </p:nvSpPr>
           <p:spPr>
             <a:xfrm>
-              <a:off x="4572001" y="1029102"/>
-              <a:ext cx="2590799" cy="4867274"/>
-            </a:xfrm>
-            <a:prstGeom prst="rect">
-              <a:avLst/>
-            </a:prstGeom>
-            <a:noFill/>
-            <a:ln w="76200" cap="rnd" cmpd="sng">
-              <a:solidFill>
-                <a:srgbClr val="00FFFF"/>
-              </a:solidFill>
-              <a:prstDash val="solid"/>
-              <a:miter/>
-              <a:headEnd type="none" w="med" len="med"/>
-              <a:tailEnd type="none" w="med" len="med"/>
-            </a:ln>
-          </p:spPr>
-          <p:txBody>
-            <a:bodyPr lIns="0" tIns="0" rIns="0" bIns="0" anchor="t" anchorCtr="0">
-              <a:noAutofit/>
-            </a:bodyPr>
-            <a:lstStyle/>
-            <a:p>
-              <a:pPr>
-                <a:spcBef>
-                  <a:spcPts val="750"/>
-                </a:spcBef>
-                <a:buClr>
-                  <a:srgbClr val="FF00FF"/>
-                </a:buClr>
-                <a:buSzPct val="25000"/>
-              </a:pPr>
-              <a:r>
-                <a:rPr lang="en-US" sz="2400">
-                  <a:solidFill>
-                    <a:srgbClr val="FF00FF"/>
-                  </a:solidFill>
-                  <a:latin typeface="Arial" charset="0"/>
-                  <a:ea typeface="Arial" charset="0"/>
-                  <a:cs typeface="Arial" charset="0"/>
-                  <a:sym typeface="Cabin"/>
-                </a:rPr>
-                <a:t>  </a:t>
-              </a:r>
-              <a:r>
-                <a:rPr lang="en-US" sz="2400">
-                  <a:solidFill>
-                    <a:srgbClr val="00FFFF"/>
-                  </a:solidFill>
-                  <a:latin typeface="Arial" charset="0"/>
-                  <a:ea typeface="Arial" charset="0"/>
-                  <a:cs typeface="Arial" charset="0"/>
-                  <a:sym typeface="Cabin"/>
-                </a:rPr>
-                <a:t>Software</a:t>
-              </a:r>
-            </a:p>
-          </p:txBody>
-        </p:sp>
-        <p:sp>
-          <p:nvSpPr>
-            <p:cNvPr id="357" name="Shape 357">
-              <a:extLst>
-                <a:ext uri="{FF2B5EF4-FFF2-40B4-BE49-F238E27FC236}">
-                  <a16:creationId xmlns:a16="http://schemas.microsoft.com/office/drawing/2014/main" id="{D8A52E73-D122-5CE5-A6CA-C9EFB9995390}"/>
-                </a:ext>
-              </a:extLst>
-            </p:cNvPr>
-            <p:cNvSpPr txBox="1"/>
-            <p:nvPr/>
-          </p:nvSpPr>
-          <p:spPr>
-            <a:xfrm>
-              <a:off x="5048251" y="1667277"/>
-              <a:ext cx="1600199" cy="1485899"/>
+              <a:off x="2124076" y="1591077"/>
+              <a:ext cx="1638299" cy="1638299"/>
             </a:xfrm>
             <a:prstGeom prst="rect">
               <a:avLst/>
@@ -21021,7 +21084,7 @@
                   <a:cs typeface="Arial" charset="0"/>
                   <a:sym typeface="Cabin"/>
                 </a:rPr>
-                <a:t>Central</a:t>
+                <a:t>Input</a:t>
               </a:r>
             </a:p>
             <a:p>
@@ -21041,7 +21104,7 @@
                   <a:cs typeface="Arial" charset="0"/>
                   <a:sym typeface="Cabin"/>
                 </a:rPr>
-                <a:t>Processing</a:t>
+                <a:t>and Output</a:t>
               </a:r>
             </a:p>
             <a:p>
@@ -21061,17 +21124,427 @@
                   <a:cs typeface="Arial" charset="0"/>
                   <a:sym typeface="Cabin"/>
                 </a:rPr>
-                <a:t>Unit</a:t>
+                <a:t>Devices</a:t>
               </a:r>
             </a:p>
           </p:txBody>
         </p:sp>
+        <p:cxnSp>
+          <p:nvCxnSpPr>
+            <p:cNvPr id="360" name="Shape 360">
+              <a:extLst>
+                <a:ext uri="{FF2B5EF4-FFF2-40B4-BE49-F238E27FC236}">
+                  <a16:creationId xmlns:a16="http://schemas.microsoft.com/office/drawing/2014/main" id="{3597C711-9E26-7A73-59E3-70ADAC0CC80B}"/>
+                </a:ext>
+                <a:ext uri="{C183D7F6-B498-43B3-948B-1728B52AA6E4}">
+                  <adec:decorative xmlns:adec="http://schemas.microsoft.com/office/drawing/2017/decorative" val="1"/>
+                </a:ext>
+              </a:extLst>
+            </p:cNvPr>
+            <p:cNvCxnSpPr/>
+            <p:nvPr/>
+          </p:nvCxnSpPr>
+          <p:spPr>
+            <a:xfrm flipH="1">
+              <a:off x="3773089" y="2436420"/>
+              <a:ext cx="794147" cy="13096"/>
+            </a:xfrm>
+            <a:prstGeom prst="straightConnector1">
+              <a:avLst/>
+            </a:prstGeom>
+            <a:noFill/>
+            <a:ln w="88900" cap="rnd" cmpd="sng">
+              <a:solidFill>
+                <a:srgbClr val="FFFF00"/>
+              </a:solidFill>
+              <a:prstDash val="solid"/>
+              <a:miter/>
+              <a:headEnd type="stealth" w="med" len="med"/>
+              <a:tailEnd type="stealth" w="med" len="med"/>
+            </a:ln>
+          </p:spPr>
+        </p:cxnSp>
+        <p:grpSp>
+          <p:nvGrpSpPr>
+            <p:cNvPr id="5" name="Group 4" descr="Software is stored in the main memory of the computer and then read from that main memory and executed by the CPU&#13;&#10;">
+              <a:extLst>
+                <a:ext uri="{FF2B5EF4-FFF2-40B4-BE49-F238E27FC236}">
+                  <a16:creationId xmlns:a16="http://schemas.microsoft.com/office/drawing/2014/main" id="{D0F217FC-F87C-6806-75DE-5EA4B0B6D2EC}"/>
+                </a:ext>
+              </a:extLst>
+            </p:cNvPr>
+            <p:cNvGrpSpPr/>
+            <p:nvPr/>
+          </p:nvGrpSpPr>
+          <p:grpSpPr>
+            <a:xfrm>
+              <a:off x="4572001" y="1029102"/>
+              <a:ext cx="2590799" cy="4867274"/>
+              <a:chOff x="4572001" y="1029102"/>
+              <a:chExt cx="2590799" cy="4867274"/>
+            </a:xfrm>
+          </p:grpSpPr>
+          <p:sp>
+            <p:nvSpPr>
+              <p:cNvPr id="355" name="Shape 355">
+                <a:extLst>
+                  <a:ext uri="{FF2B5EF4-FFF2-40B4-BE49-F238E27FC236}">
+                    <a16:creationId xmlns:a16="http://schemas.microsoft.com/office/drawing/2014/main" id="{59B9397D-8D81-3B42-BFC6-E07A7F9F1809}"/>
+                  </a:ext>
+                </a:extLst>
+              </p:cNvPr>
+              <p:cNvSpPr txBox="1"/>
+              <p:nvPr/>
+            </p:nvSpPr>
+            <p:spPr>
+              <a:xfrm>
+                <a:off x="4572001" y="1029102"/>
+                <a:ext cx="2590799" cy="4867274"/>
+              </a:xfrm>
+              <a:prstGeom prst="rect">
+                <a:avLst/>
+              </a:prstGeom>
+              <a:noFill/>
+              <a:ln w="76200" cap="rnd" cmpd="sng">
+                <a:solidFill>
+                  <a:srgbClr val="00FFFF"/>
+                </a:solidFill>
+                <a:prstDash val="solid"/>
+                <a:miter/>
+                <a:headEnd type="none" w="med" len="med"/>
+                <a:tailEnd type="none" w="med" len="med"/>
+              </a:ln>
+            </p:spPr>
+            <p:txBody>
+              <a:bodyPr lIns="0" tIns="0" rIns="0" bIns="0" anchor="t" anchorCtr="0">
+                <a:noAutofit/>
+              </a:bodyPr>
+              <a:lstStyle/>
+              <a:p>
+                <a:pPr>
+                  <a:spcBef>
+                    <a:spcPts val="750"/>
+                  </a:spcBef>
+                  <a:buClr>
+                    <a:srgbClr val="FF00FF"/>
+                  </a:buClr>
+                  <a:buSzPct val="25000"/>
+                </a:pPr>
+                <a:r>
+                  <a:rPr lang="en-US" sz="2400">
+                    <a:solidFill>
+                      <a:srgbClr val="FF00FF"/>
+                    </a:solidFill>
+                    <a:latin typeface="Arial" charset="0"/>
+                    <a:ea typeface="Arial" charset="0"/>
+                    <a:cs typeface="Arial" charset="0"/>
+                    <a:sym typeface="Cabin"/>
+                  </a:rPr>
+                  <a:t>  </a:t>
+                </a:r>
+                <a:r>
+                  <a:rPr lang="en-US" sz="2400">
+                    <a:solidFill>
+                      <a:srgbClr val="00FFFF"/>
+                    </a:solidFill>
+                    <a:latin typeface="Arial" charset="0"/>
+                    <a:ea typeface="Arial" charset="0"/>
+                    <a:cs typeface="Arial" charset="0"/>
+                    <a:sym typeface="Cabin"/>
+                  </a:rPr>
+                  <a:t>Software</a:t>
+                </a:r>
+              </a:p>
+            </p:txBody>
+          </p:sp>
+          <p:sp>
+            <p:nvSpPr>
+              <p:cNvPr id="357" name="Shape 357">
+                <a:extLst>
+                  <a:ext uri="{FF2B5EF4-FFF2-40B4-BE49-F238E27FC236}">
+                    <a16:creationId xmlns:a16="http://schemas.microsoft.com/office/drawing/2014/main" id="{9D9EBFDF-AEEB-A766-5806-7AD7DD349771}"/>
+                  </a:ext>
+                </a:extLst>
+              </p:cNvPr>
+              <p:cNvSpPr txBox="1"/>
+              <p:nvPr/>
+            </p:nvSpPr>
+            <p:spPr>
+              <a:xfrm>
+                <a:off x="5048251" y="1667277"/>
+                <a:ext cx="1600199" cy="1485899"/>
+              </a:xfrm>
+              <a:prstGeom prst="rect">
+                <a:avLst/>
+              </a:prstGeom>
+              <a:noFill/>
+              <a:ln w="76200" cap="rnd" cmpd="sng">
+                <a:solidFill>
+                  <a:srgbClr val="00FF00"/>
+                </a:solidFill>
+                <a:prstDash val="solid"/>
+                <a:miter/>
+                <a:headEnd type="none" w="med" len="med"/>
+                <a:tailEnd type="none" w="med" len="med"/>
+              </a:ln>
+            </p:spPr>
+            <p:txBody>
+              <a:bodyPr lIns="0" tIns="0" rIns="0" bIns="0" anchor="ctr" anchorCtr="0">
+                <a:noAutofit/>
+              </a:bodyPr>
+              <a:lstStyle/>
+              <a:p>
+                <a:pPr algn="ctr">
+                  <a:buClr>
+                    <a:schemeClr val="lt1"/>
+                  </a:buClr>
+                  <a:buSzPct val="25000"/>
+                </a:pPr>
+                <a:r>
+                  <a:rPr lang="en-US" sz="2400">
+                    <a:solidFill>
+                      <a:schemeClr val="lt1"/>
+                    </a:solidFill>
+                    <a:latin typeface="Arial" charset="0"/>
+                    <a:ea typeface="Arial" charset="0"/>
+                    <a:cs typeface="Arial" charset="0"/>
+                    <a:sym typeface="Cabin"/>
+                  </a:rPr>
+                  <a:t>Central</a:t>
+                </a:r>
+              </a:p>
+              <a:p>
+                <a:pPr algn="ctr">
+                  <a:buClr>
+                    <a:schemeClr val="lt1"/>
+                  </a:buClr>
+                  <a:buSzPct val="25000"/>
+                </a:pPr>
+                <a:r>
+                  <a:rPr lang="en-US" sz="2400">
+                    <a:solidFill>
+                      <a:schemeClr val="lt1"/>
+                    </a:solidFill>
+                    <a:latin typeface="Arial" charset="0"/>
+                    <a:ea typeface="Arial" charset="0"/>
+                    <a:cs typeface="Arial" charset="0"/>
+                    <a:sym typeface="Cabin"/>
+                  </a:rPr>
+                  <a:t>Processing</a:t>
+                </a:r>
+              </a:p>
+              <a:p>
+                <a:pPr algn="ctr">
+                  <a:buClr>
+                    <a:schemeClr val="lt1"/>
+                  </a:buClr>
+                  <a:buSzPct val="25000"/>
+                </a:pPr>
+                <a:r>
+                  <a:rPr lang="en-US" sz="2400">
+                    <a:solidFill>
+                      <a:schemeClr val="lt1"/>
+                    </a:solidFill>
+                    <a:latin typeface="Arial" charset="0"/>
+                    <a:ea typeface="Arial" charset="0"/>
+                    <a:cs typeface="Arial" charset="0"/>
+                    <a:sym typeface="Cabin"/>
+                  </a:rPr>
+                  <a:t>Unit</a:t>
+                </a:r>
+              </a:p>
+            </p:txBody>
+          </p:sp>
+          <p:sp>
+            <p:nvSpPr>
+              <p:cNvPr id="358" name="Shape 358">
+                <a:extLst>
+                  <a:ext uri="{FF2B5EF4-FFF2-40B4-BE49-F238E27FC236}">
+                    <a16:creationId xmlns:a16="http://schemas.microsoft.com/office/drawing/2014/main" id="{ECE74ED3-CDD7-A15B-FB22-128872CE56D6}"/>
+                  </a:ext>
+                </a:extLst>
+              </p:cNvPr>
+              <p:cNvSpPr txBox="1"/>
+              <p:nvPr/>
+            </p:nvSpPr>
+            <p:spPr>
+              <a:xfrm>
+                <a:off x="5048250" y="3943752"/>
+                <a:ext cx="1628775" cy="1600199"/>
+              </a:xfrm>
+              <a:prstGeom prst="rect">
+                <a:avLst/>
+              </a:prstGeom>
+              <a:noFill/>
+              <a:ln w="76200" cap="rnd" cmpd="sng">
+                <a:solidFill>
+                  <a:srgbClr val="00FF00"/>
+                </a:solidFill>
+                <a:prstDash val="solid"/>
+                <a:miter/>
+                <a:headEnd type="none" w="med" len="med"/>
+                <a:tailEnd type="none" w="med" len="med"/>
+              </a:ln>
+            </p:spPr>
+            <p:txBody>
+              <a:bodyPr lIns="0" tIns="0" rIns="0" bIns="0" anchor="ctr" anchorCtr="0">
+                <a:noAutofit/>
+              </a:bodyPr>
+              <a:lstStyle/>
+              <a:p>
+                <a:pPr algn="ctr">
+                  <a:buClr>
+                    <a:schemeClr val="lt1"/>
+                  </a:buClr>
+                  <a:buSzPct val="25000"/>
+                </a:pPr>
+                <a:r>
+                  <a:rPr lang="en-US" sz="2400">
+                    <a:solidFill>
+                      <a:schemeClr val="lt1"/>
+                    </a:solidFill>
+                    <a:latin typeface="Arial" charset="0"/>
+                    <a:ea typeface="Arial" charset="0"/>
+                    <a:cs typeface="Arial" charset="0"/>
+                    <a:sym typeface="Cabin"/>
+                  </a:rPr>
+                  <a:t>Main</a:t>
+                </a:r>
+              </a:p>
+              <a:p>
+                <a:pPr algn="ctr">
+                  <a:buClr>
+                    <a:schemeClr val="lt1"/>
+                  </a:buClr>
+                  <a:buSzPct val="25000"/>
+                </a:pPr>
+                <a:r>
+                  <a:rPr lang="en-US" sz="2400">
+                    <a:solidFill>
+                      <a:schemeClr val="lt1"/>
+                    </a:solidFill>
+                    <a:latin typeface="Arial" charset="0"/>
+                    <a:ea typeface="Arial" charset="0"/>
+                    <a:cs typeface="Arial" charset="0"/>
+                    <a:sym typeface="Cabin"/>
+                  </a:rPr>
+                  <a:t>Memory</a:t>
+                </a:r>
+              </a:p>
+            </p:txBody>
+          </p:sp>
+          <p:cxnSp>
+            <p:nvCxnSpPr>
+              <p:cNvPr id="361" name="Shape 361">
+                <a:extLst>
+                  <a:ext uri="{FF2B5EF4-FFF2-40B4-BE49-F238E27FC236}">
+                    <a16:creationId xmlns:a16="http://schemas.microsoft.com/office/drawing/2014/main" id="{F2B105F8-1B8C-7DEE-29DA-998B72722DC4}"/>
+                  </a:ext>
+                  <a:ext uri="{C183D7F6-B498-43B3-948B-1728B52AA6E4}">
+                    <adec:decorative xmlns:adec="http://schemas.microsoft.com/office/drawing/2017/decorative" val="1"/>
+                  </a:ext>
+                </a:extLst>
+              </p:cNvPr>
+              <p:cNvCxnSpPr/>
+              <p:nvPr/>
+            </p:nvCxnSpPr>
+            <p:spPr>
+              <a:xfrm rot="10800000">
+                <a:off x="5543550" y="3174607"/>
+                <a:ext cx="0" cy="728663"/>
+              </a:xfrm>
+              <a:prstGeom prst="straightConnector1">
+                <a:avLst/>
+              </a:prstGeom>
+              <a:noFill/>
+              <a:ln w="88900" cap="rnd" cmpd="sng">
+                <a:solidFill>
+                  <a:srgbClr val="FFFF00"/>
+                </a:solidFill>
+                <a:prstDash val="solid"/>
+                <a:miter/>
+                <a:headEnd type="stealth" w="med" len="med"/>
+                <a:tailEnd type="none" w="med" len="med"/>
+              </a:ln>
+            </p:spPr>
+          </p:cxnSp>
+          <p:cxnSp>
+            <p:nvCxnSpPr>
+              <p:cNvPr id="362" name="Shape 362">
+                <a:extLst>
+                  <a:ext uri="{FF2B5EF4-FFF2-40B4-BE49-F238E27FC236}">
+                    <a16:creationId xmlns:a16="http://schemas.microsoft.com/office/drawing/2014/main" id="{FBAC4CFC-920B-7772-B9DE-B694920A41DB}"/>
+                  </a:ext>
+                  <a:ext uri="{C183D7F6-B498-43B3-948B-1728B52AA6E4}">
+                    <adec:decorative xmlns:adec="http://schemas.microsoft.com/office/drawing/2017/decorative" val="1"/>
+                  </a:ext>
+                </a:extLst>
+              </p:cNvPr>
+              <p:cNvCxnSpPr/>
+              <p:nvPr/>
+            </p:nvCxnSpPr>
+            <p:spPr>
+              <a:xfrm>
+                <a:off x="6259115" y="3187704"/>
+                <a:ext cx="0" cy="689372"/>
+              </a:xfrm>
+              <a:prstGeom prst="straightConnector1">
+                <a:avLst/>
+              </a:prstGeom>
+              <a:noFill/>
+              <a:ln w="88900" cap="rnd" cmpd="sng">
+                <a:solidFill>
+                  <a:srgbClr val="FFFF00"/>
+                </a:solidFill>
+                <a:prstDash val="solid"/>
+                <a:miter/>
+                <a:headEnd type="stealth" w="med" len="med"/>
+                <a:tailEnd type="none" w="med" len="med"/>
+              </a:ln>
+            </p:spPr>
+          </p:cxnSp>
+        </p:grpSp>
+        <p:cxnSp>
+          <p:nvCxnSpPr>
+            <p:cNvPr id="364" name="Shape 364">
+              <a:extLst>
+                <a:ext uri="{FF2B5EF4-FFF2-40B4-BE49-F238E27FC236}">
+                  <a16:creationId xmlns:a16="http://schemas.microsoft.com/office/drawing/2014/main" id="{18AF3F99-5C71-ADB0-A09A-C042449CCE0E}"/>
+                </a:ext>
+                <a:ext uri="{C183D7F6-B498-43B3-948B-1728B52AA6E4}">
+                  <adec:decorative xmlns:adec="http://schemas.microsoft.com/office/drawing/2017/decorative" val="1"/>
+                </a:ext>
+              </a:extLst>
+            </p:cNvPr>
+            <p:cNvCxnSpPr/>
+            <p:nvPr/>
+          </p:nvCxnSpPr>
+          <p:spPr>
+            <a:xfrm>
+              <a:off x="7215187" y="3658001"/>
+              <a:ext cx="1184672" cy="0"/>
+            </a:xfrm>
+            <a:prstGeom prst="straightConnector1">
+              <a:avLst/>
+            </a:prstGeom>
+            <a:noFill/>
+            <a:ln w="88900" cap="rnd" cmpd="sng">
+              <a:solidFill>
+                <a:srgbClr val="FFFF00"/>
+              </a:solidFill>
+              <a:prstDash val="solid"/>
+              <a:miter/>
+              <a:headEnd type="stealth" w="med" len="med"/>
+              <a:tailEnd type="none" w="med" len="med"/>
+            </a:ln>
+          </p:spPr>
+        </p:cxnSp>
         <p:sp>
           <p:nvSpPr>
-            <p:cNvPr id="358" name="Shape 358">
+            <p:cNvPr id="359" name="Shape 359">
               <a:extLst>
                 <a:ext uri="{FF2B5EF4-FFF2-40B4-BE49-F238E27FC236}">
-                  <a16:creationId xmlns:a16="http://schemas.microsoft.com/office/drawing/2014/main" id="{A1B36257-B584-BEF1-1A01-999EB2747D3B}"/>
+                  <a16:creationId xmlns:a16="http://schemas.microsoft.com/office/drawing/2014/main" id="{D7356493-6910-5883-B4C2-C34A474F08C8}"/>
                 </a:ext>
               </a:extLst>
             </p:cNvPr>
@@ -21080,8 +21553,8 @@
           </p:nvSpPr>
           <p:spPr>
             <a:xfrm>
-              <a:off x="5048250" y="3943752"/>
-              <a:ext cx="1628775" cy="1600199"/>
+              <a:off x="8448676" y="2572152"/>
+              <a:ext cx="1638299" cy="1638299"/>
             </a:xfrm>
             <a:prstGeom prst="rect">
               <a:avLst/>
@@ -21119,7 +21592,7 @@
                   <a:cs typeface="Arial" charset="0"/>
                   <a:sym typeface="Cabin"/>
                 </a:rPr>
-                <a:t>Main</a:t>
+                <a:t>Secondary</a:t>
               </a:r>
             </a:p>
             <a:p>
@@ -21146,10 +21619,10 @@
         </p:sp>
         <p:cxnSp>
           <p:nvCxnSpPr>
-            <p:cNvPr id="361" name="Shape 361">
+            <p:cNvPr id="363" name="Shape 363">
               <a:extLst>
                 <a:ext uri="{FF2B5EF4-FFF2-40B4-BE49-F238E27FC236}">
-                  <a16:creationId xmlns:a16="http://schemas.microsoft.com/office/drawing/2014/main" id="{9675E2A7-7FCF-5576-570E-5118C06287A1}"/>
+                  <a16:creationId xmlns:a16="http://schemas.microsoft.com/office/drawing/2014/main" id="{1E31595D-4A16-BD3B-1786-F9BEE08192E7}"/>
                 </a:ext>
                 <a:ext uri="{C183D7F6-B498-43B3-948B-1728B52AA6E4}">
                   <adec:decorative xmlns:adec="http://schemas.microsoft.com/office/drawing/2017/decorative" val="1"/>
@@ -21160,9 +21633,9 @@
             <p:nvPr/>
           </p:nvCxnSpPr>
           <p:spPr>
-            <a:xfrm rot="10800000">
-              <a:off x="5543550" y="3174607"/>
-              <a:ext cx="0" cy="728663"/>
+            <a:xfrm flipH="1">
+              <a:off x="7241382" y="2904336"/>
+              <a:ext cx="1171574" cy="13096"/>
             </a:xfrm>
             <a:prstGeom prst="straightConnector1">
               <a:avLst/>
@@ -21179,48 +21652,45 @@
             </a:ln>
           </p:spPr>
         </p:cxnSp>
-        <p:cxnSp>
-          <p:nvCxnSpPr>
-            <p:cNvPr id="362" name="Shape 362">
+        <p:sp>
+          <p:nvSpPr>
+            <p:cNvPr id="6" name="TextBox 5">
               <a:extLst>
                 <a:ext uri="{FF2B5EF4-FFF2-40B4-BE49-F238E27FC236}">
-                  <a16:creationId xmlns:a16="http://schemas.microsoft.com/office/drawing/2014/main" id="{4EAE6301-450D-4622-4C56-DB5693E0091C}"/>
-                </a:ext>
-                <a:ext uri="{C183D7F6-B498-43B3-948B-1728B52AA6E4}">
-                  <adec:decorative xmlns:adec="http://schemas.microsoft.com/office/drawing/2017/decorative" val="1"/>
+                  <a16:creationId xmlns:a16="http://schemas.microsoft.com/office/drawing/2014/main" id="{9F80008F-A4FA-D7E8-10F5-C67287B505C1}"/>
                 </a:ext>
               </a:extLst>
             </p:cNvPr>
-            <p:cNvCxnSpPr/>
+            <p:cNvSpPr txBox="1"/>
             <p:nvPr/>
-          </p:nvCxnSpPr>
+          </p:nvSpPr>
           <p:spPr>
             <a:xfrm>
-              <a:off x="6259115" y="3187704"/>
-              <a:ext cx="0" cy="689372"/>
+              <a:off x="10960100" y="5626100"/>
+              <a:ext cx="184731" cy="369332"/>
             </a:xfrm>
-            <a:prstGeom prst="straightConnector1">
+            <a:prstGeom prst="rect">
               <a:avLst/>
             </a:prstGeom>
             <a:noFill/>
-            <a:ln w="88900" cap="rnd" cmpd="sng">
-              <a:solidFill>
-                <a:srgbClr val="FFFF00"/>
-              </a:solidFill>
-              <a:prstDash val="solid"/>
-              <a:miter/>
-              <a:headEnd type="stealth" w="med" len="med"/>
-              <a:tailEnd type="none" w="med" len="med"/>
-            </a:ln>
           </p:spPr>
-        </p:cxnSp>
+          <p:txBody>
+            <a:bodyPr wrap="none" rtlCol="0">
+              <a:spAutoFit/>
+            </a:bodyPr>
+            <a:lstStyle/>
+            <a:p>
+              <a:endParaRPr lang="en-US" dirty="0"/>
+            </a:p>
+          </p:txBody>
+        </p:sp>
       </p:grpSp>
       <p:sp>
         <p:nvSpPr>
           <p:cNvPr id="366" name="Shape 366" descr="There is a thought bubble where the CPU is thinking, “What Next?”&#13;&#10;">
             <a:extLst>
               <a:ext uri="{FF2B5EF4-FFF2-40B4-BE49-F238E27FC236}">
-                <a16:creationId xmlns:a16="http://schemas.microsoft.com/office/drawing/2014/main" id="{D2559973-1E23-6D91-A272-57E882B9F30D}"/>
+                <a16:creationId xmlns:a16="http://schemas.microsoft.com/office/drawing/2014/main" id="{763EC332-7A47-2271-DA17-DAEEA8F92B4C}"/>
               </a:ext>
             </a:extLst>
           </p:cNvPr>
@@ -21229,7 +21699,7 @@
         </p:nvSpPr>
         <p:spPr>
           <a:xfrm>
-            <a:off x="6962775" y="1226508"/>
+            <a:off x="6791325" y="1212858"/>
             <a:ext cx="1352550" cy="952500"/>
           </a:xfrm>
           <a:prstGeom prst="wedgeEllipseCallout">
@@ -21295,125 +21765,12 @@
           </a:p>
         </p:txBody>
       </p:sp>
-      <p:cxnSp>
-        <p:nvCxnSpPr>
-          <p:cNvPr id="364" name="Shape 364">
-            <a:extLst>
-              <a:ext uri="{FF2B5EF4-FFF2-40B4-BE49-F238E27FC236}">
-                <a16:creationId xmlns:a16="http://schemas.microsoft.com/office/drawing/2014/main" id="{2C53AC17-89ED-0A5D-BE7A-A3B3354AAD44}"/>
-              </a:ext>
-              <a:ext uri="{C183D7F6-B498-43B3-948B-1728B52AA6E4}">
-                <adec:decorative xmlns:adec="http://schemas.microsoft.com/office/drawing/2017/decorative" val="1"/>
-              </a:ext>
-            </a:extLst>
-          </p:cNvPr>
-          <p:cNvCxnSpPr/>
-          <p:nvPr/>
-        </p:nvCxnSpPr>
-        <p:spPr>
-          <a:xfrm>
-            <a:off x="7215187" y="3658001"/>
-            <a:ext cx="1184672" cy="0"/>
-          </a:xfrm>
-          <a:prstGeom prst="straightConnector1">
-            <a:avLst/>
-          </a:prstGeom>
-          <a:noFill/>
-          <a:ln w="88900" cap="rnd" cmpd="sng">
-            <a:solidFill>
-              <a:srgbClr val="FFFF00"/>
-            </a:solidFill>
-            <a:prstDash val="solid"/>
-            <a:miter/>
-            <a:headEnd type="stealth" w="med" len="med"/>
-            <a:tailEnd type="none" w="med" len="med"/>
-          </a:ln>
-        </p:spPr>
-      </p:cxnSp>
-      <p:sp>
-        <p:nvSpPr>
-          <p:cNvPr id="359" name="Shape 359">
-            <a:extLst>
-              <a:ext uri="{FF2B5EF4-FFF2-40B4-BE49-F238E27FC236}">
-                <a16:creationId xmlns:a16="http://schemas.microsoft.com/office/drawing/2014/main" id="{1120FF52-697A-4AC7-537E-6D293BBCDF27}"/>
-              </a:ext>
-            </a:extLst>
-          </p:cNvPr>
-          <p:cNvSpPr txBox="1"/>
-          <p:nvPr/>
-        </p:nvSpPr>
-        <p:spPr>
-          <a:xfrm>
-            <a:off x="8448676" y="2572152"/>
-            <a:ext cx="1638299" cy="1638299"/>
-          </a:xfrm>
-          <a:prstGeom prst="rect">
-            <a:avLst/>
-          </a:prstGeom>
-          <a:noFill/>
-          <a:ln w="76200" cap="rnd" cmpd="sng">
-            <a:solidFill>
-              <a:srgbClr val="00FF00"/>
-            </a:solidFill>
-            <a:prstDash val="solid"/>
-            <a:miter/>
-            <a:headEnd type="none" w="med" len="med"/>
-            <a:tailEnd type="none" w="med" len="med"/>
-          </a:ln>
-        </p:spPr>
-        <p:txBody>
-          <a:bodyPr lIns="0" tIns="0" rIns="0" bIns="0" anchor="ctr" anchorCtr="0">
-            <a:noAutofit/>
-          </a:bodyPr>
-          <a:lstStyle/>
-          <a:p>
-            <a:pPr algn="ctr">
-              <a:buClr>
-                <a:schemeClr val="lt1"/>
-              </a:buClr>
-              <a:buSzPct val="25000"/>
-            </a:pPr>
-            <a:r>
-              <a:rPr lang="en-US" sz="2400">
-                <a:solidFill>
-                  <a:schemeClr val="lt1"/>
-                </a:solidFill>
-                <a:latin typeface="Arial" charset="0"/>
-                <a:ea typeface="Arial" charset="0"/>
-                <a:cs typeface="Arial" charset="0"/>
-                <a:sym typeface="Cabin"/>
-              </a:rPr>
-              <a:t>Secondary</a:t>
-            </a:r>
-          </a:p>
-          <a:p>
-            <a:pPr algn="ctr">
-              <a:buClr>
-                <a:schemeClr val="lt1"/>
-              </a:buClr>
-              <a:buSzPct val="25000"/>
-            </a:pPr>
-            <a:r>
-              <a:rPr lang="en-US" sz="2400">
-                <a:solidFill>
-                  <a:schemeClr val="lt1"/>
-                </a:solidFill>
-                <a:latin typeface="Arial" charset="0"/>
-                <a:ea typeface="Arial" charset="0"/>
-                <a:cs typeface="Arial" charset="0"/>
-                <a:sym typeface="Cabin"/>
-              </a:rPr>
-              <a:t>Memory</a:t>
-            </a:r>
-          </a:p>
-        </p:txBody>
-      </p:sp>
       <p:grpSp>
         <p:nvGrpSpPr>
           <p:cNvPr id="7" name="Group 6" descr="&#13;&#10;Within the memory there is a stick figure of the programmer writing the instructions to provide to the CPU.  In this case this instruction has been translated into two machine language instructions and is &quot;01001001&#13;&#10; 00111001&quot;&#13;&#10;">
             <a:extLst>
               <a:ext uri="{FF2B5EF4-FFF2-40B4-BE49-F238E27FC236}">
-                <a16:creationId xmlns:a16="http://schemas.microsoft.com/office/drawing/2014/main" id="{C64D8DAE-E38F-B346-B0B7-B3D7B8F67EA7}"/>
+                <a16:creationId xmlns:a16="http://schemas.microsoft.com/office/drawing/2014/main" id="{6838DFFB-B94E-5211-4F7C-95B2DD51C51A}"/>
               </a:ext>
             </a:extLst>
           </p:cNvPr>
@@ -21433,7 +21790,7 @@
             <p:cNvPr id="3" name="Shape 391" descr="A stick figure of a human alluding to the fact that our input is in the form of a program which we write and is loaded in to the main memory for execution.">
               <a:extLst>
                 <a:ext uri="{FF2B5EF4-FFF2-40B4-BE49-F238E27FC236}">
-                  <a16:creationId xmlns:a16="http://schemas.microsoft.com/office/drawing/2014/main" id="{58359785-3C63-F7C0-5EFF-63435540331C}"/>
+                  <a16:creationId xmlns:a16="http://schemas.microsoft.com/office/drawing/2014/main" id="{06504125-1EA9-3F78-AD74-DC16C3BCAC07}"/>
                 </a:ext>
               </a:extLst>
             </p:cNvPr>
@@ -21466,7 +21823,7 @@
             <p:cNvPr id="2" name="Shape 410">
               <a:extLst>
                 <a:ext uri="{FF2B5EF4-FFF2-40B4-BE49-F238E27FC236}">
-                  <a16:creationId xmlns:a16="http://schemas.microsoft.com/office/drawing/2014/main" id="{AC9B22EA-A51B-7DE3-1411-C3754D29877B}"/>
+                  <a16:creationId xmlns:a16="http://schemas.microsoft.com/office/drawing/2014/main" id="{CEFD99D3-9B16-2346-D13F-31A8345F43CB}"/>
                 </a:ext>
               </a:extLst>
             </p:cNvPr>
@@ -21547,45 +21904,10 @@
           </p:txBody>
         </p:sp>
       </p:grpSp>
-      <p:cxnSp>
-        <p:nvCxnSpPr>
-          <p:cNvPr id="363" name="Shape 363">
-            <a:extLst>
-              <a:ext uri="{FF2B5EF4-FFF2-40B4-BE49-F238E27FC236}">
-                <a16:creationId xmlns:a16="http://schemas.microsoft.com/office/drawing/2014/main" id="{43BCECE8-1697-ACC1-CEC4-C187AEF607A0}"/>
-              </a:ext>
-              <a:ext uri="{C183D7F6-B498-43B3-948B-1728B52AA6E4}">
-                <adec:decorative xmlns:adec="http://schemas.microsoft.com/office/drawing/2017/decorative" val="1"/>
-              </a:ext>
-            </a:extLst>
-          </p:cNvPr>
-          <p:cNvCxnSpPr/>
-          <p:nvPr/>
-        </p:nvCxnSpPr>
-        <p:spPr>
-          <a:xfrm flipH="1">
-            <a:off x="7241382" y="2904336"/>
-            <a:ext cx="1171574" cy="13096"/>
-          </a:xfrm>
-          <a:prstGeom prst="straightConnector1">
-            <a:avLst/>
-          </a:prstGeom>
-          <a:noFill/>
-          <a:ln w="88900" cap="rnd" cmpd="sng">
-            <a:solidFill>
-              <a:srgbClr val="FFFF00"/>
-            </a:solidFill>
-            <a:prstDash val="solid"/>
-            <a:miter/>
-            <a:headEnd type="stealth" w="med" len="med"/>
-            <a:tailEnd type="none" w="med" len="med"/>
-          </a:ln>
-        </p:spPr>
-      </p:cxnSp>
     </p:spTree>
     <p:extLst>
       <p:ext uri="{BB962C8B-B14F-4D97-AF65-F5344CB8AC3E}">
-        <p14:creationId xmlns:p14="http://schemas.microsoft.com/office/powerpoint/2010/main" val="3640013445"/>
+        <p14:creationId xmlns:p14="http://schemas.microsoft.com/office/powerpoint/2010/main" val="1796655980"/>
       </p:ext>
     </p:extLst>
   </p:cSld>
@@ -21797,42 +22119,6 @@
           </a:prstGeom>
         </p:spPr>
       </p:pic>
-      <p:pic>
-        <p:nvPicPr>
-          <p:cNvPr id="4" name="Picture 3" descr="A picture of the layout of the Intel 4004 taken with a microscope showing gates and wires.">
-            <a:extLst>
-              <a:ext uri="{FF2B5EF4-FFF2-40B4-BE49-F238E27FC236}">
-                <a16:creationId xmlns:a16="http://schemas.microsoft.com/office/drawing/2014/main" id="{D8B63393-942B-6354-EEC9-F207E43C76F6}"/>
-              </a:ext>
-            </a:extLst>
-          </p:cNvPr>
-          <p:cNvPicPr>
-            <a:picLocks noChangeAspect="1"/>
-          </p:cNvPicPr>
-          <p:nvPr/>
-        </p:nvPicPr>
-        <p:blipFill>
-          <a:blip r:embed="rId3" cstate="print">
-            <a:extLst>
-              <a:ext uri="{28A0092B-C50C-407E-A947-70E740481C1C}">
-                <a14:useLocalDpi xmlns:a14="http://schemas.microsoft.com/office/drawing/2010/main"/>
-              </a:ext>
-            </a:extLst>
-          </a:blip>
-          <a:stretch>
-            <a:fillRect/>
-          </a:stretch>
-        </p:blipFill>
-        <p:spPr>
-          <a:xfrm>
-            <a:off x="6096000" y="1253331"/>
-            <a:ext cx="5840723" cy="4351338"/>
-          </a:xfrm>
-          <a:prstGeom prst="rect">
-            <a:avLst/>
-          </a:prstGeom>
-        </p:spPr>
-      </p:pic>
       <p:sp>
         <p:nvSpPr>
           <p:cNvPr id="10" name="Right Arrow 9">
@@ -21882,6 +22168,42 @@
           </a:p>
         </p:txBody>
       </p:sp>
+      <p:pic>
+        <p:nvPicPr>
+          <p:cNvPr id="4" name="Picture 3" descr="A picture of the layout of the Intel 4004 taken with a microscope showing gates and wires.">
+            <a:extLst>
+              <a:ext uri="{FF2B5EF4-FFF2-40B4-BE49-F238E27FC236}">
+                <a16:creationId xmlns:a16="http://schemas.microsoft.com/office/drawing/2014/main" id="{D8B63393-942B-6354-EEC9-F207E43C76F6}"/>
+              </a:ext>
+            </a:extLst>
+          </p:cNvPr>
+          <p:cNvPicPr>
+            <a:picLocks noChangeAspect="1"/>
+          </p:cNvPicPr>
+          <p:nvPr/>
+        </p:nvPicPr>
+        <p:blipFill>
+          <a:blip r:embed="rId3" cstate="print">
+            <a:extLst>
+              <a:ext uri="{28A0092B-C50C-407E-A947-70E740481C1C}">
+                <a14:useLocalDpi xmlns:a14="http://schemas.microsoft.com/office/drawing/2010/main"/>
+              </a:ext>
+            </a:extLst>
+          </a:blip>
+          <a:stretch>
+            <a:fillRect/>
+          </a:stretch>
+        </p:blipFill>
+        <p:spPr>
+          <a:xfrm>
+            <a:off x="6096000" y="1253331"/>
+            <a:ext cx="5840723" cy="4351338"/>
+          </a:xfrm>
+          <a:prstGeom prst="rect">
+            <a:avLst/>
+          </a:prstGeom>
+        </p:spPr>
+      </p:pic>
     </p:spTree>
     <p:extLst>
       <p:ext uri="{BB962C8B-B14F-4D97-AF65-F5344CB8AC3E}">
